--- a/deliverables/PEAK_Formal_Loan_Application_Presentation.pptx
+++ b/deliverables/PEAK_Formal_Loan_Application_Presentation.pptx
@@ -15,9 +15,15 @@
     <p:sldId id="260" r:id="rId9"/>
     <p:sldId id="261" r:id="rId10"/>
     <p:sldId id="262" r:id="rId11"/>
+    <p:sldId id="267" r:id="rId25"/>
+    <p:sldId id="268" r:id="rId26"/>
     <p:sldId id="263" r:id="rId12"/>
-    <p:sldId id="267" r:id="rId25"/>
+    <p:sldId id="269" r:id="rId27"/>
+    <p:sldId id="270" r:id="rId28"/>
+    <p:sldId id="271" r:id="rId29"/>
+    <p:sldId id="272" r:id="rId30"/>
     <p:sldId id="264" r:id="rId13"/>
+    <p:sldId id="273" r:id="rId31"/>
     <p:sldId id="265" r:id="rId14"/>
     <p:sldId id="266" r:id="rId15"/>
   </p:sldIdLst>
@@ -174,7 +180,7 @@
   <c:date1904 val="0"/>
   <c:roundedCorners val="0"/>
   <c:chart>
-    <c:autoTitleDeleted val="0"/>
+    <c:autoTitleDeleted val="1"/>
     <c:plotArea>
       <c:layout/>
       <c:doughnutChart>
@@ -197,7 +203,7 @@
             <c:idx val="0"/>
             <c:spPr>
               <a:solidFill>
-                <a:srgbClr val="0B3B3E"/>
+                <a:srgbClr val="F0A61E"/>
               </a:solidFill>
             </c:spPr>
           </c:dPt>
@@ -205,7 +211,7 @@
             <c:idx val="1"/>
             <c:spPr>
               <a:solidFill>
-                <a:srgbClr val="F0A61E"/>
+                <a:srgbClr val="BFE3DF"/>
               </a:solidFill>
             </c:spPr>
           </c:dPt>
@@ -288,7 +294,7 @@
         <a:lstStyle/>
         <a:p>
           <a:pPr>
-            <a:defRPr sz="2000">
+            <a:defRPr sz="1800">
               <a:solidFill>
                 <a:srgbClr val="FFFFFF"/>
               </a:solidFill>
@@ -321,7 +327,7 @@
 <c:chartSpace xmlns:c="http://schemas.openxmlformats.org/drawingml/2006/chart" xmlns:a="http://schemas.openxmlformats.org/drawingml/2006/main" xmlns:r="http://schemas.openxmlformats.org/officeDocument/2006/relationships">
   <c:date1904 val="0"/>
   <c:chart>
-    <c:autoTitleDeleted val="0"/>
+    <c:autoTitleDeleted val="1"/>
     <c:plotArea>
       <c:barChart>
         <c:barDir val="col"/>
@@ -335,41 +341,47 @@
               <c:strCache>
                 <c:ptCount val="1"/>
                 <c:pt idx="0">
-                  <c:v>2023 (USD)</c:v>
+                  <c:v>2024 (USD)</c:v>
                 </c:pt>
               </c:strCache>
             </c:strRef>
           </c:tx>
           <c:spPr>
             <a:solidFill>
-              <a:srgbClr val="BFE3DF"/>
+              <a:srgbClr val="8A8A85"/>
             </a:solidFill>
           </c:spPr>
           <c:cat>
             <c:strRef>
-              <c:f>Sheet1!$A$2:$A$3</c:f>
+              <c:f>Sheet1!$A$2:$A$4</c:f>
               <c:strCache>
-                <c:ptCount val="2"/>
+                <c:ptCount val="3"/>
                 <c:pt idx="0">
                   <c:v>Total assets</c:v>
                 </c:pt>
                 <c:pt idx="1">
-                  <c:v>Surplus for the year</c:v>
+                  <c:v>Loans &amp; advances</c:v>
+                </c:pt>
+                <c:pt idx="2">
+                  <c:v>Accumulated funds</c:v>
                 </c:pt>
               </c:strCache>
             </c:strRef>
           </c:cat>
           <c:val>
             <c:numRef>
-              <c:f>Sheet1!$B$2:$B$3</c:f>
+              <c:f>Sheet1!$B$2:$B$4</c:f>
               <c:numCache>
                 <c:formatCode>General</c:formatCode>
-                <c:ptCount val="2"/>
+                <c:ptCount val="3"/>
                 <c:pt idx="0">
-                  <c:v>234491</c:v>
+                  <c:v>391763</c:v>
                 </c:pt>
                 <c:pt idx="1">
-                  <c:v>21165</c:v>
+                  <c:v>141382</c:v>
+                </c:pt>
+                <c:pt idx="2">
+                  <c:v>102410</c:v>
                 </c:pt>
               </c:numCache>
             </c:numRef>
@@ -384,7 +396,7 @@
               <c:strCache>
                 <c:ptCount val="1"/>
                 <c:pt idx="0">
-                  <c:v>2024 (USD)</c:v>
+                  <c:v>2025 (USD)</c:v>
                 </c:pt>
               </c:strCache>
             </c:strRef>
@@ -396,29 +408,35 @@
           </c:spPr>
           <c:cat>
             <c:strRef>
-              <c:f>Sheet1!$A$2:$A$3</c:f>
+              <c:f>Sheet1!$A$2:$A$4</c:f>
               <c:strCache>
-                <c:ptCount val="2"/>
+                <c:ptCount val="3"/>
                 <c:pt idx="0">
                   <c:v>Total assets</c:v>
                 </c:pt>
                 <c:pt idx="1">
-                  <c:v>Surplus for the year</c:v>
+                  <c:v>Loans &amp; advances</c:v>
+                </c:pt>
+                <c:pt idx="2">
+                  <c:v>Accumulated funds</c:v>
                 </c:pt>
               </c:strCache>
             </c:strRef>
           </c:cat>
           <c:val>
             <c:numRef>
-              <c:f>Sheet1!$C$2:$C$3</c:f>
+              <c:f>Sheet1!$C$2:$C$4</c:f>
               <c:numCache>
                 <c:formatCode>General</c:formatCode>
-                <c:ptCount val="2"/>
+                <c:ptCount val="3"/>
                 <c:pt idx="0">
-                  <c:v>391763</c:v>
+                  <c:v>495531</c:v>
                 </c:pt>
                 <c:pt idx="1">
-                  <c:v>84600</c:v>
+                  <c:v>217485</c:v>
+                </c:pt>
+                <c:pt idx="2">
+                  <c:v>176628</c:v>
                 </c:pt>
               </c:numCache>
             </c:numRef>
@@ -431,7 +449,7 @@
             <a:lstStyle/>
             <a:p>
               <a:pPr>
-                <a:defRPr sz="1600">
+                <a:defRPr sz="1300">
                   <a:solidFill>
                     <a:srgbClr val="FFFFFF"/>
                   </a:solidFill>
@@ -465,7 +483,7 @@
           <a:lstStyle/>
           <a:p>
             <a:pPr>
-              <a:defRPr sz="2000">
+              <a:defRPr sz="1600">
                 <a:solidFill>
                   <a:srgbClr val="FFFFFF"/>
                 </a:solidFill>
@@ -493,7 +511,7 @@
           <a:lstStyle/>
           <a:p>
             <a:pPr>
-              <a:defRPr sz="1600">
+              <a:defRPr sz="1400">
                 <a:solidFill>
                   <a:srgbClr val="FFFFFF"/>
                 </a:solidFill>
@@ -513,7 +531,7 @@
         <a:lstStyle/>
         <a:p>
           <a:pPr>
-            <a:defRPr sz="2000">
+            <a:defRPr sz="1600">
               <a:solidFill>
                 <a:srgbClr val="FFFFFF"/>
               </a:solidFill>
@@ -522,6 +540,402 @@
         </a:p>
       </c:txPr>
     </c:legend>
+    <c:dispBlanksAs val="gap"/>
+  </c:chart>
+  <c:txPr>
+    <a:bodyPr/>
+    <a:lstStyle/>
+    <a:p>
+      <a:pPr>
+        <a:defRPr sz="1800"/>
+      </a:pPr>
+      <a:endParaRPr lang="en-US"/>
+    </a:p>
+  </c:txPr>
+  <c:externalData r:id="rId1">
+    <c:autoUpdate val="0"/>
+  </c:externalData>
+</c:chartSpace>
+</file>
+
+<file path=ppt/charts/chart3.xml><?xml version="1.0" encoding="utf-8"?>
+<c:chartSpace xmlns:c="http://schemas.openxmlformats.org/drawingml/2006/chart" xmlns:a="http://schemas.openxmlformats.org/drawingml/2006/main" xmlns:r="http://schemas.openxmlformats.org/officeDocument/2006/relationships">
+  <c:date1904 val="0"/>
+  <c:chart>
+    <c:autoTitleDeleted val="1"/>
+    <c:plotArea>
+      <c:barChart>
+        <c:barDir val="col"/>
+        <c:grouping val="clustered"/>
+        <c:ser>
+          <c:idx val="0"/>
+          <c:order val="0"/>
+          <c:tx>
+            <c:strRef>
+              <c:f>Sheet1!$B$1</c:f>
+              <c:strCache>
+                <c:ptCount val="1"/>
+                <c:pt idx="0">
+                  <c:v>Borrowings ÷ accumulated funds</c:v>
+                </c:pt>
+              </c:strCache>
+            </c:strRef>
+          </c:tx>
+          <c:dPt>
+            <c:idx val="0"/>
+            <c:spPr>
+              <a:solidFill>
+                <a:srgbClr val="8A8A85"/>
+              </a:solidFill>
+            </c:spPr>
+          </c:dPt>
+          <c:dPt>
+            <c:idx val="1"/>
+            <c:spPr>
+              <a:solidFill>
+                <a:srgbClr val="F0A61E"/>
+              </a:solidFill>
+            </c:spPr>
+          </c:dPt>
+          <c:dPt>
+            <c:idx val="2"/>
+            <c:spPr>
+              <a:solidFill>
+                <a:srgbClr val="BFE3DF"/>
+              </a:solidFill>
+            </c:spPr>
+          </c:dPt>
+          <c:dPt>
+            <c:idx val="3"/>
+            <c:spPr>
+              <a:solidFill>
+                <a:srgbClr val="6B6B68"/>
+              </a:solidFill>
+            </c:spPr>
+          </c:dPt>
+          <c:cat>
+            <c:strRef>
+              <c:f>Sheet1!$A$2:$A$5</c:f>
+              <c:strCache>
+                <c:ptCount val="4"/>
+                <c:pt idx="0">
+                  <c:v>End-2024
+(actual)</c:v>
+                </c:pt>
+                <c:pt idx="1">
+                  <c:v>End-2025
+(actual)</c:v>
+                </c:pt>
+                <c:pt idx="2">
+                  <c:v>+ $280k facility
+(pro forma)</c:v>
+                </c:pt>
+                <c:pt idx="3">
+                  <c:v>If granted at
+2024 position</c:v>
+                </c:pt>
+              </c:strCache>
+            </c:strRef>
+          </c:cat>
+          <c:val>
+            <c:numRef>
+              <c:f>Sheet1!$B$2:$B$5</c:f>
+              <c:numCache>
+                <c:formatCode>General</c:formatCode>
+                <c:ptCount val="4"/>
+                <c:pt idx="0">
+                  <c:v>2.3</c:v>
+                </c:pt>
+                <c:pt idx="1">
+                  <c:v>1.4</c:v>
+                </c:pt>
+                <c:pt idx="2">
+                  <c:v>3.0</c:v>
+                </c:pt>
+                <c:pt idx="3">
+                  <c:v>5.0</c:v>
+                </c:pt>
+              </c:numCache>
+            </c:numRef>
+          </c:val>
+        </c:ser>
+        <c:dLbls>
+          <c:numFmt formatCode="0.0&quot;x&quot;" sourceLinked="0"/>
+          <c:txPr>
+            <a:bodyPr/>
+            <a:lstStyle/>
+            <a:p>
+              <a:pPr>
+                <a:defRPr sz="1800" b="1">
+                  <a:solidFill>
+                    <a:srgbClr val="FFFFFF"/>
+                  </a:solidFill>
+                </a:defRPr>
+              </a:pPr>
+            </a:p>
+          </c:txPr>
+          <c:showLegendKey val="0"/>
+          <c:showVal val="1"/>
+          <c:showCatName val="0"/>
+          <c:showSerName val="0"/>
+          <c:showPercent val="0"/>
+          <c:showBubbleSize val="0"/>
+          <c:showLeaderLines val="1"/>
+        </c:dLbls>
+        <c:axId val="-2068027336"/>
+        <c:axId val="-2113994440"/>
+      </c:barChart>
+      <c:catAx>
+        <c:axId val="-2068027336"/>
+        <c:scaling>
+          <c:orientation val="minMax"/>
+        </c:scaling>
+        <c:delete val="0"/>
+        <c:axPos val="b"/>
+        <c:majorTickMark val="out"/>
+        <c:minorTickMark val="none"/>
+        <c:tickLblPos val="nextTo"/>
+        <c:txPr>
+          <a:bodyPr/>
+          <a:lstStyle/>
+          <a:p>
+            <a:pPr>
+              <a:defRPr sz="1600">
+                <a:solidFill>
+                  <a:srgbClr val="FFFFFF"/>
+                </a:solidFill>
+              </a:defRPr>
+            </a:pPr>
+          </a:p>
+        </c:txPr>
+        <c:crossAx val="-2113994440"/>
+        <c:crosses val="autoZero"/>
+        <c:auto val="1"/>
+        <c:lblAlgn val="ctr"/>
+        <c:lblOffset val="100"/>
+        <c:noMultiLvlLbl val="0"/>
+      </c:catAx>
+      <c:valAx>
+        <c:axId val="-2113994440"/>
+        <c:scaling/>
+        <c:delete val="0"/>
+        <c:axPos val="l"/>
+        <c:majorTickMark val="out"/>
+        <c:minorTickMark val="none"/>
+        <c:tickLblPos val="nextTo"/>
+        <c:txPr>
+          <a:bodyPr/>
+          <a:lstStyle/>
+          <a:p>
+            <a:pPr>
+              <a:defRPr sz="1400">
+                <a:solidFill>
+                  <a:srgbClr val="FFFFFF"/>
+                </a:solidFill>
+              </a:defRPr>
+            </a:pPr>
+          </a:p>
+        </c:txPr>
+        <c:crossAx val="-2068027336"/>
+        <c:crosses val="autoZero"/>
+      </c:valAx>
+    </c:plotArea>
+    <c:dispBlanksAs val="gap"/>
+  </c:chart>
+  <c:txPr>
+    <a:bodyPr/>
+    <a:lstStyle/>
+    <a:p>
+      <a:pPr>
+        <a:defRPr sz="1800"/>
+      </a:pPr>
+      <a:endParaRPr lang="en-US"/>
+    </a:p>
+  </c:txPr>
+  <c:externalData r:id="rId1">
+    <c:autoUpdate val="0"/>
+  </c:externalData>
+</c:chartSpace>
+</file>
+
+<file path=ppt/charts/chart4.xml><?xml version="1.0" encoding="utf-8"?>
+<c:chartSpace xmlns:c="http://schemas.openxmlformats.org/drawingml/2006/chart" xmlns:a="http://schemas.openxmlformats.org/drawingml/2006/main" xmlns:r="http://schemas.openxmlformats.org/officeDocument/2006/relationships">
+  <c:date1904 val="0"/>
+  <c:chart>
+    <c:autoTitleDeleted val="1"/>
+    <c:plotArea>
+      <c:barChart>
+        <c:barDir val="col"/>
+        <c:grouping val="clustered"/>
+        <c:ser>
+          <c:idx val="0"/>
+          <c:order val="0"/>
+          <c:tx>
+            <c:strRef>
+              <c:f>Sheet1!$B$1</c:f>
+              <c:strCache>
+                <c:ptCount val="1"/>
+                <c:pt idx="0">
+                  <c:v>Overdue amount (USD)</c:v>
+                </c:pt>
+              </c:strCache>
+            </c:strRef>
+          </c:tx>
+          <c:dPt>
+            <c:idx val="0"/>
+            <c:spPr>
+              <a:solidFill>
+                <a:srgbClr val="F0A61E"/>
+              </a:solidFill>
+            </c:spPr>
+          </c:dPt>
+          <c:dPt>
+            <c:idx val="1"/>
+            <c:spPr>
+              <a:solidFill>
+                <a:srgbClr val="F0A61E"/>
+              </a:solidFill>
+            </c:spPr>
+          </c:dPt>
+          <c:dPt>
+            <c:idx val="2"/>
+            <c:spPr>
+              <a:solidFill>
+                <a:srgbClr val="F0A61E"/>
+              </a:solidFill>
+            </c:spPr>
+          </c:dPt>
+          <c:dPt>
+            <c:idx val="3"/>
+            <c:spPr>
+              <a:solidFill>
+                <a:srgbClr val="F0A61E"/>
+              </a:solidFill>
+            </c:spPr>
+          </c:dPt>
+          <c:cat>
+            <c:strRef>
+              <c:f>Sheet1!$A$2:$A$5</c:f>
+              <c:strCache>
+                <c:ptCount val="4"/>
+                <c:pt idx="0">
+                  <c:v>1–30 days</c:v>
+                </c:pt>
+                <c:pt idx="1">
+                  <c:v>31–60 days</c:v>
+                </c:pt>
+                <c:pt idx="2">
+                  <c:v>61–90 days</c:v>
+                </c:pt>
+                <c:pt idx="3">
+                  <c:v>90+ days</c:v>
+                </c:pt>
+              </c:strCache>
+            </c:strRef>
+          </c:cat>
+          <c:val>
+            <c:numRef>
+              <c:f>Sheet1!$B$2:$B$5</c:f>
+              <c:numCache>
+                <c:formatCode>General</c:formatCode>
+                <c:ptCount val="4"/>
+                <c:pt idx="0">
+                  <c:v>85</c:v>
+                </c:pt>
+                <c:pt idx="1">
+                  <c:v>1075</c:v>
+                </c:pt>
+                <c:pt idx="2">
+                  <c:v>690</c:v>
+                </c:pt>
+                <c:pt idx="3">
+                  <c:v>0</c:v>
+                </c:pt>
+              </c:numCache>
+            </c:numRef>
+          </c:val>
+        </c:ser>
+        <c:dLbls>
+          <c:numFmt formatCode="&quot;$&quot;#,##0" sourceLinked="0"/>
+          <c:txPr>
+            <a:bodyPr/>
+            <a:lstStyle/>
+            <a:p>
+              <a:pPr>
+                <a:defRPr sz="1600" b="1">
+                  <a:solidFill>
+                    <a:srgbClr val="FFFFFF"/>
+                  </a:solidFill>
+                </a:defRPr>
+              </a:pPr>
+            </a:p>
+          </c:txPr>
+          <c:showLegendKey val="0"/>
+          <c:showVal val="1"/>
+          <c:showCatName val="0"/>
+          <c:showSerName val="0"/>
+          <c:showPercent val="0"/>
+          <c:showBubbleSize val="0"/>
+          <c:showLeaderLines val="1"/>
+        </c:dLbls>
+        <c:axId val="-2068027336"/>
+        <c:axId val="-2113994440"/>
+      </c:barChart>
+      <c:catAx>
+        <c:axId val="-2068027336"/>
+        <c:scaling>
+          <c:orientation val="minMax"/>
+        </c:scaling>
+        <c:delete val="0"/>
+        <c:axPos val="b"/>
+        <c:majorTickMark val="out"/>
+        <c:minorTickMark val="none"/>
+        <c:tickLblPos val="nextTo"/>
+        <c:txPr>
+          <a:bodyPr/>
+          <a:lstStyle/>
+          <a:p>
+            <a:pPr>
+              <a:defRPr sz="1600">
+                <a:solidFill>
+                  <a:srgbClr val="FFFFFF"/>
+                </a:solidFill>
+              </a:defRPr>
+            </a:pPr>
+          </a:p>
+        </c:txPr>
+        <c:crossAx val="-2113994440"/>
+        <c:crosses val="autoZero"/>
+        <c:auto val="1"/>
+        <c:lblAlgn val="ctr"/>
+        <c:lblOffset val="100"/>
+        <c:noMultiLvlLbl val="0"/>
+      </c:catAx>
+      <c:valAx>
+        <c:axId val="-2113994440"/>
+        <c:scaling/>
+        <c:delete val="0"/>
+        <c:axPos val="l"/>
+        <c:majorTickMark val="out"/>
+        <c:minorTickMark val="none"/>
+        <c:tickLblPos val="nextTo"/>
+        <c:txPr>
+          <a:bodyPr/>
+          <a:lstStyle/>
+          <a:p>
+            <a:pPr>
+              <a:defRPr sz="1400">
+                <a:solidFill>
+                  <a:srgbClr val="FFFFFF"/>
+                </a:solidFill>
+              </a:defRPr>
+            </a:pPr>
+          </a:p>
+        </c:txPr>
+        <c:crossAx val="-2068027336"/>
+        <c:crosses val="autoZero"/>
+      </c:valAx>
+    </c:plotArea>
     <c:dispBlanksAs val="gap"/>
   </c:chart>
   <c:txPr>
@@ -4205,7 +4619,7 @@
                 </a:solidFill>
                 <a:latin typeface="Myriad Pro 1"/>
               </a:rPr>
-              <a:t>Time allocated: (10 minutes)</a:t>
+              <a:t>Time allocated: (5 minutes)</a:t>
             </a:r>
           </a:p>
         </p:txBody>
@@ -4395,7 +4809,7 @@
             <a:avLst/>
           </a:prstGeom>
           <a:solidFill>
-            <a:srgbClr val="4FB8AE"/>
+            <a:srgbClr val="FFFFFF"/>
           </a:solidFill>
           <a:ln>
             <a:noFill/>
@@ -4432,8 +4846,8 @@
         </p:nvSpPr>
         <p:spPr>
           <a:xfrm>
-            <a:off x="713232" y="457200"/>
-            <a:ext cx="12801600" cy="1005840"/>
+            <a:off x="713232" y="411480"/>
+            <a:ext cx="15544800" cy="365760"/>
           </a:xfrm>
           <a:prstGeom prst="rect">
             <a:avLst/>
@@ -4441,67 +4855,3262 @@
           <a:noFill/>
         </p:spPr>
         <p:txBody>
-          <a:bodyPr wrap="none">
+          <a:bodyPr wrap="square" anchor="t" lIns="0" rIns="0" tIns="0" bIns="0">
             <a:spAutoFit/>
           </a:bodyPr>
           <a:lstStyle/>
           <a:p>
-            <a:r>
-              <a:rPr sz="5400" b="1">
-                <a:solidFill>
-                  <a:srgbClr val="FFFFFF"/>
+            <a:pPr algn="l">
+              <a:lnSpc>
+                <a:spcPct val="105000"/>
+              </a:lnSpc>
+            </a:pPr>
+            <a:r>
+              <a:rPr sz="1400" b="1" i="0">
+                <a:solidFill>
+                  <a:srgbClr val="F0A61E"/>
+                </a:solidFill>
+                <a:latin typeface="Myriad Pro 2"/>
+              </a:rPr>
+              <a:t>07A — WHAT THE BOOK IS BUILT ON</a:t>
+            </a:r>
+          </a:p>
+        </p:txBody>
+      </p:sp>
+      <p:sp>
+        <p:nvSpPr>
+          <p:cNvPr id="4" name="TextBox 3"/>
+          <p:cNvSpPr txBox="1"/>
+          <p:nvPr/>
+        </p:nvSpPr>
+        <p:spPr>
+          <a:xfrm>
+            <a:off x="713232" y="777240"/>
+            <a:ext cx="15544800" cy="822960"/>
+          </a:xfrm>
+          <a:prstGeom prst="rect">
+            <a:avLst/>
+          </a:prstGeom>
+          <a:noFill/>
+        </p:spPr>
+        <p:txBody>
+          <a:bodyPr wrap="square" anchor="t" lIns="0" rIns="0" tIns="0" bIns="0">
+            <a:spAutoFit/>
+          </a:bodyPr>
+          <a:lstStyle/>
+          <a:p>
+            <a:pPr algn="l">
+              <a:lnSpc>
+                <a:spcPct val="105000"/>
+              </a:lnSpc>
+            </a:pPr>
+            <a:r>
+              <a:rPr sz="4000" b="1" i="0">
+                <a:solidFill>
+                  <a:srgbClr val="0B3B3E"/>
+                </a:solidFill>
+                <a:latin typeface="Myriad Pro 2"/>
+              </a:rPr>
+              <a:t>Five Credit Products, One Growth Ladder</a:t>
+            </a:r>
+          </a:p>
+        </p:txBody>
+      </p:sp>
+      <p:sp>
+        <p:nvSpPr>
+          <p:cNvPr id="5" name="TextBox 4"/>
+          <p:cNvSpPr txBox="1"/>
+          <p:nvPr/>
+        </p:nvSpPr>
+        <p:spPr>
+          <a:xfrm>
+            <a:off x="713232" y="1600200"/>
+            <a:ext cx="16002000" cy="502920"/>
+          </a:xfrm>
+          <a:prstGeom prst="rect">
+            <a:avLst/>
+          </a:prstGeom>
+          <a:noFill/>
+        </p:spPr>
+        <p:txBody>
+          <a:bodyPr wrap="square" anchor="t" lIns="0" rIns="0" tIns="0" bIns="0">
+            <a:spAutoFit/>
+          </a:bodyPr>
+          <a:lstStyle/>
+          <a:p>
+            <a:pPr algn="l">
+              <a:lnSpc>
+                <a:spcPct val="105000"/>
+              </a:lnSpc>
+            </a:pPr>
+            <a:r>
+              <a:rPr sz="2000" b="0" i="1">
+                <a:solidFill>
+                  <a:srgbClr val="555555"/>
                 </a:solidFill>
                 <a:latin typeface="Myriad Pro 1"/>
               </a:rPr>
-              <a:t>BY THE NUMBERS</a:t>
-            </a:r>
-          </a:p>
-        </p:txBody>
-      </p:sp>
-      <p:sp>
-        <p:nvSpPr>
-          <p:cNvPr id="4" name="TextBox 3"/>
-          <p:cNvSpPr txBox="1"/>
-          <p:nvPr/>
-        </p:nvSpPr>
-        <p:spPr>
-          <a:xfrm>
-            <a:off x="713232" y="1371600"/>
-            <a:ext cx="14630400" cy="548640"/>
-          </a:xfrm>
-          <a:prstGeom prst="rect">
-            <a:avLst/>
-          </a:prstGeom>
-          <a:noFill/>
-        </p:spPr>
-        <p:txBody>
-          <a:bodyPr wrap="none">
-            <a:spAutoFit/>
-          </a:bodyPr>
-          <a:lstStyle/>
-          <a:p>
-            <a:r>
-              <a:rPr sz="2600" i="1">
-                <a:solidFill>
-                  <a:srgbClr val="FFFFFF"/>
-                </a:solidFill>
-                <a:latin typeface="Myriad Pro 1"/>
-              </a:rPr>
-              <a:t>Projected beneficiary mix and PEAK's audited growth, 2023 → 2024</a:t>
-            </a:r>
+              <a:t>Each product is sized to a different income pattern, not just a different loan size</a:t>
+            </a:r>
+          </a:p>
+        </p:txBody>
+      </p:sp>
+      <p:sp>
+        <p:nvSpPr>
+          <p:cNvPr id="6" name="Rectangle 5"/>
+          <p:cNvSpPr/>
+          <p:nvPr/>
+        </p:nvSpPr>
+        <p:spPr>
+          <a:xfrm>
+            <a:off x="713232" y="2148840"/>
+            <a:ext cx="1463040" cy="38100"/>
+          </a:xfrm>
+          <a:prstGeom prst="rect">
+            <a:avLst/>
+          </a:prstGeom>
+          <a:solidFill>
+            <a:srgbClr val="F0A61E"/>
+          </a:solidFill>
+          <a:ln>
+            <a:noFill/>
+          </a:ln>
+          <a:effectLst/>
+        </p:spPr>
+        <p:style>
+          <a:lnRef idx="1">
+            <a:schemeClr val="accent1"/>
+          </a:lnRef>
+          <a:fillRef idx="3">
+            <a:schemeClr val="accent1"/>
+          </a:fillRef>
+          <a:effectRef idx="2">
+            <a:schemeClr val="accent1"/>
+          </a:effectRef>
+          <a:fontRef idx="minor">
+            <a:schemeClr val="lt1"/>
+          </a:fontRef>
+        </p:style>
+        <p:txBody>
+          <a:bodyPr rtlCol="0" anchor="ctr"/>
+          <a:lstStyle/>
+          <a:p>
+            <a:pPr algn="ctr"/>
           </a:p>
         </p:txBody>
       </p:sp>
       <p:graphicFrame>
         <p:nvGraphicFramePr>
-          <p:cNvPr id="5" name="Chart 4"/>
+          <p:cNvPr id="7" name="Table 6"/>
           <p:cNvGraphicFramePr>
             <a:graphicFrameLocks noGrp="1"/>
           </p:cNvGraphicFramePr>
           <p:nvPr/>
         </p:nvGraphicFramePr>
         <p:xfrm>
-          <a:off x="914400" y="2377440"/>
+          <a:off x="713232" y="2651760"/>
+          <a:ext cx="16459200" cy="4434840"/>
+        </p:xfrm>
+        <a:graphic>
+          <a:graphicData uri="http://schemas.openxmlformats.org/drawingml/2006/table">
+            <a:tbl>
+              <a:tblPr bandRow="1">
+                <a:tableStyleId>{5C22544A-7EE6-4342-B048-85BDC9FD1C3A}</a:tableStyleId>
+              </a:tblPr>
+              <a:tblGrid>
+                <a:gridCol w="3657600"/>
+                <a:gridCol w="5120640"/>
+                <a:gridCol w="2377440"/>
+                <a:gridCol w="2651760"/>
+                <a:gridCol w="2651760"/>
+              </a:tblGrid>
+              <a:tr h="548640">
+                <a:tc>
+                  <a:txBody>
+                    <a:bodyPr wrap="square"/>
+                    <a:lstStyle/>
+                    <a:p>
+                      <a:r>
+                        <a:rPr sz="1600" b="1">
+                          <a:solidFill>
+                            <a:srgbClr val="FFFFFF"/>
+                          </a:solidFill>
+                          <a:latin typeface="Myriad Pro 1"/>
+                        </a:rPr>
+                        <a:t>Product</a:t>
+                      </a:r>
+                    </a:p>
+                  </a:txBody>
+                  <a:tcPr marL="91440" marR="91440" marT="36576" marB="36576" anchor="ctr">
+                    <a:solidFill>
+                      <a:srgbClr val="0B3B3E"/>
+                    </a:solidFill>
+                  </a:tcPr>
+                </a:tc>
+                <a:tc>
+                  <a:txBody>
+                    <a:bodyPr wrap="square"/>
+                    <a:lstStyle/>
+                    <a:p>
+                      <a:r>
+                        <a:rPr sz="1600" b="1">
+                          <a:solidFill>
+                            <a:srgbClr val="FFFFFF"/>
+                          </a:solidFill>
+                          <a:latin typeface="Myriad Pro 1"/>
+                        </a:rPr>
+                        <a:t>Who it serves</a:t>
+                      </a:r>
+                    </a:p>
+                  </a:txBody>
+                  <a:tcPr marL="91440" marR="91440" marT="36576" marB="36576" anchor="ctr">
+                    <a:solidFill>
+                      <a:srgbClr val="0B3B3E"/>
+                    </a:solidFill>
+                  </a:tcPr>
+                </a:tc>
+                <a:tc>
+                  <a:txBody>
+                    <a:bodyPr wrap="square"/>
+                    <a:lstStyle/>
+                    <a:p>
+                      <a:r>
+                        <a:rPr sz="1600" b="1">
+                          <a:solidFill>
+                            <a:srgbClr val="FFFFFF"/>
+                          </a:solidFill>
+                          <a:latin typeface="Myriad Pro 1"/>
+                        </a:rPr>
+                        <a:t>Range (USD)</a:t>
+                      </a:r>
+                    </a:p>
+                  </a:txBody>
+                  <a:tcPr marL="91440" marR="91440" marT="36576" marB="36576" anchor="ctr">
+                    <a:solidFill>
+                      <a:srgbClr val="0B3B3E"/>
+                    </a:solidFill>
+                  </a:tcPr>
+                </a:tc>
+                <a:tc>
+                  <a:txBody>
+                    <a:bodyPr wrap="square"/>
+                    <a:lstStyle/>
+                    <a:p>
+                      <a:r>
+                        <a:rPr sz="1600" b="1">
+                          <a:solidFill>
+                            <a:srgbClr val="FFFFFF"/>
+                          </a:solidFill>
+                          <a:latin typeface="Myriad Pro 1"/>
+                        </a:rPr>
+                        <a:t>Range (₦)</a:t>
+                      </a:r>
+                    </a:p>
+                  </a:txBody>
+                  <a:tcPr marL="91440" marR="91440" marT="36576" marB="36576" anchor="ctr">
+                    <a:solidFill>
+                      <a:srgbClr val="0B3B3E"/>
+                    </a:solidFill>
+                  </a:tcPr>
+                </a:tc>
+                <a:tc>
+                  <a:txBody>
+                    <a:bodyPr wrap="square"/>
+                    <a:lstStyle/>
+                    <a:p>
+                      <a:r>
+                        <a:rPr sz="1600" b="1">
+                          <a:solidFill>
+                            <a:srgbClr val="FFFFFF"/>
+                          </a:solidFill>
+                          <a:latin typeface="Myriad Pro 1"/>
+                        </a:rPr>
+                        <a:t>Term &amp; collection</a:t>
+                      </a:r>
+                    </a:p>
+                  </a:txBody>
+                  <a:tcPr marL="91440" marR="91440" marT="36576" marB="36576" anchor="ctr">
+                    <a:solidFill>
+                      <a:srgbClr val="0B3B3E"/>
+                    </a:solidFill>
+                  </a:tcPr>
+                </a:tc>
+              </a:tr>
+              <a:tr h="777240">
+                <a:tc>
+                  <a:txBody>
+                    <a:bodyPr wrap="square"/>
+                    <a:lstStyle/>
+                    <a:p>
+                      <a:r>
+                        <a:rPr sz="1600" b="0">
+                          <a:solidFill>
+                            <a:srgbClr val="222222"/>
+                          </a:solidFill>
+                          <a:latin typeface="Myriad Pro 1"/>
+                        </a:rPr>
+                        <a:t>MiniMonie</a:t>
+                      </a:r>
+                    </a:p>
+                  </a:txBody>
+                  <a:tcPr marL="91440" marR="91440" marT="36576" marB="36576" anchor="ctr">
+                    <a:solidFill>
+                      <a:srgbClr val="FFFFFF"/>
+                    </a:solidFill>
+                  </a:tcPr>
+                </a:tc>
+                <a:tc>
+                  <a:txBody>
+                    <a:bodyPr wrap="square"/>
+                    <a:lstStyle/>
+                    <a:p>
+                      <a:r>
+                        <a:rPr sz="1600" b="0">
+                          <a:solidFill>
+                            <a:srgbClr val="222222"/>
+                          </a:solidFill>
+                          <a:latin typeface="Myriad Pro 1"/>
+                        </a:rPr>
+                        <a:t>Daily income traders, contribution-based businesses</a:t>
+                      </a:r>
+                    </a:p>
+                  </a:txBody>
+                  <a:tcPr marL="91440" marR="91440" marT="36576" marB="36576" anchor="ctr">
+                    <a:solidFill>
+                      <a:srgbClr val="FFFFFF"/>
+                    </a:solidFill>
+                  </a:tcPr>
+                </a:tc>
+                <a:tc>
+                  <a:txBody>
+                    <a:bodyPr wrap="square"/>
+                    <a:lstStyle/>
+                    <a:p>
+                      <a:r>
+                        <a:rPr sz="1600" b="0">
+                          <a:solidFill>
+                            <a:srgbClr val="222222"/>
+                          </a:solidFill>
+                          <a:latin typeface="Myriad Pro 1"/>
+                        </a:rPr>
+                        <a:t>$22–$75</a:t>
+                      </a:r>
+                    </a:p>
+                  </a:txBody>
+                  <a:tcPr marL="91440" marR="91440" marT="36576" marB="36576" anchor="ctr">
+                    <a:solidFill>
+                      <a:srgbClr val="FFFFFF"/>
+                    </a:solidFill>
+                  </a:tcPr>
+                </a:tc>
+                <a:tc>
+                  <a:txBody>
+                    <a:bodyPr wrap="square"/>
+                    <a:lstStyle/>
+                    <a:p>
+                      <a:r>
+                        <a:rPr sz="1600" b="0">
+                          <a:solidFill>
+                            <a:srgbClr val="222222"/>
+                          </a:solidFill>
+                          <a:latin typeface="Myriad Pro 1"/>
+                        </a:rPr>
+                        <a:t>₦30,000–100,000</a:t>
+                      </a:r>
+                    </a:p>
+                  </a:txBody>
+                  <a:tcPr marL="91440" marR="91440" marT="36576" marB="36576" anchor="ctr">
+                    <a:solidFill>
+                      <a:srgbClr val="FFFFFF"/>
+                    </a:solidFill>
+                  </a:tcPr>
+                </a:tc>
+                <a:tc>
+                  <a:txBody>
+                    <a:bodyPr wrap="square"/>
+                    <a:lstStyle/>
+                    <a:p>
+                      <a:r>
+                        <a:rPr sz="1600" b="0">
+                          <a:solidFill>
+                            <a:srgbClr val="222222"/>
+                          </a:solidFill>
+                          <a:latin typeface="Myriad Pro 1"/>
+                        </a:rPr>
+                        <a:t>2 months, daily</a:t>
+                      </a:r>
+                    </a:p>
+                  </a:txBody>
+                  <a:tcPr marL="91440" marR="91440" marT="36576" marB="36576" anchor="ctr">
+                    <a:solidFill>
+                      <a:srgbClr val="FFFFFF"/>
+                    </a:solidFill>
+                  </a:tcPr>
+                </a:tc>
+              </a:tr>
+              <a:tr h="777240">
+                <a:tc>
+                  <a:txBody>
+                    <a:bodyPr wrap="square"/>
+                    <a:lstStyle/>
+                    <a:p>
+                      <a:r>
+                        <a:rPr sz="1600" b="0">
+                          <a:solidFill>
+                            <a:srgbClr val="222222"/>
+                          </a:solidFill>
+                          <a:latin typeface="Myriad Pro 1"/>
+                        </a:rPr>
+                        <a:t>PeakLite / MicroGroup</a:t>
+                      </a:r>
+                    </a:p>
+                  </a:txBody>
+                  <a:tcPr marL="91440" marR="91440" marT="36576" marB="36576" anchor="ctr">
+                    <a:solidFill>
+                      <a:srgbClr val="F5FAF9"/>
+                    </a:solidFill>
+                  </a:tcPr>
+                </a:tc>
+                <a:tc>
+                  <a:txBody>
+                    <a:bodyPr wrap="square"/>
+                    <a:lstStyle/>
+                    <a:p>
+                      <a:r>
+                        <a:rPr sz="1600" b="0">
+                          <a:solidFill>
+                            <a:srgbClr val="222222"/>
+                          </a:solidFill>
+                          <a:latin typeface="Myriad Pro 1"/>
+                        </a:rPr>
+                        <a:t>Group-based microcredit, shared repayment</a:t>
+                      </a:r>
+                    </a:p>
+                  </a:txBody>
+                  <a:tcPr marL="91440" marR="91440" marT="36576" marB="36576" anchor="ctr">
+                    <a:solidFill>
+                      <a:srgbClr val="F5FAF9"/>
+                    </a:solidFill>
+                  </a:tcPr>
+                </a:tc>
+                <a:tc>
+                  <a:txBody>
+                    <a:bodyPr wrap="square"/>
+                    <a:lstStyle/>
+                    <a:p>
+                      <a:r>
+                        <a:rPr sz="1600" b="0">
+                          <a:solidFill>
+                            <a:srgbClr val="222222"/>
+                          </a:solidFill>
+                          <a:latin typeface="Myriad Pro 1"/>
+                        </a:rPr>
+                        <a:t>$112–$149</a:t>
+                      </a:r>
+                    </a:p>
+                  </a:txBody>
+                  <a:tcPr marL="91440" marR="91440" marT="36576" marB="36576" anchor="ctr">
+                    <a:solidFill>
+                      <a:srgbClr val="F5FAF9"/>
+                    </a:solidFill>
+                  </a:tcPr>
+                </a:tc>
+                <a:tc>
+                  <a:txBody>
+                    <a:bodyPr wrap="square"/>
+                    <a:lstStyle/>
+                    <a:p>
+                      <a:r>
+                        <a:rPr sz="1600" b="0">
+                          <a:solidFill>
+                            <a:srgbClr val="222222"/>
+                          </a:solidFill>
+                          <a:latin typeface="Myriad Pro 1"/>
+                        </a:rPr>
+                        <a:t>₦150,000–200,000</a:t>
+                      </a:r>
+                    </a:p>
+                  </a:txBody>
+                  <a:tcPr marL="91440" marR="91440" marT="36576" marB="36576" anchor="ctr">
+                    <a:solidFill>
+                      <a:srgbClr val="F5FAF9"/>
+                    </a:solidFill>
+                  </a:tcPr>
+                </a:tc>
+                <a:tc>
+                  <a:txBody>
+                    <a:bodyPr wrap="square"/>
+                    <a:lstStyle/>
+                    <a:p>
+                      <a:r>
+                        <a:rPr sz="1600" b="0">
+                          <a:solidFill>
+                            <a:srgbClr val="222222"/>
+                          </a:solidFill>
+                          <a:latin typeface="Myriad Pro 1"/>
+                        </a:rPr>
+                        <a:t>5 months, daily</a:t>
+                      </a:r>
+                    </a:p>
+                  </a:txBody>
+                  <a:tcPr marL="91440" marR="91440" marT="36576" marB="36576" anchor="ctr">
+                    <a:solidFill>
+                      <a:srgbClr val="F5FAF9"/>
+                    </a:solidFill>
+                  </a:tcPr>
+                </a:tc>
+              </a:tr>
+              <a:tr h="777240">
+                <a:tc>
+                  <a:txBody>
+                    <a:bodyPr wrap="square"/>
+                    <a:lstStyle/>
+                    <a:p>
+                      <a:r>
+                        <a:rPr sz="1600" b="0">
+                          <a:solidFill>
+                            <a:srgbClr val="222222"/>
+                          </a:solidFill>
+                          <a:latin typeface="Myriad Pro 1"/>
+                        </a:rPr>
+                        <a:t>Sabi Trader</a:t>
+                      </a:r>
+                    </a:p>
+                  </a:txBody>
+                  <a:tcPr marL="91440" marR="91440" marT="36576" marB="36576" anchor="ctr">
+                    <a:solidFill>
+                      <a:srgbClr val="FFFFFF"/>
+                    </a:solidFill>
+                  </a:tcPr>
+                </a:tc>
+                <a:tc>
+                  <a:txBody>
+                    <a:bodyPr wrap="square"/>
+                    <a:lstStyle/>
+                    <a:p>
+                      <a:r>
+                        <a:rPr sz="1600" b="0">
+                          <a:solidFill>
+                            <a:srgbClr val="222222"/>
+                          </a:solidFill>
+                          <a:latin typeface="Myriad Pro 1"/>
+                        </a:rPr>
+                        <a:t>Established retailers beyond group limits</a:t>
+                      </a:r>
+                    </a:p>
+                  </a:txBody>
+                  <a:tcPr marL="91440" marR="91440" marT="36576" marB="36576" anchor="ctr">
+                    <a:solidFill>
+                      <a:srgbClr val="FFFFFF"/>
+                    </a:solidFill>
+                  </a:tcPr>
+                </a:tc>
+                <a:tc>
+                  <a:txBody>
+                    <a:bodyPr wrap="square"/>
+                    <a:lstStyle/>
+                    <a:p>
+                      <a:r>
+                        <a:rPr sz="1600" b="0">
+                          <a:solidFill>
+                            <a:srgbClr val="222222"/>
+                          </a:solidFill>
+                          <a:latin typeface="Myriad Pro 1"/>
+                        </a:rPr>
+                        <a:t>$149–$373</a:t>
+                      </a:r>
+                    </a:p>
+                  </a:txBody>
+                  <a:tcPr marL="91440" marR="91440" marT="36576" marB="36576" anchor="ctr">
+                    <a:solidFill>
+                      <a:srgbClr val="FFFFFF"/>
+                    </a:solidFill>
+                  </a:tcPr>
+                </a:tc>
+                <a:tc>
+                  <a:txBody>
+                    <a:bodyPr wrap="square"/>
+                    <a:lstStyle/>
+                    <a:p>
+                      <a:r>
+                        <a:rPr sz="1600" b="0">
+                          <a:solidFill>
+                            <a:srgbClr val="222222"/>
+                          </a:solidFill>
+                          <a:latin typeface="Myriad Pro 1"/>
+                        </a:rPr>
+                        <a:t>₦200,000–499,999</a:t>
+                      </a:r>
+                    </a:p>
+                  </a:txBody>
+                  <a:tcPr marL="91440" marR="91440" marT="36576" marB="36576" anchor="ctr">
+                    <a:solidFill>
+                      <a:srgbClr val="FFFFFF"/>
+                    </a:solidFill>
+                  </a:tcPr>
+                </a:tc>
+                <a:tc>
+                  <a:txBody>
+                    <a:bodyPr wrap="square"/>
+                    <a:lstStyle/>
+                    <a:p>
+                      <a:r>
+                        <a:rPr sz="1600" b="0">
+                          <a:solidFill>
+                            <a:srgbClr val="222222"/>
+                          </a:solidFill>
+                          <a:latin typeface="Myriad Pro 1"/>
+                        </a:rPr>
+                        <a:t>5–6 months, monthly</a:t>
+                      </a:r>
+                    </a:p>
+                  </a:txBody>
+                  <a:tcPr marL="91440" marR="91440" marT="36576" marB="36576" anchor="ctr">
+                    <a:solidFill>
+                      <a:srgbClr val="FFFFFF"/>
+                    </a:solidFill>
+                  </a:tcPr>
+                </a:tc>
+              </a:tr>
+              <a:tr h="777240">
+                <a:tc>
+                  <a:txBody>
+                    <a:bodyPr wrap="square"/>
+                    <a:lstStyle/>
+                    <a:p>
+                      <a:r>
+                        <a:rPr sz="1600" b="0">
+                          <a:solidFill>
+                            <a:srgbClr val="222222"/>
+                          </a:solidFill>
+                          <a:latin typeface="Myriad Pro 1"/>
+                        </a:rPr>
+                        <a:t>SME</a:t>
+                      </a:r>
+                    </a:p>
+                  </a:txBody>
+                  <a:tcPr marL="91440" marR="91440" marT="36576" marB="36576" anchor="ctr">
+                    <a:solidFill>
+                      <a:srgbClr val="F5FAF9"/>
+                    </a:solidFill>
+                  </a:tcPr>
+                </a:tc>
+                <a:tc>
+                  <a:txBody>
+                    <a:bodyPr wrap="square"/>
+                    <a:lstStyle/>
+                    <a:p>
+                      <a:r>
+                        <a:rPr sz="1600" b="0">
+                          <a:solidFill>
+                            <a:srgbClr val="222222"/>
+                          </a:solidFill>
+                          <a:latin typeface="Myriad Pro 1"/>
+                        </a:rPr>
+                        <a:t>Eligible small &amp; medium businesses</a:t>
+                      </a:r>
+                    </a:p>
+                  </a:txBody>
+                  <a:tcPr marL="91440" marR="91440" marT="36576" marB="36576" anchor="ctr">
+                    <a:solidFill>
+                      <a:srgbClr val="F5FAF9"/>
+                    </a:solidFill>
+                  </a:tcPr>
+                </a:tc>
+                <a:tc>
+                  <a:txBody>
+                    <a:bodyPr wrap="square"/>
+                    <a:lstStyle/>
+                    <a:p>
+                      <a:r>
+                        <a:rPr sz="1600" b="0">
+                          <a:solidFill>
+                            <a:srgbClr val="222222"/>
+                          </a:solidFill>
+                          <a:latin typeface="Myriad Pro 1"/>
+                        </a:rPr>
+                        <a:t>$149–$373</a:t>
+                      </a:r>
+                    </a:p>
+                  </a:txBody>
+                  <a:tcPr marL="91440" marR="91440" marT="36576" marB="36576" anchor="ctr">
+                    <a:solidFill>
+                      <a:srgbClr val="F5FAF9"/>
+                    </a:solidFill>
+                  </a:tcPr>
+                </a:tc>
+                <a:tc>
+                  <a:txBody>
+                    <a:bodyPr wrap="square"/>
+                    <a:lstStyle/>
+                    <a:p>
+                      <a:r>
+                        <a:rPr sz="1600" b="0">
+                          <a:solidFill>
+                            <a:srgbClr val="222222"/>
+                          </a:solidFill>
+                          <a:latin typeface="Myriad Pro 1"/>
+                        </a:rPr>
+                        <a:t>₦200,000–499,999</a:t>
+                      </a:r>
+                    </a:p>
+                  </a:txBody>
+                  <a:tcPr marL="91440" marR="91440" marT="36576" marB="36576" anchor="ctr">
+                    <a:solidFill>
+                      <a:srgbClr val="F5FAF9"/>
+                    </a:solidFill>
+                  </a:tcPr>
+                </a:tc>
+                <a:tc>
+                  <a:txBody>
+                    <a:bodyPr wrap="square"/>
+                    <a:lstStyle/>
+                    <a:p>
+                      <a:r>
+                        <a:rPr sz="1600" b="0">
+                          <a:solidFill>
+                            <a:srgbClr val="222222"/>
+                          </a:solidFill>
+                          <a:latin typeface="Myriad Pro 1"/>
+                        </a:rPr>
+                        <a:t>5–6 months, monthly</a:t>
+                      </a:r>
+                    </a:p>
+                  </a:txBody>
+                  <a:tcPr marL="91440" marR="91440" marT="36576" marB="36576" anchor="ctr">
+                    <a:solidFill>
+                      <a:srgbClr val="F5FAF9"/>
+                    </a:solidFill>
+                  </a:tcPr>
+                </a:tc>
+              </a:tr>
+              <a:tr h="777240">
+                <a:tc>
+                  <a:txBody>
+                    <a:bodyPr wrap="square"/>
+                    <a:lstStyle/>
+                    <a:p>
+                      <a:r>
+                        <a:rPr sz="1600" b="0">
+                          <a:solidFill>
+                            <a:srgbClr val="222222"/>
+                          </a:solidFill>
+                          <a:latin typeface="Myriad Pro 1"/>
+                        </a:rPr>
+                        <a:t>BetaBiz / Working Capital</a:t>
+                      </a:r>
+                    </a:p>
+                  </a:txBody>
+                  <a:tcPr marL="91440" marR="91440" marT="36576" marB="36576" anchor="ctr">
+                    <a:solidFill>
+                      <a:srgbClr val="FFFFFF"/>
+                    </a:solidFill>
+                  </a:tcPr>
+                </a:tc>
+                <a:tc>
+                  <a:txBody>
+                    <a:bodyPr wrap="square"/>
+                    <a:lstStyle/>
+                    <a:p>
+                      <a:r>
+                        <a:rPr sz="1600" b="0">
+                          <a:solidFill>
+                            <a:srgbClr val="222222"/>
+                          </a:solidFill>
+                          <a:latin typeface="Myriad Pro 1"/>
+                        </a:rPr>
+                        <a:t>Business expenses, stock, cash flow</a:t>
+                      </a:r>
+                    </a:p>
+                  </a:txBody>
+                  <a:tcPr marL="91440" marR="91440" marT="36576" marB="36576" anchor="ctr">
+                    <a:solidFill>
+                      <a:srgbClr val="FFFFFF"/>
+                    </a:solidFill>
+                  </a:tcPr>
+                </a:tc>
+                <a:tc>
+                  <a:txBody>
+                    <a:bodyPr wrap="square"/>
+                    <a:lstStyle/>
+                    <a:p>
+                      <a:r>
+                        <a:rPr sz="1600" b="0">
+                          <a:solidFill>
+                            <a:srgbClr val="222222"/>
+                          </a:solidFill>
+                          <a:latin typeface="Myriad Pro 1"/>
+                        </a:rPr>
+                        <a:t>$373+</a:t>
+                      </a:r>
+                    </a:p>
+                  </a:txBody>
+                  <a:tcPr marL="91440" marR="91440" marT="36576" marB="36576" anchor="ctr">
+                    <a:solidFill>
+                      <a:srgbClr val="FFFFFF"/>
+                    </a:solidFill>
+                  </a:tcPr>
+                </a:tc>
+                <a:tc>
+                  <a:txBody>
+                    <a:bodyPr wrap="square"/>
+                    <a:lstStyle/>
+                    <a:p>
+                      <a:r>
+                        <a:rPr sz="1600" b="0">
+                          <a:solidFill>
+                            <a:srgbClr val="222222"/>
+                          </a:solidFill>
+                          <a:latin typeface="Myriad Pro 1"/>
+                        </a:rPr>
+                        <a:t>₦500,000+</a:t>
+                      </a:r>
+                    </a:p>
+                  </a:txBody>
+                  <a:tcPr marL="91440" marR="91440" marT="36576" marB="36576" anchor="ctr">
+                    <a:solidFill>
+                      <a:srgbClr val="FFFFFF"/>
+                    </a:solidFill>
+                  </a:tcPr>
+                </a:tc>
+                <a:tc>
+                  <a:txBody>
+                    <a:bodyPr wrap="square"/>
+                    <a:lstStyle/>
+                    <a:p>
+                      <a:r>
+                        <a:rPr sz="1600" b="0">
+                          <a:solidFill>
+                            <a:srgbClr val="222222"/>
+                          </a:solidFill>
+                          <a:latin typeface="Myriad Pro 1"/>
+                        </a:rPr>
+                        <a:t>5–6 months, monthly</a:t>
+                      </a:r>
+                    </a:p>
+                  </a:txBody>
+                  <a:tcPr marL="91440" marR="91440" marT="36576" marB="36576" anchor="ctr">
+                    <a:solidFill>
+                      <a:srgbClr val="FFFFFF"/>
+                    </a:solidFill>
+                  </a:tcPr>
+                </a:tc>
+              </a:tr>
+            </a:tbl>
+          </a:graphicData>
+        </a:graphic>
+      </p:graphicFrame>
+      <p:sp>
+        <p:nvSpPr>
+          <p:cNvPr id="8" name="Rectangle 7"/>
+          <p:cNvSpPr/>
+          <p:nvPr/>
+        </p:nvSpPr>
+        <p:spPr>
+          <a:xfrm>
+            <a:off x="713232" y="7589520"/>
+            <a:ext cx="3749040" cy="1554480"/>
+          </a:xfrm>
+          <a:prstGeom prst="rect">
+            <a:avLst/>
+          </a:prstGeom>
+          <a:solidFill>
+            <a:srgbClr val="0B3B3E"/>
+          </a:solidFill>
+          <a:ln>
+            <a:noFill/>
+          </a:ln>
+          <a:effectLst/>
+        </p:spPr>
+        <p:style>
+          <a:lnRef idx="1">
+            <a:schemeClr val="accent1"/>
+          </a:lnRef>
+          <a:fillRef idx="3">
+            <a:schemeClr val="accent1"/>
+          </a:fillRef>
+          <a:effectRef idx="2">
+            <a:schemeClr val="accent1"/>
+          </a:effectRef>
+          <a:fontRef idx="minor">
+            <a:schemeClr val="lt1"/>
+          </a:fontRef>
+        </p:style>
+        <p:txBody>
+          <a:bodyPr rtlCol="0" anchor="ctr"/>
+          <a:lstStyle/>
+          <a:p>
+            <a:pPr algn="ctr"/>
+          </a:p>
+        </p:txBody>
+      </p:sp>
+      <p:sp>
+        <p:nvSpPr>
+          <p:cNvPr id="9" name="TextBox 8"/>
+          <p:cNvSpPr txBox="1"/>
+          <p:nvPr/>
+        </p:nvSpPr>
+        <p:spPr>
+          <a:xfrm>
+            <a:off x="850392" y="7699248"/>
+            <a:ext cx="3474720" cy="854964"/>
+          </a:xfrm>
+          <a:prstGeom prst="rect">
+            <a:avLst/>
+          </a:prstGeom>
+          <a:noFill/>
+        </p:spPr>
+        <p:txBody>
+          <a:bodyPr wrap="square" anchor="b" lIns="0" rIns="0" tIns="0" bIns="0">
+            <a:spAutoFit/>
+          </a:bodyPr>
+          <a:lstStyle/>
+          <a:p>
+            <a:pPr algn="ctr">
+              <a:lnSpc>
+                <a:spcPct val="105000"/>
+              </a:lnSpc>
+            </a:pPr>
+            <a:r>
+              <a:rPr sz="3600" b="1" i="0">
+                <a:solidFill>
+                  <a:srgbClr val="FFFFFF"/>
+                </a:solidFill>
+                <a:latin typeface="Myriad Pro 1"/>
+              </a:rPr>
+              <a:t>5%</a:t>
+            </a:r>
+          </a:p>
+        </p:txBody>
+      </p:sp>
+      <p:sp>
+        <p:nvSpPr>
+          <p:cNvPr id="10" name="TextBox 9"/>
+          <p:cNvSpPr txBox="1"/>
+          <p:nvPr/>
+        </p:nvSpPr>
+        <p:spPr>
+          <a:xfrm>
+            <a:off x="850392" y="8491118"/>
+            <a:ext cx="3474720" cy="621792"/>
+          </a:xfrm>
+          <a:prstGeom prst="rect">
+            <a:avLst/>
+          </a:prstGeom>
+          <a:noFill/>
+        </p:spPr>
+        <p:txBody>
+          <a:bodyPr wrap="square" anchor="t" lIns="0" rIns="0" tIns="0" bIns="0">
+            <a:spAutoFit/>
+          </a:bodyPr>
+          <a:lstStyle/>
+          <a:p>
+            <a:pPr algn="ctr">
+              <a:lnSpc>
+                <a:spcPct val="100000"/>
+              </a:lnSpc>
+            </a:pPr>
+            <a:r>
+              <a:rPr sz="1400" b="0" i="0">
+                <a:solidFill>
+                  <a:srgbClr val="BFE3DF"/>
+                </a:solidFill>
+                <a:latin typeface="Myriad Pro 1"/>
+              </a:rPr>
+              <a:t>Interest rate, all products</a:t>
+            </a:r>
+          </a:p>
+        </p:txBody>
+      </p:sp>
+      <p:sp>
+        <p:nvSpPr>
+          <p:cNvPr id="11" name="Rectangle 10"/>
+          <p:cNvSpPr/>
+          <p:nvPr/>
+        </p:nvSpPr>
+        <p:spPr>
+          <a:xfrm>
+            <a:off x="4645152" y="7589520"/>
+            <a:ext cx="3749040" cy="1554480"/>
+          </a:xfrm>
+          <a:prstGeom prst="rect">
+            <a:avLst/>
+          </a:prstGeom>
+          <a:solidFill>
+            <a:srgbClr val="0B3B3E"/>
+          </a:solidFill>
+          <a:ln>
+            <a:noFill/>
+          </a:ln>
+          <a:effectLst/>
+        </p:spPr>
+        <p:style>
+          <a:lnRef idx="1">
+            <a:schemeClr val="accent1"/>
+          </a:lnRef>
+          <a:fillRef idx="3">
+            <a:schemeClr val="accent1"/>
+          </a:fillRef>
+          <a:effectRef idx="2">
+            <a:schemeClr val="accent1"/>
+          </a:effectRef>
+          <a:fontRef idx="minor">
+            <a:schemeClr val="lt1"/>
+          </a:fontRef>
+        </p:style>
+        <p:txBody>
+          <a:bodyPr rtlCol="0" anchor="ctr"/>
+          <a:lstStyle/>
+          <a:p>
+            <a:pPr algn="ctr"/>
+          </a:p>
+        </p:txBody>
+      </p:sp>
+      <p:sp>
+        <p:nvSpPr>
+          <p:cNvPr id="12" name="TextBox 11"/>
+          <p:cNvSpPr txBox="1"/>
+          <p:nvPr/>
+        </p:nvSpPr>
+        <p:spPr>
+          <a:xfrm>
+            <a:off x="4782312" y="7699248"/>
+            <a:ext cx="3474720" cy="854964"/>
+          </a:xfrm>
+          <a:prstGeom prst="rect">
+            <a:avLst/>
+          </a:prstGeom>
+          <a:noFill/>
+        </p:spPr>
+        <p:txBody>
+          <a:bodyPr wrap="square" anchor="b" lIns="0" rIns="0" tIns="0" bIns="0">
+            <a:spAutoFit/>
+          </a:bodyPr>
+          <a:lstStyle/>
+          <a:p>
+            <a:pPr algn="ctr">
+              <a:lnSpc>
+                <a:spcPct val="105000"/>
+              </a:lnSpc>
+            </a:pPr>
+            <a:r>
+              <a:rPr sz="3600" b="1" i="0">
+                <a:solidFill>
+                  <a:srgbClr val="FFFFFF"/>
+                </a:solidFill>
+                <a:latin typeface="Myriad Pro 1"/>
+              </a:rPr>
+              <a:t>10%</a:t>
+            </a:r>
+          </a:p>
+        </p:txBody>
+      </p:sp>
+      <p:sp>
+        <p:nvSpPr>
+          <p:cNvPr id="13" name="TextBox 12"/>
+          <p:cNvSpPr txBox="1"/>
+          <p:nvPr/>
+        </p:nvSpPr>
+        <p:spPr>
+          <a:xfrm>
+            <a:off x="4782312" y="8491118"/>
+            <a:ext cx="3474720" cy="621792"/>
+          </a:xfrm>
+          <a:prstGeom prst="rect">
+            <a:avLst/>
+          </a:prstGeom>
+          <a:noFill/>
+        </p:spPr>
+        <p:txBody>
+          <a:bodyPr wrap="square" anchor="t" lIns="0" rIns="0" tIns="0" bIns="0">
+            <a:spAutoFit/>
+          </a:bodyPr>
+          <a:lstStyle/>
+          <a:p>
+            <a:pPr algn="ctr">
+              <a:lnSpc>
+                <a:spcPct val="100000"/>
+              </a:lnSpc>
+            </a:pPr>
+            <a:r>
+              <a:rPr sz="1400" b="0" i="0">
+                <a:solidFill>
+                  <a:srgbClr val="BFE3DF"/>
+                </a:solidFill>
+                <a:latin typeface="Myriad Pro 1"/>
+              </a:rPr>
+              <a:t>Equity contribution required</a:t>
+            </a:r>
+          </a:p>
+        </p:txBody>
+      </p:sp>
+      <p:sp>
+        <p:nvSpPr>
+          <p:cNvPr id="14" name="Rectangle 13"/>
+          <p:cNvSpPr/>
+          <p:nvPr/>
+        </p:nvSpPr>
+        <p:spPr>
+          <a:xfrm>
+            <a:off x="8577072" y="7589520"/>
+            <a:ext cx="3749040" cy="1554480"/>
+          </a:xfrm>
+          <a:prstGeom prst="rect">
+            <a:avLst/>
+          </a:prstGeom>
+          <a:solidFill>
+            <a:srgbClr val="0B3B3E"/>
+          </a:solidFill>
+          <a:ln>
+            <a:noFill/>
+          </a:ln>
+          <a:effectLst/>
+        </p:spPr>
+        <p:style>
+          <a:lnRef idx="1">
+            <a:schemeClr val="accent1"/>
+          </a:lnRef>
+          <a:fillRef idx="3">
+            <a:schemeClr val="accent1"/>
+          </a:fillRef>
+          <a:effectRef idx="2">
+            <a:schemeClr val="accent1"/>
+          </a:effectRef>
+          <a:fontRef idx="minor">
+            <a:schemeClr val="lt1"/>
+          </a:fontRef>
+        </p:style>
+        <p:txBody>
+          <a:bodyPr rtlCol="0" anchor="ctr"/>
+          <a:lstStyle/>
+          <a:p>
+            <a:pPr algn="ctr"/>
+          </a:p>
+        </p:txBody>
+      </p:sp>
+      <p:sp>
+        <p:nvSpPr>
+          <p:cNvPr id="15" name="TextBox 14"/>
+          <p:cNvSpPr txBox="1"/>
+          <p:nvPr/>
+        </p:nvSpPr>
+        <p:spPr>
+          <a:xfrm>
+            <a:off x="8714232" y="7699248"/>
+            <a:ext cx="3474720" cy="854964"/>
+          </a:xfrm>
+          <a:prstGeom prst="rect">
+            <a:avLst/>
+          </a:prstGeom>
+          <a:noFill/>
+        </p:spPr>
+        <p:txBody>
+          <a:bodyPr wrap="square" anchor="b" lIns="0" rIns="0" tIns="0" bIns="0">
+            <a:spAutoFit/>
+          </a:bodyPr>
+          <a:lstStyle/>
+          <a:p>
+            <a:pPr algn="ctr">
+              <a:lnSpc>
+                <a:spcPct val="105000"/>
+              </a:lnSpc>
+            </a:pPr>
+            <a:r>
+              <a:rPr sz="3600" b="1" i="0">
+                <a:solidFill>
+                  <a:srgbClr val="FFFFFF"/>
+                </a:solidFill>
+                <a:latin typeface="Myriad Pro 1"/>
+              </a:rPr>
+              <a:t>5.5%</a:t>
+            </a:r>
+          </a:p>
+        </p:txBody>
+      </p:sp>
+      <p:sp>
+        <p:nvSpPr>
+          <p:cNvPr id="16" name="TextBox 15"/>
+          <p:cNvSpPr txBox="1"/>
+          <p:nvPr/>
+        </p:nvSpPr>
+        <p:spPr>
+          <a:xfrm>
+            <a:off x="8714232" y="8491118"/>
+            <a:ext cx="3474720" cy="621792"/>
+          </a:xfrm>
+          <a:prstGeom prst="rect">
+            <a:avLst/>
+          </a:prstGeom>
+          <a:noFill/>
+        </p:spPr>
+        <p:txBody>
+          <a:bodyPr wrap="square" anchor="t" lIns="0" rIns="0" tIns="0" bIns="0">
+            <a:spAutoFit/>
+          </a:bodyPr>
+          <a:lstStyle/>
+          <a:p>
+            <a:pPr algn="ctr">
+              <a:lnSpc>
+                <a:spcPct val="100000"/>
+              </a:lnSpc>
+            </a:pPr>
+            <a:r>
+              <a:rPr sz="1400" b="0" i="0">
+                <a:solidFill>
+                  <a:srgbClr val="BFE3DF"/>
+                </a:solidFill>
+                <a:latin typeface="Myriad Pro 1"/>
+              </a:rPr>
+              <a:t>Management fee &amp; insurance</a:t>
+            </a:r>
+          </a:p>
+        </p:txBody>
+      </p:sp>
+      <p:sp>
+        <p:nvSpPr>
+          <p:cNvPr id="17" name="Rectangle 16"/>
+          <p:cNvSpPr/>
+          <p:nvPr/>
+        </p:nvSpPr>
+        <p:spPr>
+          <a:xfrm>
+            <a:off x="12508992" y="7589520"/>
+            <a:ext cx="3749040" cy="1554480"/>
+          </a:xfrm>
+          <a:prstGeom prst="rect">
+            <a:avLst/>
+          </a:prstGeom>
+          <a:solidFill>
+            <a:srgbClr val="0B3B3E"/>
+          </a:solidFill>
+          <a:ln>
+            <a:noFill/>
+          </a:ln>
+          <a:effectLst/>
+        </p:spPr>
+        <p:style>
+          <a:lnRef idx="1">
+            <a:schemeClr val="accent1"/>
+          </a:lnRef>
+          <a:fillRef idx="3">
+            <a:schemeClr val="accent1"/>
+          </a:fillRef>
+          <a:effectRef idx="2">
+            <a:schemeClr val="accent1"/>
+          </a:effectRef>
+          <a:fontRef idx="minor">
+            <a:schemeClr val="lt1"/>
+          </a:fontRef>
+        </p:style>
+        <p:txBody>
+          <a:bodyPr rtlCol="0" anchor="ctr"/>
+          <a:lstStyle/>
+          <a:p>
+            <a:pPr algn="ctr"/>
+          </a:p>
+        </p:txBody>
+      </p:sp>
+      <p:sp>
+        <p:nvSpPr>
+          <p:cNvPr id="18" name="TextBox 17"/>
+          <p:cNvSpPr txBox="1"/>
+          <p:nvPr/>
+        </p:nvSpPr>
+        <p:spPr>
+          <a:xfrm>
+            <a:off x="12646152" y="7699248"/>
+            <a:ext cx="3474720" cy="854964"/>
+          </a:xfrm>
+          <a:prstGeom prst="rect">
+            <a:avLst/>
+          </a:prstGeom>
+          <a:noFill/>
+        </p:spPr>
+        <p:txBody>
+          <a:bodyPr wrap="square" anchor="b" lIns="0" rIns="0" tIns="0" bIns="0">
+            <a:spAutoFit/>
+          </a:bodyPr>
+          <a:lstStyle/>
+          <a:p>
+            <a:pPr algn="ctr">
+              <a:lnSpc>
+                <a:spcPct val="105000"/>
+              </a:lnSpc>
+            </a:pPr>
+            <a:r>
+              <a:rPr sz="3600" b="1" i="0">
+                <a:solidFill>
+                  <a:srgbClr val="FFFFFF"/>
+                </a:solidFill>
+                <a:latin typeface="Myriad Pro 1"/>
+              </a:rPr>
+              <a:t>17%</a:t>
+            </a:r>
+          </a:p>
+        </p:txBody>
+      </p:sp>
+      <p:sp>
+        <p:nvSpPr>
+          <p:cNvPr id="19" name="TextBox 18"/>
+          <p:cNvSpPr txBox="1"/>
+          <p:nvPr/>
+        </p:nvSpPr>
+        <p:spPr>
+          <a:xfrm>
+            <a:off x="12646152" y="8491118"/>
+            <a:ext cx="3474720" cy="621792"/>
+          </a:xfrm>
+          <a:prstGeom prst="rect">
+            <a:avLst/>
+          </a:prstGeom>
+          <a:noFill/>
+        </p:spPr>
+        <p:txBody>
+          <a:bodyPr wrap="square" anchor="t" lIns="0" rIns="0" tIns="0" bIns="0">
+            <a:spAutoFit/>
+          </a:bodyPr>
+          <a:lstStyle/>
+          <a:p>
+            <a:pPr algn="ctr">
+              <a:lnSpc>
+                <a:spcPct val="100000"/>
+              </a:lnSpc>
+            </a:pPr>
+            <a:r>
+              <a:rPr sz="1400" b="0" i="0">
+                <a:solidFill>
+                  <a:srgbClr val="BFE3DF"/>
+                </a:solidFill>
+                <a:latin typeface="Myriad Pro 1"/>
+              </a:rPr>
+              <a:t>Savings rate, p.a.</a:t>
+            </a:r>
+          </a:p>
+        </p:txBody>
+      </p:sp>
+      <p:sp>
+        <p:nvSpPr>
+          <p:cNvPr id="20" name="TextBox 19"/>
+          <p:cNvSpPr txBox="1"/>
+          <p:nvPr/>
+        </p:nvSpPr>
+        <p:spPr>
+          <a:xfrm>
+            <a:off x="713232" y="9372600"/>
+            <a:ext cx="16459200" cy="548640"/>
+          </a:xfrm>
+          <a:prstGeom prst="rect">
+            <a:avLst/>
+          </a:prstGeom>
+          <a:noFill/>
+        </p:spPr>
+        <p:txBody>
+          <a:bodyPr wrap="square" anchor="t" lIns="0" rIns="0" tIns="0" bIns="0">
+            <a:spAutoFit/>
+          </a:bodyPr>
+          <a:lstStyle/>
+          <a:p>
+            <a:pPr algn="l">
+              <a:lnSpc>
+                <a:spcPct val="105000"/>
+              </a:lnSpc>
+            </a:pPr>
+            <a:r>
+              <a:rPr sz="1600" b="0" i="1">
+                <a:solidFill>
+                  <a:srgbClr val="555555"/>
+                </a:solidFill>
+                <a:latin typeface="Myriad Pro 1"/>
+              </a:rPr>
+              <a:t>Plus: financial literacy, digital payments, agency banking, and micro-health insurance &amp; renewable-energy financing through partnerships.</a:t>
+            </a:r>
+          </a:p>
+        </p:txBody>
+      </p:sp>
+      <p:sp>
+        <p:nvSpPr>
+          <p:cNvPr id="21" name="TextBox 20"/>
+          <p:cNvSpPr txBox="1"/>
+          <p:nvPr/>
+        </p:nvSpPr>
+        <p:spPr>
+          <a:xfrm>
+            <a:off x="13286232" y="128016"/>
+            <a:ext cx="4690872" cy="822960"/>
+          </a:xfrm>
+          <a:prstGeom prst="rect">
+            <a:avLst/>
+          </a:prstGeom>
+          <a:noFill/>
+        </p:spPr>
+        <p:txBody>
+          <a:bodyPr wrap="square" anchor="t" lIns="0" rIns="0" tIns="0" bIns="0">
+            <a:spAutoFit/>
+          </a:bodyPr>
+          <a:lstStyle/>
+          <a:p>
+            <a:pPr algn="l">
+              <a:lnSpc>
+                <a:spcPct val="115000"/>
+              </a:lnSpc>
+            </a:pPr>
+            <a:r>
+              <a:rPr sz="3800" b="0" i="0">
+                <a:solidFill>
+                  <a:srgbClr val="57B6B2"/>
+                </a:solidFill>
+                <a:latin typeface="Myriad Pro 1"/>
+              </a:rPr>
+              <a:t>• Time allocated: (2 minutes)</a:t>
+            </a:r>
+          </a:p>
+        </p:txBody>
+      </p:sp>
+    </p:spTree>
+  </p:cSld>
+  <p:clrMapOvr>
+    <a:masterClrMapping/>
+  </p:clrMapOvr>
+</p:sld>
+</file>
+
+<file path=ppt/slides/slide13.xml><?xml version="1.0" encoding="utf-8"?>
+<p:sld xmlns:a="http://schemas.openxmlformats.org/drawingml/2006/main" xmlns:p="http://schemas.openxmlformats.org/presentationml/2006/main" xmlns:r="http://schemas.openxmlformats.org/officeDocument/2006/relationships">
+  <p:cSld>
+    <p:spTree>
+      <p:nvGrpSpPr>
+        <p:cNvPr id="1" name=""/>
+        <p:cNvGrpSpPr/>
+        <p:nvPr/>
+      </p:nvGrpSpPr>
+      <p:grpSpPr/>
+      <p:sp>
+        <p:nvSpPr>
+          <p:cNvPr id="2" name="Rectangle 1"/>
+          <p:cNvSpPr/>
+          <p:nvPr/>
+        </p:nvSpPr>
+        <p:spPr>
+          <a:xfrm>
+            <a:off x="0" y="0"/>
+            <a:ext cx="18288000" cy="10287000"/>
+          </a:xfrm>
+          <a:prstGeom prst="rect">
+            <a:avLst/>
+          </a:prstGeom>
+          <a:solidFill>
+            <a:srgbClr val="FFFFFF"/>
+          </a:solidFill>
+          <a:ln>
+            <a:noFill/>
+          </a:ln>
+          <a:effectLst/>
+        </p:spPr>
+        <p:style>
+          <a:lnRef idx="1">
+            <a:schemeClr val="accent1"/>
+          </a:lnRef>
+          <a:fillRef idx="3">
+            <a:schemeClr val="accent1"/>
+          </a:fillRef>
+          <a:effectRef idx="2">
+            <a:schemeClr val="accent1"/>
+          </a:effectRef>
+          <a:fontRef idx="minor">
+            <a:schemeClr val="lt1"/>
+          </a:fontRef>
+        </p:style>
+        <p:txBody>
+          <a:bodyPr rtlCol="0" anchor="ctr"/>
+          <a:lstStyle/>
+          <a:p>
+            <a:pPr algn="ctr"/>
+          </a:p>
+        </p:txBody>
+      </p:sp>
+      <p:sp>
+        <p:nvSpPr>
+          <p:cNvPr id="3" name="TextBox 2"/>
+          <p:cNvSpPr txBox="1"/>
+          <p:nvPr/>
+        </p:nvSpPr>
+        <p:spPr>
+          <a:xfrm>
+            <a:off x="713232" y="411480"/>
+            <a:ext cx="15544800" cy="365760"/>
+          </a:xfrm>
+          <a:prstGeom prst="rect">
+            <a:avLst/>
+          </a:prstGeom>
+          <a:noFill/>
+        </p:spPr>
+        <p:txBody>
+          <a:bodyPr wrap="square" anchor="t" lIns="0" rIns="0" tIns="0" bIns="0">
+            <a:spAutoFit/>
+          </a:bodyPr>
+          <a:lstStyle/>
+          <a:p>
+            <a:pPr algn="l">
+              <a:lnSpc>
+                <a:spcPct val="105000"/>
+              </a:lnSpc>
+            </a:pPr>
+            <a:r>
+              <a:rPr sz="1400" b="1" i="0">
+                <a:solidFill>
+                  <a:srgbClr val="F0A61E"/>
+                </a:solidFill>
+                <a:latin typeface="Myriad Pro 2"/>
+              </a:rPr>
+              <a:t>07B — WHO RUNS THIS</a:t>
+            </a:r>
+          </a:p>
+        </p:txBody>
+      </p:sp>
+      <p:sp>
+        <p:nvSpPr>
+          <p:cNvPr id="4" name="TextBox 3"/>
+          <p:cNvSpPr txBox="1"/>
+          <p:nvPr/>
+        </p:nvSpPr>
+        <p:spPr>
+          <a:xfrm>
+            <a:off x="713232" y="777240"/>
+            <a:ext cx="15544800" cy="822960"/>
+          </a:xfrm>
+          <a:prstGeom prst="rect">
+            <a:avLst/>
+          </a:prstGeom>
+          <a:noFill/>
+        </p:spPr>
+        <p:txBody>
+          <a:bodyPr wrap="square" anchor="t" lIns="0" rIns="0" tIns="0" bIns="0">
+            <a:spAutoFit/>
+          </a:bodyPr>
+          <a:lstStyle/>
+          <a:p>
+            <a:pPr algn="l">
+              <a:lnSpc>
+                <a:spcPct val="105000"/>
+              </a:lnSpc>
+            </a:pPr>
+            <a:r>
+              <a:rPr sz="4000" b="1" i="0">
+                <a:solidFill>
+                  <a:srgbClr val="0B3B3E"/>
+                </a:solidFill>
+                <a:latin typeface="Myriad Pro 2"/>
+              </a:rPr>
+              <a:t>Governance &amp; Leadership</a:t>
+            </a:r>
+          </a:p>
+        </p:txBody>
+      </p:sp>
+      <p:sp>
+        <p:nvSpPr>
+          <p:cNvPr id="5" name="Rectangle 4"/>
+          <p:cNvSpPr/>
+          <p:nvPr/>
+        </p:nvSpPr>
+        <p:spPr>
+          <a:xfrm>
+            <a:off x="713232" y="1600200"/>
+            <a:ext cx="1463040" cy="38100"/>
+          </a:xfrm>
+          <a:prstGeom prst="rect">
+            <a:avLst/>
+          </a:prstGeom>
+          <a:solidFill>
+            <a:srgbClr val="F0A61E"/>
+          </a:solidFill>
+          <a:ln>
+            <a:noFill/>
+          </a:ln>
+          <a:effectLst/>
+        </p:spPr>
+        <p:style>
+          <a:lnRef idx="1">
+            <a:schemeClr val="accent1"/>
+          </a:lnRef>
+          <a:fillRef idx="3">
+            <a:schemeClr val="accent1"/>
+          </a:fillRef>
+          <a:effectRef idx="2">
+            <a:schemeClr val="accent1"/>
+          </a:effectRef>
+          <a:fontRef idx="minor">
+            <a:schemeClr val="lt1"/>
+          </a:fontRef>
+        </p:style>
+        <p:txBody>
+          <a:bodyPr rtlCol="0" anchor="ctr"/>
+          <a:lstStyle/>
+          <a:p>
+            <a:pPr algn="ctr"/>
+          </a:p>
+        </p:txBody>
+      </p:sp>
+      <p:sp>
+        <p:nvSpPr>
+          <p:cNvPr id="6" name="TextBox 5"/>
+          <p:cNvSpPr txBox="1"/>
+          <p:nvPr/>
+        </p:nvSpPr>
+        <p:spPr>
+          <a:xfrm>
+            <a:off x="713232" y="2331720"/>
+            <a:ext cx="7863840" cy="457200"/>
+          </a:xfrm>
+          <a:prstGeom prst="rect">
+            <a:avLst/>
+          </a:prstGeom>
+          <a:noFill/>
+        </p:spPr>
+        <p:txBody>
+          <a:bodyPr wrap="square" anchor="t" lIns="0" rIns="0" tIns="0" bIns="0">
+            <a:spAutoFit/>
+          </a:bodyPr>
+          <a:lstStyle/>
+          <a:p>
+            <a:pPr algn="l">
+              <a:lnSpc>
+                <a:spcPct val="105000"/>
+              </a:lnSpc>
+            </a:pPr>
+            <a:r>
+              <a:rPr sz="2000" b="1" i="0">
+                <a:solidFill>
+                  <a:srgbClr val="0B3B3E"/>
+                </a:solidFill>
+                <a:latin typeface="Myriad Pro 2"/>
+              </a:rPr>
+              <a:t>BOARD OF TRUSTEES</a:t>
+            </a:r>
+          </a:p>
+        </p:txBody>
+      </p:sp>
+      <p:sp>
+        <p:nvSpPr>
+          <p:cNvPr id="7" name="Rectangle 6"/>
+          <p:cNvSpPr/>
+          <p:nvPr/>
+        </p:nvSpPr>
+        <p:spPr>
+          <a:xfrm>
+            <a:off x="713232" y="2935224"/>
+            <a:ext cx="128016" cy="128016"/>
+          </a:xfrm>
+          <a:prstGeom prst="rect">
+            <a:avLst/>
+          </a:prstGeom>
+          <a:solidFill>
+            <a:srgbClr val="F0A61E"/>
+          </a:solidFill>
+          <a:ln>
+            <a:noFill/>
+          </a:ln>
+          <a:effectLst/>
+        </p:spPr>
+        <p:style>
+          <a:lnRef idx="1">
+            <a:schemeClr val="accent1"/>
+          </a:lnRef>
+          <a:fillRef idx="3">
+            <a:schemeClr val="accent1"/>
+          </a:fillRef>
+          <a:effectRef idx="2">
+            <a:schemeClr val="accent1"/>
+          </a:effectRef>
+          <a:fontRef idx="minor">
+            <a:schemeClr val="lt1"/>
+          </a:fontRef>
+        </p:style>
+        <p:txBody>
+          <a:bodyPr rtlCol="0" anchor="ctr"/>
+          <a:lstStyle/>
+          <a:p>
+            <a:pPr algn="ctr"/>
+          </a:p>
+        </p:txBody>
+      </p:sp>
+      <p:sp>
+        <p:nvSpPr>
+          <p:cNvPr id="8" name="TextBox 7"/>
+          <p:cNvSpPr txBox="1"/>
+          <p:nvPr/>
+        </p:nvSpPr>
+        <p:spPr>
+          <a:xfrm>
+            <a:off x="1005840" y="2880360"/>
+            <a:ext cx="7498079" cy="457200"/>
+          </a:xfrm>
+          <a:prstGeom prst="rect">
+            <a:avLst/>
+          </a:prstGeom>
+          <a:noFill/>
+        </p:spPr>
+        <p:txBody>
+          <a:bodyPr wrap="square" anchor="t" lIns="0" rIns="0" tIns="0" bIns="0">
+            <a:spAutoFit/>
+          </a:bodyPr>
+          <a:lstStyle/>
+          <a:p>
+            <a:pPr algn="l">
+              <a:lnSpc>
+                <a:spcPct val="105000"/>
+              </a:lnSpc>
+            </a:pPr>
+            <a:r>
+              <a:rPr sz="1600" b="1" i="0">
+                <a:solidFill>
+                  <a:srgbClr val="0B3B3E"/>
+                </a:solidFill>
+                <a:latin typeface="Myriad Pro 1"/>
+              </a:rPr>
+              <a:t>Danjuma Usman (CPA)  </a:t>
+            </a:r>
+            <a:r>
+              <a:rPr sz="1600" b="0" i="0">
+                <a:solidFill>
+                  <a:srgbClr val="555555"/>
+                </a:solidFill>
+                <a:latin typeface="Myriad Pro 1"/>
+              </a:rPr>
+              <a:t>Chairman — accounting &amp; finance background</a:t>
+            </a:r>
+          </a:p>
+        </p:txBody>
+      </p:sp>
+      <p:sp>
+        <p:nvSpPr>
+          <p:cNvPr id="9" name="Rectangle 8"/>
+          <p:cNvSpPr/>
+          <p:nvPr/>
+        </p:nvSpPr>
+        <p:spPr>
+          <a:xfrm>
+            <a:off x="713232" y="3392424"/>
+            <a:ext cx="128016" cy="128016"/>
+          </a:xfrm>
+          <a:prstGeom prst="rect">
+            <a:avLst/>
+          </a:prstGeom>
+          <a:solidFill>
+            <a:srgbClr val="F0A61E"/>
+          </a:solidFill>
+          <a:ln>
+            <a:noFill/>
+          </a:ln>
+          <a:effectLst/>
+        </p:spPr>
+        <p:style>
+          <a:lnRef idx="1">
+            <a:schemeClr val="accent1"/>
+          </a:lnRef>
+          <a:fillRef idx="3">
+            <a:schemeClr val="accent1"/>
+          </a:fillRef>
+          <a:effectRef idx="2">
+            <a:schemeClr val="accent1"/>
+          </a:effectRef>
+          <a:fontRef idx="minor">
+            <a:schemeClr val="lt1"/>
+          </a:fontRef>
+        </p:style>
+        <p:txBody>
+          <a:bodyPr rtlCol="0" anchor="ctr"/>
+          <a:lstStyle/>
+          <a:p>
+            <a:pPr algn="ctr"/>
+          </a:p>
+        </p:txBody>
+      </p:sp>
+      <p:sp>
+        <p:nvSpPr>
+          <p:cNvPr id="10" name="TextBox 9"/>
+          <p:cNvSpPr txBox="1"/>
+          <p:nvPr/>
+        </p:nvSpPr>
+        <p:spPr>
+          <a:xfrm>
+            <a:off x="1005840" y="3337560"/>
+            <a:ext cx="7498079" cy="457200"/>
+          </a:xfrm>
+          <a:prstGeom prst="rect">
+            <a:avLst/>
+          </a:prstGeom>
+          <a:noFill/>
+        </p:spPr>
+        <p:txBody>
+          <a:bodyPr wrap="square" anchor="t" lIns="0" rIns="0" tIns="0" bIns="0">
+            <a:spAutoFit/>
+          </a:bodyPr>
+          <a:lstStyle/>
+          <a:p>
+            <a:pPr algn="l">
+              <a:lnSpc>
+                <a:spcPct val="105000"/>
+              </a:lnSpc>
+            </a:pPr>
+            <a:r>
+              <a:rPr sz="1600" b="1" i="0">
+                <a:solidFill>
+                  <a:srgbClr val="0B3B3E"/>
+                </a:solidFill>
+                <a:latin typeface="Myriad Pro 1"/>
+              </a:rPr>
+              <a:t>Joe Onyeabor  </a:t>
+            </a:r>
+            <a:r>
+              <a:rPr sz="1600" b="0" i="0">
+                <a:solidFill>
+                  <a:srgbClr val="555555"/>
+                </a:solidFill>
+                <a:latin typeface="Myriad Pro 1"/>
+              </a:rPr>
+              <a:t>Chief Executive Officer, Board Member</a:t>
+            </a:r>
+          </a:p>
+        </p:txBody>
+      </p:sp>
+      <p:sp>
+        <p:nvSpPr>
+          <p:cNvPr id="11" name="Rectangle 10"/>
+          <p:cNvSpPr/>
+          <p:nvPr/>
+        </p:nvSpPr>
+        <p:spPr>
+          <a:xfrm>
+            <a:off x="713232" y="3849624"/>
+            <a:ext cx="128016" cy="128016"/>
+          </a:xfrm>
+          <a:prstGeom prst="rect">
+            <a:avLst/>
+          </a:prstGeom>
+          <a:solidFill>
+            <a:srgbClr val="F0A61E"/>
+          </a:solidFill>
+          <a:ln>
+            <a:noFill/>
+          </a:ln>
+          <a:effectLst/>
+        </p:spPr>
+        <p:style>
+          <a:lnRef idx="1">
+            <a:schemeClr val="accent1"/>
+          </a:lnRef>
+          <a:fillRef idx="3">
+            <a:schemeClr val="accent1"/>
+          </a:fillRef>
+          <a:effectRef idx="2">
+            <a:schemeClr val="accent1"/>
+          </a:effectRef>
+          <a:fontRef idx="minor">
+            <a:schemeClr val="lt1"/>
+          </a:fontRef>
+        </p:style>
+        <p:txBody>
+          <a:bodyPr rtlCol="0" anchor="ctr"/>
+          <a:lstStyle/>
+          <a:p>
+            <a:pPr algn="ctr"/>
+          </a:p>
+        </p:txBody>
+      </p:sp>
+      <p:sp>
+        <p:nvSpPr>
+          <p:cNvPr id="12" name="TextBox 11"/>
+          <p:cNvSpPr txBox="1"/>
+          <p:nvPr/>
+        </p:nvSpPr>
+        <p:spPr>
+          <a:xfrm>
+            <a:off x="1005840" y="3794760"/>
+            <a:ext cx="7498079" cy="457200"/>
+          </a:xfrm>
+          <a:prstGeom prst="rect">
+            <a:avLst/>
+          </a:prstGeom>
+          <a:noFill/>
+        </p:spPr>
+        <p:txBody>
+          <a:bodyPr wrap="square" anchor="t" lIns="0" rIns="0" tIns="0" bIns="0">
+            <a:spAutoFit/>
+          </a:bodyPr>
+          <a:lstStyle/>
+          <a:p>
+            <a:pPr algn="l">
+              <a:lnSpc>
+                <a:spcPct val="105000"/>
+              </a:lnSpc>
+            </a:pPr>
+            <a:r>
+              <a:rPr sz="1600" b="1" i="0">
+                <a:solidFill>
+                  <a:srgbClr val="0B3B3E"/>
+                </a:solidFill>
+                <a:latin typeface="Myriad Pro 1"/>
+              </a:rPr>
+              <a:t>Abiodun Yusuph  </a:t>
+            </a:r>
+            <a:r>
+              <a:rPr sz="1600" b="0" i="0">
+                <a:solidFill>
+                  <a:srgbClr val="555555"/>
+                </a:solidFill>
+                <a:latin typeface="Myriad Pro 1"/>
+              </a:rPr>
+              <a:t>Executive Director, Board Member</a:t>
+            </a:r>
+          </a:p>
+        </p:txBody>
+      </p:sp>
+      <p:sp>
+        <p:nvSpPr>
+          <p:cNvPr id="13" name="Rectangle 12"/>
+          <p:cNvSpPr/>
+          <p:nvPr/>
+        </p:nvSpPr>
+        <p:spPr>
+          <a:xfrm>
+            <a:off x="713232" y="4306824"/>
+            <a:ext cx="128016" cy="128016"/>
+          </a:xfrm>
+          <a:prstGeom prst="rect">
+            <a:avLst/>
+          </a:prstGeom>
+          <a:solidFill>
+            <a:srgbClr val="F0A61E"/>
+          </a:solidFill>
+          <a:ln>
+            <a:noFill/>
+          </a:ln>
+          <a:effectLst/>
+        </p:spPr>
+        <p:style>
+          <a:lnRef idx="1">
+            <a:schemeClr val="accent1"/>
+          </a:lnRef>
+          <a:fillRef idx="3">
+            <a:schemeClr val="accent1"/>
+          </a:fillRef>
+          <a:effectRef idx="2">
+            <a:schemeClr val="accent1"/>
+          </a:effectRef>
+          <a:fontRef idx="minor">
+            <a:schemeClr val="lt1"/>
+          </a:fontRef>
+        </p:style>
+        <p:txBody>
+          <a:bodyPr rtlCol="0" anchor="ctr"/>
+          <a:lstStyle/>
+          <a:p>
+            <a:pPr algn="ctr"/>
+          </a:p>
+        </p:txBody>
+      </p:sp>
+      <p:sp>
+        <p:nvSpPr>
+          <p:cNvPr id="14" name="TextBox 13"/>
+          <p:cNvSpPr txBox="1"/>
+          <p:nvPr/>
+        </p:nvSpPr>
+        <p:spPr>
+          <a:xfrm>
+            <a:off x="1005840" y="4251960"/>
+            <a:ext cx="7498079" cy="457200"/>
+          </a:xfrm>
+          <a:prstGeom prst="rect">
+            <a:avLst/>
+          </a:prstGeom>
+          <a:noFill/>
+        </p:spPr>
+        <p:txBody>
+          <a:bodyPr wrap="square" anchor="t" lIns="0" rIns="0" tIns="0" bIns="0">
+            <a:spAutoFit/>
+          </a:bodyPr>
+          <a:lstStyle/>
+          <a:p>
+            <a:pPr algn="l">
+              <a:lnSpc>
+                <a:spcPct val="105000"/>
+              </a:lnSpc>
+            </a:pPr>
+            <a:r>
+              <a:rPr sz="1600" b="1" i="0">
+                <a:solidFill>
+                  <a:srgbClr val="0B3B3E"/>
+                </a:solidFill>
+                <a:latin typeface="Myriad Pro 1"/>
+              </a:rPr>
+              <a:t>Sotonye Wakama  </a:t>
+            </a:r>
+            <a:r>
+              <a:rPr sz="1600" b="0" i="0">
+                <a:solidFill>
+                  <a:srgbClr val="555555"/>
+                </a:solidFill>
+                <a:latin typeface="Myriad Pro 1"/>
+              </a:rPr>
+              <a:t>Board Member</a:t>
+            </a:r>
+          </a:p>
+        </p:txBody>
+      </p:sp>
+      <p:sp>
+        <p:nvSpPr>
+          <p:cNvPr id="15" name="Rectangle 14"/>
+          <p:cNvSpPr/>
+          <p:nvPr/>
+        </p:nvSpPr>
+        <p:spPr>
+          <a:xfrm>
+            <a:off x="713232" y="4764024"/>
+            <a:ext cx="128016" cy="128016"/>
+          </a:xfrm>
+          <a:prstGeom prst="rect">
+            <a:avLst/>
+          </a:prstGeom>
+          <a:solidFill>
+            <a:srgbClr val="F0A61E"/>
+          </a:solidFill>
+          <a:ln>
+            <a:noFill/>
+          </a:ln>
+          <a:effectLst/>
+        </p:spPr>
+        <p:style>
+          <a:lnRef idx="1">
+            <a:schemeClr val="accent1"/>
+          </a:lnRef>
+          <a:fillRef idx="3">
+            <a:schemeClr val="accent1"/>
+          </a:fillRef>
+          <a:effectRef idx="2">
+            <a:schemeClr val="accent1"/>
+          </a:effectRef>
+          <a:fontRef idx="minor">
+            <a:schemeClr val="lt1"/>
+          </a:fontRef>
+        </p:style>
+        <p:txBody>
+          <a:bodyPr rtlCol="0" anchor="ctr"/>
+          <a:lstStyle/>
+          <a:p>
+            <a:pPr algn="ctr"/>
+          </a:p>
+        </p:txBody>
+      </p:sp>
+      <p:sp>
+        <p:nvSpPr>
+          <p:cNvPr id="16" name="TextBox 15"/>
+          <p:cNvSpPr txBox="1"/>
+          <p:nvPr/>
+        </p:nvSpPr>
+        <p:spPr>
+          <a:xfrm>
+            <a:off x="1005840" y="4709160"/>
+            <a:ext cx="7498079" cy="457200"/>
+          </a:xfrm>
+          <a:prstGeom prst="rect">
+            <a:avLst/>
+          </a:prstGeom>
+          <a:noFill/>
+        </p:spPr>
+        <p:txBody>
+          <a:bodyPr wrap="square" anchor="t" lIns="0" rIns="0" tIns="0" bIns="0">
+            <a:spAutoFit/>
+          </a:bodyPr>
+          <a:lstStyle/>
+          <a:p>
+            <a:pPr algn="l">
+              <a:lnSpc>
+                <a:spcPct val="105000"/>
+              </a:lnSpc>
+            </a:pPr>
+            <a:r>
+              <a:rPr sz="1600" b="1" i="0">
+                <a:solidFill>
+                  <a:srgbClr val="0B3B3E"/>
+                </a:solidFill>
+                <a:latin typeface="Myriad Pro 1"/>
+              </a:rPr>
+              <a:t>Ochoche Owoicho  </a:t>
+            </a:r>
+            <a:r>
+              <a:rPr sz="1600" b="0" i="0">
+                <a:solidFill>
+                  <a:srgbClr val="555555"/>
+                </a:solidFill>
+                <a:latin typeface="Myriad Pro 1"/>
+              </a:rPr>
+              <a:t>Board Member</a:t>
+            </a:r>
+          </a:p>
+        </p:txBody>
+      </p:sp>
+      <p:sp>
+        <p:nvSpPr>
+          <p:cNvPr id="17" name="TextBox 16"/>
+          <p:cNvSpPr txBox="1"/>
+          <p:nvPr/>
+        </p:nvSpPr>
+        <p:spPr>
+          <a:xfrm>
+            <a:off x="713232" y="5303520"/>
+            <a:ext cx="7863840" cy="1828800"/>
+          </a:xfrm>
+          <a:prstGeom prst="rect">
+            <a:avLst/>
+          </a:prstGeom>
+          <a:noFill/>
+        </p:spPr>
+        <p:txBody>
+          <a:bodyPr wrap="square" anchor="t" lIns="0" rIns="0" tIns="0" bIns="0">
+            <a:spAutoFit/>
+          </a:bodyPr>
+          <a:lstStyle/>
+          <a:p>
+            <a:pPr algn="l">
+              <a:lnSpc>
+                <a:spcPct val="125000"/>
+              </a:lnSpc>
+            </a:pPr>
+            <a:r>
+              <a:rPr sz="1500" b="1" i="0">
+                <a:solidFill>
+                  <a:srgbClr val="0B3B3E"/>
+                </a:solidFill>
+                <a:latin typeface="Myriad Pro 1"/>
+              </a:rPr>
+              <a:t>Governance in practice:</a:t>
+            </a:r>
+          </a:p>
+          <a:p>
+            <a:pPr algn="l">
+              <a:lnSpc>
+                <a:spcPct val="125000"/>
+              </a:lnSpc>
+            </a:pPr>
+            <a:r>
+              <a:rPr sz="1500" b="0" i="0">
+                <a:solidFill>
+                  <a:srgbClr val="222222"/>
+                </a:solidFill>
+                <a:latin typeface="Myriad Pro 1"/>
+              </a:rPr>
+              <a:t>• Standing committees with written charters</a:t>
+            </a:r>
+          </a:p>
+          <a:p>
+            <a:pPr algn="l">
+              <a:lnSpc>
+                <a:spcPct val="125000"/>
+              </a:lnSpc>
+            </a:pPr>
+            <a:r>
+              <a:rPr sz="1500" b="0" i="0">
+                <a:solidFill>
+                  <a:srgbClr val="222222"/>
+                </a:solidFill>
+                <a:latin typeface="Myriad Pro 1"/>
+              </a:rPr>
+              <a:t>• Finance &amp; General-Purpose Committee runs an annual Board/committee/trustee evaluation</a:t>
+            </a:r>
+          </a:p>
+          <a:p>
+            <a:pPr algn="l">
+              <a:lnSpc>
+                <a:spcPct val="125000"/>
+              </a:lnSpc>
+            </a:pPr>
+            <a:r>
+              <a:rPr sz="1500" b="0" i="0">
+                <a:solidFill>
+                  <a:srgbClr val="222222"/>
+                </a:solidFill>
+                <a:latin typeface="Myriad Pro 1"/>
+              </a:rPr>
+              <a:t>• Whistle-blowing policy (hotline, email, web channels)</a:t>
+            </a:r>
+          </a:p>
+          <a:p>
+            <a:pPr algn="l">
+              <a:lnSpc>
+                <a:spcPct val="125000"/>
+              </a:lnSpc>
+            </a:pPr>
+            <a:r>
+              <a:rPr sz="1500" b="0" i="0">
+                <a:solidFill>
+                  <a:srgbClr val="222222"/>
+                </a:solidFill>
+                <a:latin typeface="Myriad Pro 1"/>
+              </a:rPr>
+              <a:t>• Board ethics policy on a 3-year review cycle</a:t>
+            </a:r>
+          </a:p>
+          <a:p>
+            <a:pPr algn="l">
+              <a:lnSpc>
+                <a:spcPct val="125000"/>
+              </a:lnSpc>
+            </a:pPr>
+            <a:r>
+              <a:rPr sz="1500" b="0" i="0">
+                <a:solidFill>
+                  <a:srgbClr val="222222"/>
+                </a:solidFill>
+                <a:latin typeface="Myriad Pro 1"/>
+              </a:rPr>
+              <a:t>• Board met 5 times in 2025 — full attendance, no membership changes</a:t>
+            </a:r>
+          </a:p>
+        </p:txBody>
+      </p:sp>
+      <p:sp>
+        <p:nvSpPr>
+          <p:cNvPr id="18" name="TextBox 17"/>
+          <p:cNvSpPr txBox="1"/>
+          <p:nvPr/>
+        </p:nvSpPr>
+        <p:spPr>
+          <a:xfrm>
+            <a:off x="9235440" y="2331720"/>
+            <a:ext cx="7863840" cy="457200"/>
+          </a:xfrm>
+          <a:prstGeom prst="rect">
+            <a:avLst/>
+          </a:prstGeom>
+          <a:noFill/>
+        </p:spPr>
+        <p:txBody>
+          <a:bodyPr wrap="square" anchor="t" lIns="0" rIns="0" tIns="0" bIns="0">
+            <a:spAutoFit/>
+          </a:bodyPr>
+          <a:lstStyle/>
+          <a:p>
+            <a:pPr algn="l">
+              <a:lnSpc>
+                <a:spcPct val="105000"/>
+              </a:lnSpc>
+            </a:pPr>
+            <a:r>
+              <a:rPr sz="2000" b="1" i="0">
+                <a:solidFill>
+                  <a:srgbClr val="0B3B3E"/>
+                </a:solidFill>
+                <a:latin typeface="Myriad Pro 2"/>
+              </a:rPr>
+              <a:t>OPERATIONAL MANAGEMENT TEAM (70+ STAFF)</a:t>
+            </a:r>
+          </a:p>
+        </p:txBody>
+      </p:sp>
+      <p:sp>
+        <p:nvSpPr>
+          <p:cNvPr id="19" name="Rectangle 18"/>
+          <p:cNvSpPr/>
+          <p:nvPr/>
+        </p:nvSpPr>
+        <p:spPr>
+          <a:xfrm>
+            <a:off x="9235440" y="2880360"/>
+            <a:ext cx="7863840" cy="1051560"/>
+          </a:xfrm>
+          <a:prstGeom prst="rect">
+            <a:avLst/>
+          </a:prstGeom>
+          <a:solidFill>
+            <a:srgbClr val="F5FAF9"/>
+          </a:solidFill>
+          <a:ln>
+            <a:noFill/>
+          </a:ln>
+          <a:effectLst/>
+        </p:spPr>
+        <p:style>
+          <a:lnRef idx="1">
+            <a:schemeClr val="accent1"/>
+          </a:lnRef>
+          <a:fillRef idx="3">
+            <a:schemeClr val="accent1"/>
+          </a:fillRef>
+          <a:effectRef idx="2">
+            <a:schemeClr val="accent1"/>
+          </a:effectRef>
+          <a:fontRef idx="minor">
+            <a:schemeClr val="lt1"/>
+          </a:fontRef>
+        </p:style>
+        <p:txBody>
+          <a:bodyPr rtlCol="0" anchor="ctr"/>
+          <a:lstStyle/>
+          <a:p>
+            <a:pPr algn="ctr"/>
+          </a:p>
+        </p:txBody>
+      </p:sp>
+      <p:sp>
+        <p:nvSpPr>
+          <p:cNvPr id="20" name="TextBox 19"/>
+          <p:cNvSpPr txBox="1"/>
+          <p:nvPr/>
+        </p:nvSpPr>
+        <p:spPr>
+          <a:xfrm>
+            <a:off x="9418320" y="2971800"/>
+            <a:ext cx="7498079" cy="365760"/>
+          </a:xfrm>
+          <a:prstGeom prst="rect">
+            <a:avLst/>
+          </a:prstGeom>
+          <a:noFill/>
+        </p:spPr>
+        <p:txBody>
+          <a:bodyPr wrap="square" anchor="t" lIns="0" rIns="0" tIns="0" bIns="0">
+            <a:spAutoFit/>
+          </a:bodyPr>
+          <a:lstStyle/>
+          <a:p>
+            <a:pPr algn="l">
+              <a:lnSpc>
+                <a:spcPct val="105000"/>
+              </a:lnSpc>
+            </a:pPr>
+            <a:r>
+              <a:rPr sz="1600" b="1" i="0">
+                <a:solidFill>
+                  <a:srgbClr val="0B3B3E"/>
+                </a:solidFill>
+                <a:latin typeface="Myriad Pro 1"/>
+              </a:rPr>
+              <a:t>Atsu Cornelius Apuye</a:t>
+            </a:r>
+          </a:p>
+        </p:txBody>
+      </p:sp>
+      <p:sp>
+        <p:nvSpPr>
+          <p:cNvPr id="21" name="TextBox 20"/>
+          <p:cNvSpPr txBox="1"/>
+          <p:nvPr/>
+        </p:nvSpPr>
+        <p:spPr>
+          <a:xfrm>
+            <a:off x="9418320" y="3383280"/>
+            <a:ext cx="7498079" cy="502920"/>
+          </a:xfrm>
+          <a:prstGeom prst="rect">
+            <a:avLst/>
+          </a:prstGeom>
+          <a:noFill/>
+        </p:spPr>
+        <p:txBody>
+          <a:bodyPr wrap="square" anchor="t" lIns="0" rIns="0" tIns="0" bIns="0">
+            <a:spAutoFit/>
+          </a:bodyPr>
+          <a:lstStyle/>
+          <a:p>
+            <a:pPr algn="l">
+              <a:lnSpc>
+                <a:spcPct val="105000"/>
+              </a:lnSpc>
+            </a:pPr>
+            <a:r>
+              <a:rPr sz="1400" b="0" i="0">
+                <a:solidFill>
+                  <a:srgbClr val="555555"/>
+                </a:solidFill>
+                <a:latin typeface="Myriad Pro 1"/>
+              </a:rPr>
+              <a:t>Head, Micro-Credit, Retail Business &amp; Field Operations</a:t>
+            </a:r>
+          </a:p>
+        </p:txBody>
+      </p:sp>
+      <p:sp>
+        <p:nvSpPr>
+          <p:cNvPr id="22" name="Rectangle 21"/>
+          <p:cNvSpPr/>
+          <p:nvPr/>
+        </p:nvSpPr>
+        <p:spPr>
+          <a:xfrm>
+            <a:off x="9235440" y="4069080"/>
+            <a:ext cx="7863840" cy="1051560"/>
+          </a:xfrm>
+          <a:prstGeom prst="rect">
+            <a:avLst/>
+          </a:prstGeom>
+          <a:solidFill>
+            <a:srgbClr val="F5FAF9"/>
+          </a:solidFill>
+          <a:ln>
+            <a:noFill/>
+          </a:ln>
+          <a:effectLst/>
+        </p:spPr>
+        <p:style>
+          <a:lnRef idx="1">
+            <a:schemeClr val="accent1"/>
+          </a:lnRef>
+          <a:fillRef idx="3">
+            <a:schemeClr val="accent1"/>
+          </a:fillRef>
+          <a:effectRef idx="2">
+            <a:schemeClr val="accent1"/>
+          </a:effectRef>
+          <a:fontRef idx="minor">
+            <a:schemeClr val="lt1"/>
+          </a:fontRef>
+        </p:style>
+        <p:txBody>
+          <a:bodyPr rtlCol="0" anchor="ctr"/>
+          <a:lstStyle/>
+          <a:p>
+            <a:pPr algn="ctr"/>
+          </a:p>
+        </p:txBody>
+      </p:sp>
+      <p:sp>
+        <p:nvSpPr>
+          <p:cNvPr id="23" name="TextBox 22"/>
+          <p:cNvSpPr txBox="1"/>
+          <p:nvPr/>
+        </p:nvSpPr>
+        <p:spPr>
+          <a:xfrm>
+            <a:off x="9418320" y="4160520"/>
+            <a:ext cx="7498079" cy="365760"/>
+          </a:xfrm>
+          <a:prstGeom prst="rect">
+            <a:avLst/>
+          </a:prstGeom>
+          <a:noFill/>
+        </p:spPr>
+        <p:txBody>
+          <a:bodyPr wrap="square" anchor="t" lIns="0" rIns="0" tIns="0" bIns="0">
+            <a:spAutoFit/>
+          </a:bodyPr>
+          <a:lstStyle/>
+          <a:p>
+            <a:pPr algn="l">
+              <a:lnSpc>
+                <a:spcPct val="105000"/>
+              </a:lnSpc>
+            </a:pPr>
+            <a:r>
+              <a:rPr sz="1600" b="1" i="0">
+                <a:solidFill>
+                  <a:srgbClr val="0B3B3E"/>
+                </a:solidFill>
+                <a:latin typeface="Myriad Pro 1"/>
+              </a:rPr>
+              <a:t>Adaorah Blessing Oforkansi</a:t>
+            </a:r>
+          </a:p>
+        </p:txBody>
+      </p:sp>
+      <p:sp>
+        <p:nvSpPr>
+          <p:cNvPr id="24" name="TextBox 23"/>
+          <p:cNvSpPr txBox="1"/>
+          <p:nvPr/>
+        </p:nvSpPr>
+        <p:spPr>
+          <a:xfrm>
+            <a:off x="9418320" y="4572000"/>
+            <a:ext cx="7498079" cy="502920"/>
+          </a:xfrm>
+          <a:prstGeom prst="rect">
+            <a:avLst/>
+          </a:prstGeom>
+          <a:noFill/>
+        </p:spPr>
+        <p:txBody>
+          <a:bodyPr wrap="square" anchor="t" lIns="0" rIns="0" tIns="0" bIns="0">
+            <a:spAutoFit/>
+          </a:bodyPr>
+          <a:lstStyle/>
+          <a:p>
+            <a:pPr algn="l">
+              <a:lnSpc>
+                <a:spcPct val="105000"/>
+              </a:lnSpc>
+            </a:pPr>
+            <a:r>
+              <a:rPr sz="1400" b="0" i="0">
+                <a:solidFill>
+                  <a:srgbClr val="555555"/>
+                </a:solidFill>
+                <a:latin typeface="Myriad Pro 1"/>
+              </a:rPr>
+              <a:t>Head, Human Capital Management</a:t>
+            </a:r>
+          </a:p>
+        </p:txBody>
+      </p:sp>
+      <p:sp>
+        <p:nvSpPr>
+          <p:cNvPr id="25" name="Rectangle 24"/>
+          <p:cNvSpPr/>
+          <p:nvPr/>
+        </p:nvSpPr>
+        <p:spPr>
+          <a:xfrm>
+            <a:off x="9235440" y="5257800"/>
+            <a:ext cx="7863840" cy="1051560"/>
+          </a:xfrm>
+          <a:prstGeom prst="rect">
+            <a:avLst/>
+          </a:prstGeom>
+          <a:solidFill>
+            <a:srgbClr val="F5FAF9"/>
+          </a:solidFill>
+          <a:ln>
+            <a:noFill/>
+          </a:ln>
+          <a:effectLst/>
+        </p:spPr>
+        <p:style>
+          <a:lnRef idx="1">
+            <a:schemeClr val="accent1"/>
+          </a:lnRef>
+          <a:fillRef idx="3">
+            <a:schemeClr val="accent1"/>
+          </a:fillRef>
+          <a:effectRef idx="2">
+            <a:schemeClr val="accent1"/>
+          </a:effectRef>
+          <a:fontRef idx="minor">
+            <a:schemeClr val="lt1"/>
+          </a:fontRef>
+        </p:style>
+        <p:txBody>
+          <a:bodyPr rtlCol="0" anchor="ctr"/>
+          <a:lstStyle/>
+          <a:p>
+            <a:pPr algn="ctr"/>
+          </a:p>
+        </p:txBody>
+      </p:sp>
+      <p:sp>
+        <p:nvSpPr>
+          <p:cNvPr id="26" name="TextBox 25"/>
+          <p:cNvSpPr txBox="1"/>
+          <p:nvPr/>
+        </p:nvSpPr>
+        <p:spPr>
+          <a:xfrm>
+            <a:off x="9418320" y="5349240"/>
+            <a:ext cx="7498079" cy="365760"/>
+          </a:xfrm>
+          <a:prstGeom prst="rect">
+            <a:avLst/>
+          </a:prstGeom>
+          <a:noFill/>
+        </p:spPr>
+        <p:txBody>
+          <a:bodyPr wrap="square" anchor="t" lIns="0" rIns="0" tIns="0" bIns="0">
+            <a:spAutoFit/>
+          </a:bodyPr>
+          <a:lstStyle/>
+          <a:p>
+            <a:pPr algn="l">
+              <a:lnSpc>
+                <a:spcPct val="105000"/>
+              </a:lnSpc>
+            </a:pPr>
+            <a:r>
+              <a:rPr sz="1600" b="1" i="0">
+                <a:solidFill>
+                  <a:srgbClr val="0B3B3E"/>
+                </a:solidFill>
+                <a:latin typeface="Myriad Pro 1"/>
+              </a:rPr>
+              <a:t>Nafisat Usman</a:t>
+            </a:r>
+          </a:p>
+        </p:txBody>
+      </p:sp>
+      <p:sp>
+        <p:nvSpPr>
+          <p:cNvPr id="27" name="TextBox 26"/>
+          <p:cNvSpPr txBox="1"/>
+          <p:nvPr/>
+        </p:nvSpPr>
+        <p:spPr>
+          <a:xfrm>
+            <a:off x="9418320" y="5760720"/>
+            <a:ext cx="7498079" cy="502920"/>
+          </a:xfrm>
+          <a:prstGeom prst="rect">
+            <a:avLst/>
+          </a:prstGeom>
+          <a:noFill/>
+        </p:spPr>
+        <p:txBody>
+          <a:bodyPr wrap="square" anchor="t" lIns="0" rIns="0" tIns="0" bIns="0">
+            <a:spAutoFit/>
+          </a:bodyPr>
+          <a:lstStyle/>
+          <a:p>
+            <a:pPr algn="l">
+              <a:lnSpc>
+                <a:spcPct val="105000"/>
+              </a:lnSpc>
+            </a:pPr>
+            <a:r>
+              <a:rPr sz="1400" b="0" i="0">
+                <a:solidFill>
+                  <a:srgbClr val="555555"/>
+                </a:solidFill>
+                <a:latin typeface="Myriad Pro 1"/>
+              </a:rPr>
+              <a:t>Head, Branch Operations</a:t>
+            </a:r>
+          </a:p>
+        </p:txBody>
+      </p:sp>
+      <p:sp>
+        <p:nvSpPr>
+          <p:cNvPr id="28" name="Rectangle 27"/>
+          <p:cNvSpPr/>
+          <p:nvPr/>
+        </p:nvSpPr>
+        <p:spPr>
+          <a:xfrm>
+            <a:off x="9235440" y="6446520"/>
+            <a:ext cx="7863840" cy="1051560"/>
+          </a:xfrm>
+          <a:prstGeom prst="rect">
+            <a:avLst/>
+          </a:prstGeom>
+          <a:solidFill>
+            <a:srgbClr val="F5FAF9"/>
+          </a:solidFill>
+          <a:ln>
+            <a:noFill/>
+          </a:ln>
+          <a:effectLst/>
+        </p:spPr>
+        <p:style>
+          <a:lnRef idx="1">
+            <a:schemeClr val="accent1"/>
+          </a:lnRef>
+          <a:fillRef idx="3">
+            <a:schemeClr val="accent1"/>
+          </a:fillRef>
+          <a:effectRef idx="2">
+            <a:schemeClr val="accent1"/>
+          </a:effectRef>
+          <a:fontRef idx="minor">
+            <a:schemeClr val="lt1"/>
+          </a:fontRef>
+        </p:style>
+        <p:txBody>
+          <a:bodyPr rtlCol="0" anchor="ctr"/>
+          <a:lstStyle/>
+          <a:p>
+            <a:pPr algn="ctr"/>
+          </a:p>
+        </p:txBody>
+      </p:sp>
+      <p:sp>
+        <p:nvSpPr>
+          <p:cNvPr id="29" name="TextBox 28"/>
+          <p:cNvSpPr txBox="1"/>
+          <p:nvPr/>
+        </p:nvSpPr>
+        <p:spPr>
+          <a:xfrm>
+            <a:off x="9418320" y="6537960"/>
+            <a:ext cx="7498079" cy="365760"/>
+          </a:xfrm>
+          <a:prstGeom prst="rect">
+            <a:avLst/>
+          </a:prstGeom>
+          <a:noFill/>
+        </p:spPr>
+        <p:txBody>
+          <a:bodyPr wrap="square" anchor="t" lIns="0" rIns="0" tIns="0" bIns="0">
+            <a:spAutoFit/>
+          </a:bodyPr>
+          <a:lstStyle/>
+          <a:p>
+            <a:pPr algn="l">
+              <a:lnSpc>
+                <a:spcPct val="105000"/>
+              </a:lnSpc>
+            </a:pPr>
+            <a:r>
+              <a:rPr sz="1600" b="1" i="0">
+                <a:solidFill>
+                  <a:srgbClr val="0B3B3E"/>
+                </a:solidFill>
+                <a:latin typeface="Myriad Pro 1"/>
+              </a:rPr>
+              <a:t>Uwaezuoke Ifeyinwa Augusta</a:t>
+            </a:r>
+          </a:p>
+        </p:txBody>
+      </p:sp>
+      <p:sp>
+        <p:nvSpPr>
+          <p:cNvPr id="30" name="TextBox 29"/>
+          <p:cNvSpPr txBox="1"/>
+          <p:nvPr/>
+        </p:nvSpPr>
+        <p:spPr>
+          <a:xfrm>
+            <a:off x="9418320" y="6949440"/>
+            <a:ext cx="7498079" cy="502920"/>
+          </a:xfrm>
+          <a:prstGeom prst="rect">
+            <a:avLst/>
+          </a:prstGeom>
+          <a:noFill/>
+        </p:spPr>
+        <p:txBody>
+          <a:bodyPr wrap="square" anchor="t" lIns="0" rIns="0" tIns="0" bIns="0">
+            <a:spAutoFit/>
+          </a:bodyPr>
+          <a:lstStyle/>
+          <a:p>
+            <a:pPr algn="l">
+              <a:lnSpc>
+                <a:spcPct val="105000"/>
+              </a:lnSpc>
+            </a:pPr>
+            <a:r>
+              <a:rPr sz="1400" b="0" i="0">
+                <a:solidFill>
+                  <a:srgbClr val="555555"/>
+                </a:solidFill>
+                <a:latin typeface="Myriad Pro 1"/>
+              </a:rPr>
+              <a:t>Head, Operations</a:t>
+            </a:r>
+          </a:p>
+        </p:txBody>
+      </p:sp>
+      <p:sp>
+        <p:nvSpPr>
+          <p:cNvPr id="31" name="Rectangle 30"/>
+          <p:cNvSpPr/>
+          <p:nvPr/>
+        </p:nvSpPr>
+        <p:spPr>
+          <a:xfrm>
+            <a:off x="9235440" y="7635240"/>
+            <a:ext cx="7863840" cy="1051560"/>
+          </a:xfrm>
+          <a:prstGeom prst="rect">
+            <a:avLst/>
+          </a:prstGeom>
+          <a:solidFill>
+            <a:srgbClr val="F5FAF9"/>
+          </a:solidFill>
+          <a:ln>
+            <a:noFill/>
+          </a:ln>
+          <a:effectLst/>
+        </p:spPr>
+        <p:style>
+          <a:lnRef idx="1">
+            <a:schemeClr val="accent1"/>
+          </a:lnRef>
+          <a:fillRef idx="3">
+            <a:schemeClr val="accent1"/>
+          </a:fillRef>
+          <a:effectRef idx="2">
+            <a:schemeClr val="accent1"/>
+          </a:effectRef>
+          <a:fontRef idx="minor">
+            <a:schemeClr val="lt1"/>
+          </a:fontRef>
+        </p:style>
+        <p:txBody>
+          <a:bodyPr rtlCol="0" anchor="ctr"/>
+          <a:lstStyle/>
+          <a:p>
+            <a:pPr algn="ctr"/>
+          </a:p>
+        </p:txBody>
+      </p:sp>
+      <p:sp>
+        <p:nvSpPr>
+          <p:cNvPr id="32" name="TextBox 31"/>
+          <p:cNvSpPr txBox="1"/>
+          <p:nvPr/>
+        </p:nvSpPr>
+        <p:spPr>
+          <a:xfrm>
+            <a:off x="9418320" y="7726680"/>
+            <a:ext cx="7498079" cy="365760"/>
+          </a:xfrm>
+          <a:prstGeom prst="rect">
+            <a:avLst/>
+          </a:prstGeom>
+          <a:noFill/>
+        </p:spPr>
+        <p:txBody>
+          <a:bodyPr wrap="square" anchor="t" lIns="0" rIns="0" tIns="0" bIns="0">
+            <a:spAutoFit/>
+          </a:bodyPr>
+          <a:lstStyle/>
+          <a:p>
+            <a:pPr algn="l">
+              <a:lnSpc>
+                <a:spcPct val="105000"/>
+              </a:lnSpc>
+            </a:pPr>
+            <a:r>
+              <a:rPr sz="1600" b="1" i="0">
+                <a:solidFill>
+                  <a:srgbClr val="0B3B3E"/>
+                </a:solidFill>
+                <a:latin typeface="Myriad Pro 1"/>
+              </a:rPr>
+              <a:t>Franklin Victoria Enewa</a:t>
+            </a:r>
+          </a:p>
+        </p:txBody>
+      </p:sp>
+      <p:sp>
+        <p:nvSpPr>
+          <p:cNvPr id="33" name="TextBox 32"/>
+          <p:cNvSpPr txBox="1"/>
+          <p:nvPr/>
+        </p:nvSpPr>
+        <p:spPr>
+          <a:xfrm>
+            <a:off x="9418320" y="8138160"/>
+            <a:ext cx="7498079" cy="502920"/>
+          </a:xfrm>
+          <a:prstGeom prst="rect">
+            <a:avLst/>
+          </a:prstGeom>
+          <a:noFill/>
+        </p:spPr>
+        <p:txBody>
+          <a:bodyPr wrap="square" anchor="t" lIns="0" rIns="0" tIns="0" bIns="0">
+            <a:spAutoFit/>
+          </a:bodyPr>
+          <a:lstStyle/>
+          <a:p>
+            <a:pPr algn="l">
+              <a:lnSpc>
+                <a:spcPct val="105000"/>
+              </a:lnSpc>
+            </a:pPr>
+            <a:r>
+              <a:rPr sz="1400" b="0" i="0">
+                <a:solidFill>
+                  <a:srgbClr val="555555"/>
+                </a:solidFill>
+                <a:latin typeface="Myriad Pro 1"/>
+              </a:rPr>
+              <a:t>Development Partnership Engagement Officer &amp; Project Manager</a:t>
+            </a:r>
+          </a:p>
+        </p:txBody>
+      </p:sp>
+      <p:sp>
+        <p:nvSpPr>
+          <p:cNvPr id="34" name="Rectangle 33"/>
+          <p:cNvSpPr/>
+          <p:nvPr/>
+        </p:nvSpPr>
+        <p:spPr>
+          <a:xfrm>
+            <a:off x="9235440" y="8823960"/>
+            <a:ext cx="7863840" cy="1051560"/>
+          </a:xfrm>
+          <a:prstGeom prst="rect">
+            <a:avLst/>
+          </a:prstGeom>
+          <a:solidFill>
+            <a:srgbClr val="F5FAF9"/>
+          </a:solidFill>
+          <a:ln>
+            <a:noFill/>
+          </a:ln>
+          <a:effectLst/>
+        </p:spPr>
+        <p:style>
+          <a:lnRef idx="1">
+            <a:schemeClr val="accent1"/>
+          </a:lnRef>
+          <a:fillRef idx="3">
+            <a:schemeClr val="accent1"/>
+          </a:fillRef>
+          <a:effectRef idx="2">
+            <a:schemeClr val="accent1"/>
+          </a:effectRef>
+          <a:fontRef idx="minor">
+            <a:schemeClr val="lt1"/>
+          </a:fontRef>
+        </p:style>
+        <p:txBody>
+          <a:bodyPr rtlCol="0" anchor="ctr"/>
+          <a:lstStyle/>
+          <a:p>
+            <a:pPr algn="ctr"/>
+          </a:p>
+        </p:txBody>
+      </p:sp>
+      <p:sp>
+        <p:nvSpPr>
+          <p:cNvPr id="35" name="TextBox 34"/>
+          <p:cNvSpPr txBox="1"/>
+          <p:nvPr/>
+        </p:nvSpPr>
+        <p:spPr>
+          <a:xfrm>
+            <a:off x="9418320" y="8915400"/>
+            <a:ext cx="7498079" cy="365760"/>
+          </a:xfrm>
+          <a:prstGeom prst="rect">
+            <a:avLst/>
+          </a:prstGeom>
+          <a:noFill/>
+        </p:spPr>
+        <p:txBody>
+          <a:bodyPr wrap="square" anchor="t" lIns="0" rIns="0" tIns="0" bIns="0">
+            <a:spAutoFit/>
+          </a:bodyPr>
+          <a:lstStyle/>
+          <a:p>
+            <a:pPr algn="l">
+              <a:lnSpc>
+                <a:spcPct val="105000"/>
+              </a:lnSpc>
+            </a:pPr>
+            <a:r>
+              <a:rPr sz="1600" b="1" i="0">
+                <a:solidFill>
+                  <a:srgbClr val="0B3B3E"/>
+                </a:solidFill>
+                <a:latin typeface="Myriad Pro 1"/>
+              </a:rPr>
+              <a:t>Offem Happiness</a:t>
+            </a:r>
+          </a:p>
+        </p:txBody>
+      </p:sp>
+      <p:sp>
+        <p:nvSpPr>
+          <p:cNvPr id="36" name="TextBox 35"/>
+          <p:cNvSpPr txBox="1"/>
+          <p:nvPr/>
+        </p:nvSpPr>
+        <p:spPr>
+          <a:xfrm>
+            <a:off x="9418320" y="9326880"/>
+            <a:ext cx="7498079" cy="502920"/>
+          </a:xfrm>
+          <a:prstGeom prst="rect">
+            <a:avLst/>
+          </a:prstGeom>
+          <a:noFill/>
+        </p:spPr>
+        <p:txBody>
+          <a:bodyPr wrap="square" anchor="t" lIns="0" rIns="0" tIns="0" bIns="0">
+            <a:spAutoFit/>
+          </a:bodyPr>
+          <a:lstStyle/>
+          <a:p>
+            <a:pPr algn="l">
+              <a:lnSpc>
+                <a:spcPct val="105000"/>
+              </a:lnSpc>
+            </a:pPr>
+            <a:r>
+              <a:rPr sz="1400" b="0" i="0">
+                <a:solidFill>
+                  <a:srgbClr val="555555"/>
+                </a:solidFill>
+                <a:latin typeface="Myriad Pro 1"/>
+              </a:rPr>
+              <a:t>Head, Customer Service</a:t>
+            </a:r>
+          </a:p>
+        </p:txBody>
+      </p:sp>
+      <p:sp>
+        <p:nvSpPr>
+          <p:cNvPr id="37" name="TextBox 36"/>
+          <p:cNvSpPr txBox="1"/>
+          <p:nvPr/>
+        </p:nvSpPr>
+        <p:spPr>
+          <a:xfrm>
+            <a:off x="13286232" y="128016"/>
+            <a:ext cx="4690872" cy="822960"/>
+          </a:xfrm>
+          <a:prstGeom prst="rect">
+            <a:avLst/>
+          </a:prstGeom>
+          <a:noFill/>
+        </p:spPr>
+        <p:txBody>
+          <a:bodyPr wrap="square" anchor="t" lIns="0" rIns="0" tIns="0" bIns="0">
+            <a:spAutoFit/>
+          </a:bodyPr>
+          <a:lstStyle/>
+          <a:p>
+            <a:pPr algn="l">
+              <a:lnSpc>
+                <a:spcPct val="115000"/>
+              </a:lnSpc>
+            </a:pPr>
+            <a:r>
+              <a:rPr sz="3800" b="0" i="0">
+                <a:solidFill>
+                  <a:srgbClr val="57B6B2"/>
+                </a:solidFill>
+                <a:latin typeface="Myriad Pro 1"/>
+              </a:rPr>
+              <a:t>• Time allocated: (2 minutes)</a:t>
+            </a:r>
+          </a:p>
+        </p:txBody>
+      </p:sp>
+    </p:spTree>
+  </p:cSld>
+  <p:clrMapOvr>
+    <a:masterClrMapping/>
+  </p:clrMapOvr>
+</p:sld>
+</file>
+
+<file path=ppt/slides/slide14.xml><?xml version="1.0" encoding="utf-8"?>
+<p:sld xmlns:a="http://schemas.openxmlformats.org/drawingml/2006/main" xmlns:p="http://schemas.openxmlformats.org/presentationml/2006/main" xmlns:r="http://schemas.openxmlformats.org/officeDocument/2006/relationships">
+  <p:cSld>
+    <p:spTree>
+      <p:nvGrpSpPr>
+        <p:cNvPr id="1" name=""/>
+        <p:cNvGrpSpPr/>
+        <p:nvPr/>
+      </p:nvGrpSpPr>
+      <p:grpSpPr/>
+      <p:sp>
+        <p:nvSpPr>
+          <p:cNvPr id="2" name="Rectangle 1"/>
+          <p:cNvSpPr/>
+          <p:nvPr/>
+        </p:nvSpPr>
+        <p:spPr>
+          <a:xfrm>
+            <a:off x="0" y="0"/>
+            <a:ext cx="18288000" cy="10287000"/>
+          </a:xfrm>
+          <a:prstGeom prst="rect">
+            <a:avLst/>
+          </a:prstGeom>
+          <a:solidFill>
+            <a:srgbClr val="0B3B3E"/>
+          </a:solidFill>
+          <a:ln>
+            <a:noFill/>
+          </a:ln>
+          <a:effectLst/>
+        </p:spPr>
+        <p:style>
+          <a:lnRef idx="1">
+            <a:schemeClr val="accent1"/>
+          </a:lnRef>
+          <a:fillRef idx="3">
+            <a:schemeClr val="accent1"/>
+          </a:fillRef>
+          <a:effectRef idx="2">
+            <a:schemeClr val="accent1"/>
+          </a:effectRef>
+          <a:fontRef idx="minor">
+            <a:schemeClr val="lt1"/>
+          </a:fontRef>
+        </p:style>
+        <p:txBody>
+          <a:bodyPr rtlCol="0" anchor="ctr"/>
+          <a:lstStyle/>
+          <a:p>
+            <a:pPr algn="ctr"/>
+          </a:p>
+        </p:txBody>
+      </p:sp>
+      <p:sp>
+        <p:nvSpPr>
+          <p:cNvPr id="3" name="TextBox 2"/>
+          <p:cNvSpPr txBox="1"/>
+          <p:nvPr/>
+        </p:nvSpPr>
+        <p:spPr>
+          <a:xfrm>
+            <a:off x="713232" y="411480"/>
+            <a:ext cx="15544800" cy="365760"/>
+          </a:xfrm>
+          <a:prstGeom prst="rect">
+            <a:avLst/>
+          </a:prstGeom>
+          <a:noFill/>
+        </p:spPr>
+        <p:txBody>
+          <a:bodyPr wrap="square" anchor="t" lIns="0" rIns="0" tIns="0" bIns="0">
+            <a:spAutoFit/>
+          </a:bodyPr>
+          <a:lstStyle/>
+          <a:p>
+            <a:pPr algn="l">
+              <a:lnSpc>
+                <a:spcPct val="105000"/>
+              </a:lnSpc>
+            </a:pPr>
+            <a:r>
+              <a:rPr sz="1400" b="1" i="0">
+                <a:solidFill>
+                  <a:srgbClr val="F0A61E"/>
+                </a:solidFill>
+                <a:latin typeface="Myriad Pro 2"/>
+              </a:rPr>
+              <a:t>08A — BY THE NUMBERS I</a:t>
+            </a:r>
+          </a:p>
+        </p:txBody>
+      </p:sp>
+      <p:sp>
+        <p:nvSpPr>
+          <p:cNvPr id="4" name="TextBox 3"/>
+          <p:cNvSpPr txBox="1"/>
+          <p:nvPr/>
+        </p:nvSpPr>
+        <p:spPr>
+          <a:xfrm>
+            <a:off x="713232" y="777240"/>
+            <a:ext cx="15544800" cy="822960"/>
+          </a:xfrm>
+          <a:prstGeom prst="rect">
+            <a:avLst/>
+          </a:prstGeom>
+          <a:noFill/>
+        </p:spPr>
+        <p:txBody>
+          <a:bodyPr wrap="square" anchor="t" lIns="0" rIns="0" tIns="0" bIns="0">
+            <a:spAutoFit/>
+          </a:bodyPr>
+          <a:lstStyle/>
+          <a:p>
+            <a:pPr algn="l">
+              <a:lnSpc>
+                <a:spcPct val="105000"/>
+              </a:lnSpc>
+            </a:pPr>
+            <a:r>
+              <a:rPr sz="4000" b="1" i="0">
+                <a:solidFill>
+                  <a:srgbClr val="FFFFFF"/>
+                </a:solidFill>
+                <a:latin typeface="Myriad Pro 2"/>
+              </a:rPr>
+              <a:t>Growth, FY2025</a:t>
+            </a:r>
+          </a:p>
+        </p:txBody>
+      </p:sp>
+      <p:sp>
+        <p:nvSpPr>
+          <p:cNvPr id="5" name="TextBox 4"/>
+          <p:cNvSpPr txBox="1"/>
+          <p:nvPr/>
+        </p:nvSpPr>
+        <p:spPr>
+          <a:xfrm>
+            <a:off x="713232" y="1600200"/>
+            <a:ext cx="16002000" cy="502920"/>
+          </a:xfrm>
+          <a:prstGeom prst="rect">
+            <a:avLst/>
+          </a:prstGeom>
+          <a:noFill/>
+        </p:spPr>
+        <p:txBody>
+          <a:bodyPr wrap="square" anchor="t" lIns="0" rIns="0" tIns="0" bIns="0">
+            <a:spAutoFit/>
+          </a:bodyPr>
+          <a:lstStyle/>
+          <a:p>
+            <a:pPr algn="l">
+              <a:lnSpc>
+                <a:spcPct val="105000"/>
+              </a:lnSpc>
+            </a:pPr>
+            <a:r>
+              <a:rPr sz="2000" b="0" i="1">
+                <a:solidFill>
+                  <a:srgbClr val="BFE3DF"/>
+                </a:solidFill>
+                <a:latin typeface="Myriad Pro 1"/>
+              </a:rPr>
+              <a:t>Projected beneficiary mix and PEAK's audited growth, 2024 → 2025</a:t>
+            </a:r>
+          </a:p>
+        </p:txBody>
+      </p:sp>
+      <p:sp>
+        <p:nvSpPr>
+          <p:cNvPr id="6" name="Rectangle 5"/>
+          <p:cNvSpPr/>
+          <p:nvPr/>
+        </p:nvSpPr>
+        <p:spPr>
+          <a:xfrm>
+            <a:off x="713232" y="2148840"/>
+            <a:ext cx="1463040" cy="38100"/>
+          </a:xfrm>
+          <a:prstGeom prst="rect">
+            <a:avLst/>
+          </a:prstGeom>
+          <a:solidFill>
+            <a:srgbClr val="F0A61E"/>
+          </a:solidFill>
+          <a:ln>
+            <a:noFill/>
+          </a:ln>
+          <a:effectLst/>
+        </p:spPr>
+        <p:style>
+          <a:lnRef idx="1">
+            <a:schemeClr val="accent1"/>
+          </a:lnRef>
+          <a:fillRef idx="3">
+            <a:schemeClr val="accent1"/>
+          </a:fillRef>
+          <a:effectRef idx="2">
+            <a:schemeClr val="accent1"/>
+          </a:effectRef>
+          <a:fontRef idx="minor">
+            <a:schemeClr val="lt1"/>
+          </a:fontRef>
+        </p:style>
+        <p:txBody>
+          <a:bodyPr rtlCol="0" anchor="ctr"/>
+          <a:lstStyle/>
+          <a:p>
+            <a:pPr algn="ctr"/>
+          </a:p>
+        </p:txBody>
+      </p:sp>
+      <p:graphicFrame>
+        <p:nvGraphicFramePr>
+          <p:cNvPr id="7" name="Chart 6"/>
+          <p:cNvGraphicFramePr>
+            <a:graphicFrameLocks noGrp="1"/>
+          </p:cNvGraphicFramePr>
+          <p:nvPr/>
+        </p:nvGraphicFramePr>
+        <p:xfrm>
+          <a:off x="914400" y="2651760"/>
           <a:ext cx="6949440" cy="5943600"/>
         </p:xfrm>
         <a:graphic>
@@ -4512,13 +8121,13 @@
       </p:graphicFrame>
       <p:sp>
         <p:nvSpPr>
-          <p:cNvPr id="6" name="TextBox 5"/>
+          <p:cNvPr id="8" name="TextBox 7"/>
           <p:cNvSpPr txBox="1"/>
           <p:nvPr/>
         </p:nvSpPr>
         <p:spPr>
           <a:xfrm>
-            <a:off x="914400" y="8503920"/>
+            <a:off x="914400" y="8778240"/>
             <a:ext cx="6949440" cy="548640"/>
           </a:xfrm>
           <a:prstGeom prst="rect">
@@ -4527,16 +8136,20 @@
           <a:noFill/>
         </p:spPr>
         <p:txBody>
-          <a:bodyPr wrap="none">
+          <a:bodyPr wrap="square" anchor="t" lIns="0" rIns="0" tIns="0" bIns="0">
             <a:spAutoFit/>
           </a:bodyPr>
           <a:lstStyle/>
           <a:p>
-            <a:pPr algn="ctr"/>
-            <a:r>
-              <a:rPr sz="2000" i="1">
-                <a:solidFill>
-                  <a:srgbClr val="FFFFFF"/>
+            <a:pPr algn="ctr">
+              <a:lnSpc>
+                <a:spcPct val="105000"/>
+              </a:lnSpc>
+            </a:pPr>
+            <a:r>
+              <a:rPr sz="1800" b="0" i="1">
+                <a:solidFill>
+                  <a:srgbClr val="BFE3DF"/>
                 </a:solidFill>
                 <a:latin typeface="Myriad Pro 1"/>
               </a:rPr>
@@ -4547,14 +8160,14 @@
       </p:sp>
       <p:graphicFrame>
         <p:nvGraphicFramePr>
-          <p:cNvPr id="7" name="Chart 6"/>
+          <p:cNvPr id="9" name="Chart 8"/>
           <p:cNvGraphicFramePr>
             <a:graphicFrameLocks noGrp="1"/>
           </p:cNvGraphicFramePr>
           <p:nvPr/>
         </p:nvGraphicFramePr>
         <p:xfrm>
-          <a:off x="8778240" y="2377440"/>
+          <a:off x="8778240" y="2651760"/>
           <a:ext cx="8229600" cy="5943600"/>
         </p:xfrm>
         <a:graphic>
@@ -4565,14 +8178,359 @@
       </p:graphicFrame>
       <p:sp>
         <p:nvSpPr>
+          <p:cNvPr id="10" name="TextBox 9"/>
+          <p:cNvSpPr txBox="1"/>
+          <p:nvPr/>
+        </p:nvSpPr>
+        <p:spPr>
+          <a:xfrm>
+            <a:off x="8778240" y="8778240"/>
+            <a:ext cx="8229600" cy="548640"/>
+          </a:xfrm>
+          <a:prstGeom prst="rect">
+            <a:avLst/>
+          </a:prstGeom>
+          <a:noFill/>
+        </p:spPr>
+        <p:txBody>
+          <a:bodyPr wrap="square" anchor="t" lIns="0" rIns="0" tIns="0" bIns="0">
+            <a:spAutoFit/>
+          </a:bodyPr>
+          <a:lstStyle/>
+          <a:p>
+            <a:pPr algn="ctr">
+              <a:lnSpc>
+                <a:spcPct val="105000"/>
+              </a:lnSpc>
+            </a:pPr>
+            <a:r>
+              <a:rPr sz="1600" b="0" i="1">
+                <a:solidFill>
+                  <a:srgbClr val="BFE3DF"/>
+                </a:solidFill>
+                <a:latin typeface="Myriad Pro 1"/>
+              </a:rPr>
+              <a:t>Audited financial performance (Ismaheel and Co., FYE 31 Dec 2025): +26% assets, +54% loan book, +72% accumulated funds</a:t>
+            </a:r>
+          </a:p>
+        </p:txBody>
+      </p:sp>
+      <p:sp>
+        <p:nvSpPr>
+          <p:cNvPr id="11" name="TextBox 10"/>
+          <p:cNvSpPr txBox="1"/>
+          <p:nvPr/>
+        </p:nvSpPr>
+        <p:spPr>
+          <a:xfrm>
+            <a:off x="13286232" y="128016"/>
+            <a:ext cx="4690872" cy="822960"/>
+          </a:xfrm>
+          <a:prstGeom prst="rect">
+            <a:avLst/>
+          </a:prstGeom>
+          <a:noFill/>
+        </p:spPr>
+        <p:txBody>
+          <a:bodyPr wrap="square" anchor="t" lIns="0" rIns="0" tIns="0" bIns="0">
+            <a:spAutoFit/>
+          </a:bodyPr>
+          <a:lstStyle/>
+          <a:p>
+            <a:pPr algn="l">
+              <a:lnSpc>
+                <a:spcPct val="115000"/>
+              </a:lnSpc>
+            </a:pPr>
+            <a:r>
+              <a:rPr sz="3800" b="0" i="0">
+                <a:solidFill>
+                  <a:srgbClr val="BFE3DF"/>
+                </a:solidFill>
+                <a:latin typeface="Myriad Pro 1"/>
+              </a:rPr>
+              <a:t>• Time allocated: (2 minutes)</a:t>
+            </a:r>
+          </a:p>
+        </p:txBody>
+      </p:sp>
+    </p:spTree>
+  </p:cSld>
+  <p:clrMapOvr>
+    <a:masterClrMapping/>
+  </p:clrMapOvr>
+</p:sld>
+</file>
+
+<file path=ppt/slides/slide15.xml><?xml version="1.0" encoding="utf-8"?>
+<p:sld xmlns:a="http://schemas.openxmlformats.org/drawingml/2006/main" xmlns:p="http://schemas.openxmlformats.org/presentationml/2006/main" xmlns:r="http://schemas.openxmlformats.org/officeDocument/2006/relationships">
+  <p:cSld>
+    <p:spTree>
+      <p:nvGrpSpPr>
+        <p:cNvPr id="1" name=""/>
+        <p:cNvGrpSpPr/>
+        <p:nvPr/>
+      </p:nvGrpSpPr>
+      <p:grpSpPr/>
+      <p:sp>
+        <p:nvSpPr>
+          <p:cNvPr id="2" name="Rectangle 1"/>
+          <p:cNvSpPr/>
+          <p:nvPr/>
+        </p:nvSpPr>
+        <p:spPr>
+          <a:xfrm>
+            <a:off x="0" y="0"/>
+            <a:ext cx="18288000" cy="10287000"/>
+          </a:xfrm>
+          <a:prstGeom prst="rect">
+            <a:avLst/>
+          </a:prstGeom>
+          <a:solidFill>
+            <a:srgbClr val="0B3B3E"/>
+          </a:solidFill>
+          <a:ln>
+            <a:noFill/>
+          </a:ln>
+          <a:effectLst/>
+        </p:spPr>
+        <p:style>
+          <a:lnRef idx="1">
+            <a:schemeClr val="accent1"/>
+          </a:lnRef>
+          <a:fillRef idx="3">
+            <a:schemeClr val="accent1"/>
+          </a:fillRef>
+          <a:effectRef idx="2">
+            <a:schemeClr val="accent1"/>
+          </a:effectRef>
+          <a:fontRef idx="minor">
+            <a:schemeClr val="lt1"/>
+          </a:fontRef>
+        </p:style>
+        <p:txBody>
+          <a:bodyPr rtlCol="0" anchor="ctr"/>
+          <a:lstStyle/>
+          <a:p>
+            <a:pPr algn="ctr"/>
+          </a:p>
+        </p:txBody>
+      </p:sp>
+      <p:sp>
+        <p:nvSpPr>
+          <p:cNvPr id="3" name="TextBox 2"/>
+          <p:cNvSpPr txBox="1"/>
+          <p:nvPr/>
+        </p:nvSpPr>
+        <p:spPr>
+          <a:xfrm>
+            <a:off x="713232" y="411480"/>
+            <a:ext cx="15544800" cy="365760"/>
+          </a:xfrm>
+          <a:prstGeom prst="rect">
+            <a:avLst/>
+          </a:prstGeom>
+          <a:noFill/>
+        </p:spPr>
+        <p:txBody>
+          <a:bodyPr wrap="square" anchor="t" lIns="0" rIns="0" tIns="0" bIns="0">
+            <a:spAutoFit/>
+          </a:bodyPr>
+          <a:lstStyle/>
+          <a:p>
+            <a:pPr algn="l">
+              <a:lnSpc>
+                <a:spcPct val="105000"/>
+              </a:lnSpc>
+            </a:pPr>
+            <a:r>
+              <a:rPr sz="1400" b="1" i="0">
+                <a:solidFill>
+                  <a:srgbClr val="F0A61E"/>
+                </a:solidFill>
+                <a:latin typeface="Myriad Pro 2"/>
+              </a:rPr>
+              <a:t>08B — BY THE NUMBERS II</a:t>
+            </a:r>
+          </a:p>
+        </p:txBody>
+      </p:sp>
+      <p:sp>
+        <p:nvSpPr>
+          <p:cNvPr id="4" name="TextBox 3"/>
+          <p:cNvSpPr txBox="1"/>
+          <p:nvPr/>
+        </p:nvSpPr>
+        <p:spPr>
+          <a:xfrm>
+            <a:off x="713232" y="777240"/>
+            <a:ext cx="15544800" cy="822960"/>
+          </a:xfrm>
+          <a:prstGeom prst="rect">
+            <a:avLst/>
+          </a:prstGeom>
+          <a:noFill/>
+        </p:spPr>
+        <p:txBody>
+          <a:bodyPr wrap="square" anchor="t" lIns="0" rIns="0" tIns="0" bIns="0">
+            <a:spAutoFit/>
+          </a:bodyPr>
+          <a:lstStyle/>
+          <a:p>
+            <a:pPr algn="l">
+              <a:lnSpc>
+                <a:spcPct val="105000"/>
+              </a:lnSpc>
+            </a:pPr>
+            <a:r>
+              <a:rPr sz="4000" b="1" i="0">
+                <a:solidFill>
+                  <a:srgbClr val="FFFFFF"/>
+                </a:solidFill>
+                <a:latin typeface="Myriad Pro 2"/>
+              </a:rPr>
+              <a:t>Why Surplus Fell, Why Leverage Improved</a:t>
+            </a:r>
+          </a:p>
+        </p:txBody>
+      </p:sp>
+      <p:sp>
+        <p:nvSpPr>
+          <p:cNvPr id="5" name="Rectangle 4"/>
+          <p:cNvSpPr/>
+          <p:nvPr/>
+        </p:nvSpPr>
+        <p:spPr>
+          <a:xfrm>
+            <a:off x="713232" y="1600200"/>
+            <a:ext cx="1463040" cy="38100"/>
+          </a:xfrm>
+          <a:prstGeom prst="rect">
+            <a:avLst/>
+          </a:prstGeom>
+          <a:solidFill>
+            <a:srgbClr val="F0A61E"/>
+          </a:solidFill>
+          <a:ln>
+            <a:noFill/>
+          </a:ln>
+          <a:effectLst/>
+        </p:spPr>
+        <p:style>
+          <a:lnRef idx="1">
+            <a:schemeClr val="accent1"/>
+          </a:lnRef>
+          <a:fillRef idx="3">
+            <a:schemeClr val="accent1"/>
+          </a:fillRef>
+          <a:effectRef idx="2">
+            <a:schemeClr val="accent1"/>
+          </a:effectRef>
+          <a:fontRef idx="minor">
+            <a:schemeClr val="lt1"/>
+          </a:fontRef>
+        </p:style>
+        <p:txBody>
+          <a:bodyPr rtlCol="0" anchor="ctr"/>
+          <a:lstStyle/>
+          <a:p>
+            <a:pPr algn="ctr"/>
+          </a:p>
+        </p:txBody>
+      </p:sp>
+      <p:sp>
+        <p:nvSpPr>
+          <p:cNvPr id="6" name="TextBox 5"/>
+          <p:cNvSpPr txBox="1"/>
+          <p:nvPr/>
+        </p:nvSpPr>
+        <p:spPr>
+          <a:xfrm>
+            <a:off x="713232" y="2514600"/>
+            <a:ext cx="7589520" cy="457200"/>
+          </a:xfrm>
+          <a:prstGeom prst="rect">
+            <a:avLst/>
+          </a:prstGeom>
+          <a:noFill/>
+        </p:spPr>
+        <p:txBody>
+          <a:bodyPr wrap="square" anchor="t" lIns="0" rIns="0" tIns="0" bIns="0">
+            <a:spAutoFit/>
+          </a:bodyPr>
+          <a:lstStyle/>
+          <a:p>
+            <a:pPr algn="l">
+              <a:lnSpc>
+                <a:spcPct val="105000"/>
+              </a:lnSpc>
+            </a:pPr>
+            <a:r>
+              <a:rPr sz="2000" b="1" i="0">
+                <a:solidFill>
+                  <a:srgbClr val="F0A61E"/>
+                </a:solidFill>
+                <a:latin typeface="Myriad Pro 2"/>
+              </a:rPr>
+              <a:t>WHY DID SURPLUS FALL 23%?</a:t>
+            </a:r>
+          </a:p>
+        </p:txBody>
+      </p:sp>
+      <p:sp>
+        <p:nvSpPr>
+          <p:cNvPr id="7" name="Rectangle 6"/>
+          <p:cNvSpPr/>
+          <p:nvPr/>
+        </p:nvSpPr>
+        <p:spPr>
+          <a:xfrm>
+            <a:off x="713232" y="3063240"/>
+            <a:ext cx="3657600" cy="1737360"/>
+          </a:xfrm>
+          <a:prstGeom prst="rect">
+            <a:avLst/>
+          </a:prstGeom>
+          <a:solidFill>
+            <a:srgbClr val="144A4E"/>
+          </a:solidFill>
+          <a:ln>
+            <a:noFill/>
+          </a:ln>
+          <a:effectLst/>
+        </p:spPr>
+        <p:style>
+          <a:lnRef idx="1">
+            <a:schemeClr val="accent1"/>
+          </a:lnRef>
+          <a:fillRef idx="3">
+            <a:schemeClr val="accent1"/>
+          </a:fillRef>
+          <a:effectRef idx="2">
+            <a:schemeClr val="accent1"/>
+          </a:effectRef>
+          <a:fontRef idx="minor">
+            <a:schemeClr val="lt1"/>
+          </a:fontRef>
+        </p:style>
+        <p:txBody>
+          <a:bodyPr rtlCol="0" anchor="ctr"/>
+          <a:lstStyle/>
+          <a:p>
+            <a:pPr algn="ctr"/>
+          </a:p>
+        </p:txBody>
+      </p:sp>
+      <p:sp>
+        <p:nvSpPr>
           <p:cNvPr id="8" name="TextBox 7"/>
           <p:cNvSpPr txBox="1"/>
           <p:nvPr/>
         </p:nvSpPr>
         <p:spPr>
           <a:xfrm>
-            <a:off x="8778240" y="8503920"/>
-            <a:ext cx="8229600" cy="548640"/>
+            <a:off x="850392" y="3172968"/>
+            <a:ext cx="3383280" cy="955548"/>
           </a:xfrm>
           <a:prstGeom prst="rect">
             <a:avLst/>
@@ -4580,20 +8538,2738 @@
           <a:noFill/>
         </p:spPr>
         <p:txBody>
-          <a:bodyPr wrap="none">
+          <a:bodyPr wrap="square" anchor="b" lIns="0" rIns="0" tIns="0" bIns="0">
             <a:spAutoFit/>
           </a:bodyPr>
           <a:lstStyle/>
           <a:p>
-            <a:pPr algn="ctr"/>
-            <a:r>
-              <a:rPr sz="2000" i="1">
+            <a:pPr algn="ctr">
+              <a:lnSpc>
+                <a:spcPct val="105000"/>
+              </a:lnSpc>
+            </a:pPr>
+            <a:r>
+              <a:rPr sz="3000" b="1" i="0">
                 <a:solidFill>
                   <a:srgbClr val="FFFFFF"/>
                 </a:solidFill>
                 <a:latin typeface="Myriad Pro 1"/>
               </a:rPr>
-              <a:t>Audited financial performance (Ismaheel and Co., FYE 31 Dec 2024)</a:t>
+              <a:t>$87,066</a:t>
+            </a:r>
+          </a:p>
+        </p:txBody>
+      </p:sp>
+      <p:sp>
+        <p:nvSpPr>
+          <p:cNvPr id="9" name="TextBox 8"/>
+          <p:cNvSpPr txBox="1"/>
+          <p:nvPr/>
+        </p:nvSpPr>
+        <p:spPr>
+          <a:xfrm>
+            <a:off x="850392" y="4070908"/>
+            <a:ext cx="3383280" cy="694944"/>
+          </a:xfrm>
+          <a:prstGeom prst="rect">
+            <a:avLst/>
+          </a:prstGeom>
+          <a:noFill/>
+        </p:spPr>
+        <p:txBody>
+          <a:bodyPr wrap="square" anchor="t" lIns="0" rIns="0" tIns="0" bIns="0">
+            <a:spAutoFit/>
+          </a:bodyPr>
+          <a:lstStyle/>
+          <a:p>
+            <a:pPr algn="ctr">
+              <a:lnSpc>
+                <a:spcPct val="100000"/>
+              </a:lnSpc>
+            </a:pPr>
+            <a:r>
+              <a:rPr sz="1400" b="0" i="0">
+                <a:solidFill>
+                  <a:srgbClr val="BFE3DF"/>
+                </a:solidFill>
+                <a:latin typeface="Myriad Pro 1"/>
+              </a:rPr>
+              <a:t>Admin expenses, 2025</a:t>
+            </a:r>
+          </a:p>
+          <a:p>
+            <a:pPr algn="ctr">
+              <a:lnSpc>
+                <a:spcPct val="100000"/>
+              </a:lnSpc>
+            </a:pPr>
+            <a:r>
+              <a:rPr sz="1400" b="0" i="0">
+                <a:solidFill>
+                  <a:srgbClr val="BFE3DF"/>
+                </a:solidFill>
+                <a:latin typeface="Myriad Pro 1"/>
+              </a:rPr>
+              <a:t>(+26%, incl. $63,042 in salaries across 70+ staff)</a:t>
+            </a:r>
+          </a:p>
+        </p:txBody>
+      </p:sp>
+      <p:sp>
+        <p:nvSpPr>
+          <p:cNvPr id="10" name="Rectangle 9"/>
+          <p:cNvSpPr/>
+          <p:nvPr/>
+        </p:nvSpPr>
+        <p:spPr>
+          <a:xfrm>
+            <a:off x="4526280" y="3063240"/>
+            <a:ext cx="3657600" cy="1737360"/>
+          </a:xfrm>
+          <a:prstGeom prst="rect">
+            <a:avLst/>
+          </a:prstGeom>
+          <a:solidFill>
+            <a:srgbClr val="144A4E"/>
+          </a:solidFill>
+          <a:ln>
+            <a:noFill/>
+          </a:ln>
+          <a:effectLst/>
+        </p:spPr>
+        <p:style>
+          <a:lnRef idx="1">
+            <a:schemeClr val="accent1"/>
+          </a:lnRef>
+          <a:fillRef idx="3">
+            <a:schemeClr val="accent1"/>
+          </a:fillRef>
+          <a:effectRef idx="2">
+            <a:schemeClr val="accent1"/>
+          </a:effectRef>
+          <a:fontRef idx="minor">
+            <a:schemeClr val="lt1"/>
+          </a:fontRef>
+        </p:style>
+        <p:txBody>
+          <a:bodyPr rtlCol="0" anchor="ctr"/>
+          <a:lstStyle/>
+          <a:p>
+            <a:pPr algn="ctr"/>
+          </a:p>
+        </p:txBody>
+      </p:sp>
+      <p:sp>
+        <p:nvSpPr>
+          <p:cNvPr id="11" name="TextBox 10"/>
+          <p:cNvSpPr txBox="1"/>
+          <p:nvPr/>
+        </p:nvSpPr>
+        <p:spPr>
+          <a:xfrm>
+            <a:off x="4663440" y="3172968"/>
+            <a:ext cx="3383280" cy="955548"/>
+          </a:xfrm>
+          <a:prstGeom prst="rect">
+            <a:avLst/>
+          </a:prstGeom>
+          <a:noFill/>
+        </p:spPr>
+        <p:txBody>
+          <a:bodyPr wrap="square" anchor="b" lIns="0" rIns="0" tIns="0" bIns="0">
+            <a:spAutoFit/>
+          </a:bodyPr>
+          <a:lstStyle/>
+          <a:p>
+            <a:pPr algn="ctr">
+              <a:lnSpc>
+                <a:spcPct val="105000"/>
+              </a:lnSpc>
+            </a:pPr>
+            <a:r>
+              <a:rPr sz="2600" b="1" i="0">
+                <a:solidFill>
+                  <a:srgbClr val="FFFFFF"/>
+                </a:solidFill>
+                <a:latin typeface="Myriad Pro 1"/>
+              </a:rPr>
+              <a:t>$5,463 → $(3,327)</a:t>
+            </a:r>
+          </a:p>
+        </p:txBody>
+      </p:sp>
+      <p:sp>
+        <p:nvSpPr>
+          <p:cNvPr id="12" name="TextBox 11"/>
+          <p:cNvSpPr txBox="1"/>
+          <p:nvPr/>
+        </p:nvSpPr>
+        <p:spPr>
+          <a:xfrm>
+            <a:off x="4663440" y="4070908"/>
+            <a:ext cx="3383280" cy="694944"/>
+          </a:xfrm>
+          <a:prstGeom prst="rect">
+            <a:avLst/>
+          </a:prstGeom>
+          <a:noFill/>
+        </p:spPr>
+        <p:txBody>
+          <a:bodyPr wrap="square" anchor="t" lIns="0" rIns="0" tIns="0" bIns="0">
+            <a:spAutoFit/>
+          </a:bodyPr>
+          <a:lstStyle/>
+          <a:p>
+            <a:pPr algn="ctr">
+              <a:lnSpc>
+                <a:spcPct val="100000"/>
+              </a:lnSpc>
+            </a:pPr>
+            <a:r>
+              <a:rPr sz="1400" b="0" i="0">
+                <a:solidFill>
+                  <a:srgbClr val="BFE3DF"/>
+                </a:solidFill>
+                <a:latin typeface="Myriad Pro 1"/>
+              </a:rPr>
+              <a:t>FX gain (2024) swung to FX loss (2025)</a:t>
+            </a:r>
+          </a:p>
+          <a:p>
+            <a:pPr algn="ctr">
+              <a:lnSpc>
+                <a:spcPct val="100000"/>
+              </a:lnSpc>
+            </a:pPr>
+            <a:r>
+              <a:rPr sz="1400" b="0" i="0">
+                <a:solidFill>
+                  <a:srgbClr val="BFE3DF"/>
+                </a:solidFill>
+                <a:latin typeface="Myriad Pro 1"/>
+              </a:rPr>
+              <a:t>as the naira strengthened</a:t>
+            </a:r>
+          </a:p>
+        </p:txBody>
+      </p:sp>
+      <p:sp>
+        <p:nvSpPr>
+          <p:cNvPr id="13" name="TextBox 12"/>
+          <p:cNvSpPr txBox="1"/>
+          <p:nvPr/>
+        </p:nvSpPr>
+        <p:spPr>
+          <a:xfrm>
+            <a:off x="713232" y="4983480"/>
+            <a:ext cx="7589520" cy="1463040"/>
+          </a:xfrm>
+          <a:prstGeom prst="rect">
+            <a:avLst/>
+          </a:prstGeom>
+          <a:noFill/>
+        </p:spPr>
+        <p:txBody>
+          <a:bodyPr wrap="square" anchor="t" lIns="0" rIns="0" tIns="0" bIns="0">
+            <a:spAutoFit/>
+          </a:bodyPr>
+          <a:lstStyle/>
+          <a:p>
+            <a:pPr algn="l">
+              <a:lnSpc>
+                <a:spcPct val="125000"/>
+              </a:lnSpc>
+            </a:pPr>
+            <a:r>
+              <a:rPr sz="1600" b="0" i="1">
+                <a:solidFill>
+                  <a:srgbClr val="BFE3DF"/>
+                </a:solidFill>
+                <a:latin typeface="Myriad Pro 1"/>
+              </a:rPr>
+              <a:t>Net surplus before FX actually fell a more modest 13% ($79,136 → $68,449) — the headline 23% decline to $65,123 is amplified by currency movement, not just rising costs.</a:t>
+            </a:r>
+          </a:p>
+        </p:txBody>
+      </p:sp>
+      <p:sp>
+        <p:nvSpPr>
+          <p:cNvPr id="14" name="TextBox 13"/>
+          <p:cNvSpPr txBox="1"/>
+          <p:nvPr/>
+        </p:nvSpPr>
+        <p:spPr>
+          <a:xfrm>
+            <a:off x="713232" y="6675120"/>
+            <a:ext cx="7589520" cy="457200"/>
+          </a:xfrm>
+          <a:prstGeom prst="rect">
+            <a:avLst/>
+          </a:prstGeom>
+          <a:noFill/>
+        </p:spPr>
+        <p:txBody>
+          <a:bodyPr wrap="square" anchor="t" lIns="0" rIns="0" tIns="0" bIns="0">
+            <a:spAutoFit/>
+          </a:bodyPr>
+          <a:lstStyle/>
+          <a:p>
+            <a:pPr algn="l">
+              <a:lnSpc>
+                <a:spcPct val="105000"/>
+              </a:lnSpc>
+            </a:pPr>
+            <a:r>
+              <a:rPr sz="1800" b="1" i="0">
+                <a:solidFill>
+                  <a:srgbClr val="F0A61E"/>
+                </a:solidFill>
+                <a:latin typeface="Myriad Pro 2"/>
+              </a:rPr>
+              <a:t>WHY IS THIS FACILITY LESS RISKY THAN IT WOULD HAVE BEEN A YEAR AGO?</a:t>
+            </a:r>
+          </a:p>
+        </p:txBody>
+      </p:sp>
+      <p:sp>
+        <p:nvSpPr>
+          <p:cNvPr id="15" name="TextBox 14"/>
+          <p:cNvSpPr txBox="1"/>
+          <p:nvPr/>
+        </p:nvSpPr>
+        <p:spPr>
+          <a:xfrm>
+            <a:off x="713232" y="7269480"/>
+            <a:ext cx="7589520" cy="1828800"/>
+          </a:xfrm>
+          <a:prstGeom prst="rect">
+            <a:avLst/>
+          </a:prstGeom>
+          <a:noFill/>
+        </p:spPr>
+        <p:txBody>
+          <a:bodyPr wrap="square" anchor="t" lIns="0" rIns="0" tIns="0" bIns="0">
+            <a:spAutoFit/>
+          </a:bodyPr>
+          <a:lstStyle/>
+          <a:p>
+            <a:pPr algn="l">
+              <a:lnSpc>
+                <a:spcPct val="125000"/>
+              </a:lnSpc>
+            </a:pPr>
+            <a:r>
+              <a:rPr sz="1600" b="0" i="0">
+                <a:solidFill>
+                  <a:srgbClr val="FFFFFF"/>
+                </a:solidFill>
+                <a:latin typeface="Myriad Pro 1"/>
+              </a:rPr>
+              <a:t>Borrowings fell 5% in naira (₦17,976,879 repaid against PW's on-lending facility, nothing newly drawn) while accumulated funds rose 63% in naira — leverage improved from 2.3x to 1.4x in a single year.</a:t>
+            </a:r>
+          </a:p>
+        </p:txBody>
+      </p:sp>
+      <p:graphicFrame>
+        <p:nvGraphicFramePr>
+          <p:cNvPr id="16" name="Chart 15"/>
+          <p:cNvGraphicFramePr>
+            <a:graphicFrameLocks noGrp="1"/>
+          </p:cNvGraphicFramePr>
+          <p:nvPr/>
+        </p:nvGraphicFramePr>
+        <p:xfrm>
+          <a:off x="8778240" y="2514600"/>
+          <a:ext cx="8229600" cy="6400800"/>
+        </p:xfrm>
+        <a:graphic>
+          <a:graphicData uri="http://schemas.openxmlformats.org/drawingml/2006/chart">
+            <c:chart xmlns:c="http://schemas.openxmlformats.org/drawingml/2006/chart" r:id="rId2"/>
+          </a:graphicData>
+        </a:graphic>
+      </p:graphicFrame>
+      <p:sp>
+        <p:nvSpPr>
+          <p:cNvPr id="17" name="TextBox 16"/>
+          <p:cNvSpPr txBox="1"/>
+          <p:nvPr/>
+        </p:nvSpPr>
+        <p:spPr>
+          <a:xfrm>
+            <a:off x="8778240" y="9144000"/>
+            <a:ext cx="8229600" cy="548640"/>
+          </a:xfrm>
+          <a:prstGeom prst="rect">
+            <a:avLst/>
+          </a:prstGeom>
+          <a:noFill/>
+        </p:spPr>
+        <p:txBody>
+          <a:bodyPr wrap="square" anchor="t" lIns="0" rIns="0" tIns="0" bIns="0">
+            <a:spAutoFit/>
+          </a:bodyPr>
+          <a:lstStyle/>
+          <a:p>
+            <a:pPr algn="ctr">
+              <a:lnSpc>
+                <a:spcPct val="105000"/>
+              </a:lnSpc>
+            </a:pPr>
+            <a:r>
+              <a:rPr sz="1600" b="0" i="1">
+                <a:solidFill>
+                  <a:srgbClr val="BFE3DF"/>
+                </a:solidFill>
+                <a:latin typeface="Myriad Pro 1"/>
+              </a:rPr>
+              <a:t>Leverage (borrowings ÷ accumulated funds) — lower is stronger</a:t>
+            </a:r>
+          </a:p>
+        </p:txBody>
+      </p:sp>
+      <p:sp>
+        <p:nvSpPr>
+          <p:cNvPr id="18" name="TextBox 17"/>
+          <p:cNvSpPr txBox="1"/>
+          <p:nvPr/>
+        </p:nvSpPr>
+        <p:spPr>
+          <a:xfrm>
+            <a:off x="13286232" y="128016"/>
+            <a:ext cx="4690872" cy="822960"/>
+          </a:xfrm>
+          <a:prstGeom prst="rect">
+            <a:avLst/>
+          </a:prstGeom>
+          <a:noFill/>
+        </p:spPr>
+        <p:txBody>
+          <a:bodyPr wrap="square" anchor="t" lIns="0" rIns="0" tIns="0" bIns="0">
+            <a:spAutoFit/>
+          </a:bodyPr>
+          <a:lstStyle/>
+          <a:p>
+            <a:pPr algn="l">
+              <a:lnSpc>
+                <a:spcPct val="115000"/>
+              </a:lnSpc>
+            </a:pPr>
+            <a:r>
+              <a:rPr sz="3800" b="0" i="0">
+                <a:solidFill>
+                  <a:srgbClr val="BFE3DF"/>
+                </a:solidFill>
+                <a:latin typeface="Myriad Pro 1"/>
+              </a:rPr>
+              <a:t>• Time allocated: (2 minutes)</a:t>
+            </a:r>
+          </a:p>
+        </p:txBody>
+      </p:sp>
+    </p:spTree>
+  </p:cSld>
+  <p:clrMapOvr>
+    <a:masterClrMapping/>
+  </p:clrMapOvr>
+</p:sld>
+</file>
+
+<file path=ppt/slides/slide16.xml><?xml version="1.0" encoding="utf-8"?>
+<p:sld xmlns:a="http://schemas.openxmlformats.org/drawingml/2006/main" xmlns:p="http://schemas.openxmlformats.org/presentationml/2006/main" xmlns:r="http://schemas.openxmlformats.org/officeDocument/2006/relationships">
+  <p:cSld>
+    <p:spTree>
+      <p:nvGrpSpPr>
+        <p:cNvPr id="1" name=""/>
+        <p:cNvGrpSpPr/>
+        <p:nvPr/>
+      </p:nvGrpSpPr>
+      <p:grpSpPr/>
+      <p:sp>
+        <p:nvSpPr>
+          <p:cNvPr id="2" name="Rectangle 1"/>
+          <p:cNvSpPr/>
+          <p:nvPr/>
+        </p:nvSpPr>
+        <p:spPr>
+          <a:xfrm>
+            <a:off x="0" y="0"/>
+            <a:ext cx="18288000" cy="10287000"/>
+          </a:xfrm>
+          <a:prstGeom prst="rect">
+            <a:avLst/>
+          </a:prstGeom>
+          <a:solidFill>
+            <a:srgbClr val="FFFFFF"/>
+          </a:solidFill>
+          <a:ln>
+            <a:noFill/>
+          </a:ln>
+          <a:effectLst/>
+        </p:spPr>
+        <p:style>
+          <a:lnRef idx="1">
+            <a:schemeClr val="accent1"/>
+          </a:lnRef>
+          <a:fillRef idx="3">
+            <a:schemeClr val="accent1"/>
+          </a:fillRef>
+          <a:effectRef idx="2">
+            <a:schemeClr val="accent1"/>
+          </a:effectRef>
+          <a:fontRef idx="minor">
+            <a:schemeClr val="lt1"/>
+          </a:fontRef>
+        </p:style>
+        <p:txBody>
+          <a:bodyPr rtlCol="0" anchor="ctr"/>
+          <a:lstStyle/>
+          <a:p>
+            <a:pPr algn="ctr"/>
+          </a:p>
+        </p:txBody>
+      </p:sp>
+      <p:sp>
+        <p:nvSpPr>
+          <p:cNvPr id="3" name="TextBox 2"/>
+          <p:cNvSpPr txBox="1"/>
+          <p:nvPr/>
+        </p:nvSpPr>
+        <p:spPr>
+          <a:xfrm>
+            <a:off x="713232" y="411480"/>
+            <a:ext cx="15544800" cy="365760"/>
+          </a:xfrm>
+          <a:prstGeom prst="rect">
+            <a:avLst/>
+          </a:prstGeom>
+          <a:noFill/>
+        </p:spPr>
+        <p:txBody>
+          <a:bodyPr wrap="square" anchor="t" lIns="0" rIns="0" tIns="0" bIns="0">
+            <a:spAutoFit/>
+          </a:bodyPr>
+          <a:lstStyle/>
+          <a:p>
+            <a:pPr algn="l">
+              <a:lnSpc>
+                <a:spcPct val="105000"/>
+              </a:lnSpc>
+            </a:pPr>
+            <a:r>
+              <a:rPr sz="1400" b="1" i="0">
+                <a:solidFill>
+                  <a:srgbClr val="F0A61E"/>
+                </a:solidFill>
+                <a:latin typeface="Myriad Pro 2"/>
+              </a:rPr>
+              <a:t>08C — WHAT THE MODEL ASSUMES</a:t>
+            </a:r>
+          </a:p>
+        </p:txBody>
+      </p:sp>
+      <p:sp>
+        <p:nvSpPr>
+          <p:cNvPr id="4" name="TextBox 3"/>
+          <p:cNvSpPr txBox="1"/>
+          <p:nvPr/>
+        </p:nvSpPr>
+        <p:spPr>
+          <a:xfrm>
+            <a:off x="713232" y="777240"/>
+            <a:ext cx="15544800" cy="822960"/>
+          </a:xfrm>
+          <a:prstGeom prst="rect">
+            <a:avLst/>
+          </a:prstGeom>
+          <a:noFill/>
+        </p:spPr>
+        <p:txBody>
+          <a:bodyPr wrap="square" anchor="t" lIns="0" rIns="0" tIns="0" bIns="0">
+            <a:spAutoFit/>
+          </a:bodyPr>
+          <a:lstStyle/>
+          <a:p>
+            <a:pPr algn="l">
+              <a:lnSpc>
+                <a:spcPct val="105000"/>
+              </a:lnSpc>
+            </a:pPr>
+            <a:r>
+              <a:rPr sz="4000" b="1" i="0">
+                <a:solidFill>
+                  <a:srgbClr val="0B3B3E"/>
+                </a:solidFill>
+                <a:latin typeface="Myriad Pro 2"/>
+              </a:rPr>
+              <a:t>Financial Forecast</a:t>
+            </a:r>
+          </a:p>
+        </p:txBody>
+      </p:sp>
+      <p:sp>
+        <p:nvSpPr>
+          <p:cNvPr id="5" name="Rectangle 4"/>
+          <p:cNvSpPr/>
+          <p:nvPr/>
+        </p:nvSpPr>
+        <p:spPr>
+          <a:xfrm>
+            <a:off x="713232" y="1600200"/>
+            <a:ext cx="1463040" cy="38100"/>
+          </a:xfrm>
+          <a:prstGeom prst="rect">
+            <a:avLst/>
+          </a:prstGeom>
+          <a:solidFill>
+            <a:srgbClr val="F0A61E"/>
+          </a:solidFill>
+          <a:ln>
+            <a:noFill/>
+          </a:ln>
+          <a:effectLst/>
+        </p:spPr>
+        <p:style>
+          <a:lnRef idx="1">
+            <a:schemeClr val="accent1"/>
+          </a:lnRef>
+          <a:fillRef idx="3">
+            <a:schemeClr val="accent1"/>
+          </a:fillRef>
+          <a:effectRef idx="2">
+            <a:schemeClr val="accent1"/>
+          </a:effectRef>
+          <a:fontRef idx="minor">
+            <a:schemeClr val="lt1"/>
+          </a:fontRef>
+        </p:style>
+        <p:txBody>
+          <a:bodyPr rtlCol="0" anchor="ctr"/>
+          <a:lstStyle/>
+          <a:p>
+            <a:pPr algn="ctr"/>
+          </a:p>
+        </p:txBody>
+      </p:sp>
+      <p:sp>
+        <p:nvSpPr>
+          <p:cNvPr id="6" name="Rectangle 5"/>
+          <p:cNvSpPr/>
+          <p:nvPr/>
+        </p:nvSpPr>
+        <p:spPr>
+          <a:xfrm>
+            <a:off x="713232" y="2651760"/>
+            <a:ext cx="3657600" cy="1554480"/>
+          </a:xfrm>
+          <a:prstGeom prst="rect">
+            <a:avLst/>
+          </a:prstGeom>
+          <a:solidFill>
+            <a:srgbClr val="0B3B3E"/>
+          </a:solidFill>
+          <a:ln>
+            <a:noFill/>
+          </a:ln>
+          <a:effectLst/>
+        </p:spPr>
+        <p:style>
+          <a:lnRef idx="1">
+            <a:schemeClr val="accent1"/>
+          </a:lnRef>
+          <a:fillRef idx="3">
+            <a:schemeClr val="accent1"/>
+          </a:fillRef>
+          <a:effectRef idx="2">
+            <a:schemeClr val="accent1"/>
+          </a:effectRef>
+          <a:fontRef idx="minor">
+            <a:schemeClr val="lt1"/>
+          </a:fontRef>
+        </p:style>
+        <p:txBody>
+          <a:bodyPr rtlCol="0" anchor="ctr"/>
+          <a:lstStyle/>
+          <a:p>
+            <a:pPr algn="ctr"/>
+          </a:p>
+        </p:txBody>
+      </p:sp>
+      <p:sp>
+        <p:nvSpPr>
+          <p:cNvPr id="7" name="TextBox 6"/>
+          <p:cNvSpPr txBox="1"/>
+          <p:nvPr/>
+        </p:nvSpPr>
+        <p:spPr>
+          <a:xfrm>
+            <a:off x="850392" y="2761488"/>
+            <a:ext cx="3383280" cy="854964"/>
+          </a:xfrm>
+          <a:prstGeom prst="rect">
+            <a:avLst/>
+          </a:prstGeom>
+          <a:noFill/>
+        </p:spPr>
+        <p:txBody>
+          <a:bodyPr wrap="square" anchor="b" lIns="0" rIns="0" tIns="0" bIns="0">
+            <a:spAutoFit/>
+          </a:bodyPr>
+          <a:lstStyle/>
+          <a:p>
+            <a:pPr algn="ctr">
+              <a:lnSpc>
+                <a:spcPct val="105000"/>
+              </a:lnSpc>
+            </a:pPr>
+            <a:r>
+              <a:rPr sz="3200" b="1" i="0">
+                <a:solidFill>
+                  <a:srgbClr val="FFFFFF"/>
+                </a:solidFill>
+                <a:latin typeface="Myriad Pro 1"/>
+              </a:rPr>
+              <a:t>5%</a:t>
+            </a:r>
+          </a:p>
+        </p:txBody>
+      </p:sp>
+      <p:sp>
+        <p:nvSpPr>
+          <p:cNvPr id="8" name="TextBox 7"/>
+          <p:cNvSpPr txBox="1"/>
+          <p:nvPr/>
+        </p:nvSpPr>
+        <p:spPr>
+          <a:xfrm>
+            <a:off x="850392" y="3553358"/>
+            <a:ext cx="3383280" cy="621792"/>
+          </a:xfrm>
+          <a:prstGeom prst="rect">
+            <a:avLst/>
+          </a:prstGeom>
+          <a:noFill/>
+        </p:spPr>
+        <p:txBody>
+          <a:bodyPr wrap="square" anchor="t" lIns="0" rIns="0" tIns="0" bIns="0">
+            <a:spAutoFit/>
+          </a:bodyPr>
+          <a:lstStyle/>
+          <a:p>
+            <a:pPr algn="ctr">
+              <a:lnSpc>
+                <a:spcPct val="100000"/>
+              </a:lnSpc>
+            </a:pPr>
+            <a:r>
+              <a:rPr sz="1400" b="0" i="0">
+                <a:solidFill>
+                  <a:srgbClr val="BFE3DF"/>
+                </a:solidFill>
+                <a:latin typeface="Myriad Pro 1"/>
+              </a:rPr>
+              <a:t>Proposed PW interest rate</a:t>
+            </a:r>
+          </a:p>
+        </p:txBody>
+      </p:sp>
+      <p:sp>
+        <p:nvSpPr>
+          <p:cNvPr id="9" name="Rectangle 8"/>
+          <p:cNvSpPr/>
+          <p:nvPr/>
+        </p:nvSpPr>
+        <p:spPr>
+          <a:xfrm>
+            <a:off x="4553712" y="2651760"/>
+            <a:ext cx="3657600" cy="1554480"/>
+          </a:xfrm>
+          <a:prstGeom prst="rect">
+            <a:avLst/>
+          </a:prstGeom>
+          <a:solidFill>
+            <a:srgbClr val="0B3B3E"/>
+          </a:solidFill>
+          <a:ln>
+            <a:noFill/>
+          </a:ln>
+          <a:effectLst/>
+        </p:spPr>
+        <p:style>
+          <a:lnRef idx="1">
+            <a:schemeClr val="accent1"/>
+          </a:lnRef>
+          <a:fillRef idx="3">
+            <a:schemeClr val="accent1"/>
+          </a:fillRef>
+          <a:effectRef idx="2">
+            <a:schemeClr val="accent1"/>
+          </a:effectRef>
+          <a:fontRef idx="minor">
+            <a:schemeClr val="lt1"/>
+          </a:fontRef>
+        </p:style>
+        <p:txBody>
+          <a:bodyPr rtlCol="0" anchor="ctr"/>
+          <a:lstStyle/>
+          <a:p>
+            <a:pPr algn="ctr"/>
+          </a:p>
+        </p:txBody>
+      </p:sp>
+      <p:sp>
+        <p:nvSpPr>
+          <p:cNvPr id="10" name="TextBox 9"/>
+          <p:cNvSpPr txBox="1"/>
+          <p:nvPr/>
+        </p:nvSpPr>
+        <p:spPr>
+          <a:xfrm>
+            <a:off x="4690872" y="2761488"/>
+            <a:ext cx="3383280" cy="854964"/>
+          </a:xfrm>
+          <a:prstGeom prst="rect">
+            <a:avLst/>
+          </a:prstGeom>
+          <a:noFill/>
+        </p:spPr>
+        <p:txBody>
+          <a:bodyPr wrap="square" anchor="b" lIns="0" rIns="0" tIns="0" bIns="0">
+            <a:spAutoFit/>
+          </a:bodyPr>
+          <a:lstStyle/>
+          <a:p>
+            <a:pPr algn="ctr">
+              <a:lnSpc>
+                <a:spcPct val="105000"/>
+              </a:lnSpc>
+            </a:pPr>
+            <a:r>
+              <a:rPr sz="3200" b="1" i="0">
+                <a:solidFill>
+                  <a:srgbClr val="FFFFFF"/>
+                </a:solidFill>
+                <a:latin typeface="Myriad Pro 1"/>
+              </a:rPr>
+              <a:t>4.5%</a:t>
+            </a:r>
+          </a:p>
+        </p:txBody>
+      </p:sp>
+      <p:sp>
+        <p:nvSpPr>
+          <p:cNvPr id="11" name="TextBox 10"/>
+          <p:cNvSpPr txBox="1"/>
+          <p:nvPr/>
+        </p:nvSpPr>
+        <p:spPr>
+          <a:xfrm>
+            <a:off x="4690872" y="3553358"/>
+            <a:ext cx="3383280" cy="621792"/>
+          </a:xfrm>
+          <a:prstGeom prst="rect">
+            <a:avLst/>
+          </a:prstGeom>
+          <a:noFill/>
+        </p:spPr>
+        <p:txBody>
+          <a:bodyPr wrap="square" anchor="t" lIns="0" rIns="0" tIns="0" bIns="0">
+            <a:spAutoFit/>
+          </a:bodyPr>
+          <a:lstStyle/>
+          <a:p>
+            <a:pPr algn="ctr">
+              <a:lnSpc>
+                <a:spcPct val="100000"/>
+              </a:lnSpc>
+            </a:pPr>
+            <a:r>
+              <a:rPr sz="1400" b="0" i="0">
+                <a:solidFill>
+                  <a:srgbClr val="BFE3DF"/>
+                </a:solidFill>
+                <a:latin typeface="Myriad Pro 1"/>
+              </a:rPr>
+              <a:t>Average rate to PEAK borrowers</a:t>
+            </a:r>
+          </a:p>
+        </p:txBody>
+      </p:sp>
+      <p:sp>
+        <p:nvSpPr>
+          <p:cNvPr id="12" name="Rectangle 11"/>
+          <p:cNvSpPr/>
+          <p:nvPr/>
+        </p:nvSpPr>
+        <p:spPr>
+          <a:xfrm>
+            <a:off x="713232" y="4389120"/>
+            <a:ext cx="3657600" cy="1554480"/>
+          </a:xfrm>
+          <a:prstGeom prst="rect">
+            <a:avLst/>
+          </a:prstGeom>
+          <a:solidFill>
+            <a:srgbClr val="0B3B3E"/>
+          </a:solidFill>
+          <a:ln>
+            <a:noFill/>
+          </a:ln>
+          <a:effectLst/>
+        </p:spPr>
+        <p:style>
+          <a:lnRef idx="1">
+            <a:schemeClr val="accent1"/>
+          </a:lnRef>
+          <a:fillRef idx="3">
+            <a:schemeClr val="accent1"/>
+          </a:fillRef>
+          <a:effectRef idx="2">
+            <a:schemeClr val="accent1"/>
+          </a:effectRef>
+          <a:fontRef idx="minor">
+            <a:schemeClr val="lt1"/>
+          </a:fontRef>
+        </p:style>
+        <p:txBody>
+          <a:bodyPr rtlCol="0" anchor="ctr"/>
+          <a:lstStyle/>
+          <a:p>
+            <a:pPr algn="ctr"/>
+          </a:p>
+        </p:txBody>
+      </p:sp>
+      <p:sp>
+        <p:nvSpPr>
+          <p:cNvPr id="13" name="TextBox 12"/>
+          <p:cNvSpPr txBox="1"/>
+          <p:nvPr/>
+        </p:nvSpPr>
+        <p:spPr>
+          <a:xfrm>
+            <a:off x="850392" y="4498848"/>
+            <a:ext cx="3383280" cy="854964"/>
+          </a:xfrm>
+          <a:prstGeom prst="rect">
+            <a:avLst/>
+          </a:prstGeom>
+          <a:noFill/>
+        </p:spPr>
+        <p:txBody>
+          <a:bodyPr wrap="square" anchor="b" lIns="0" rIns="0" tIns="0" bIns="0">
+            <a:spAutoFit/>
+          </a:bodyPr>
+          <a:lstStyle/>
+          <a:p>
+            <a:pPr algn="ctr">
+              <a:lnSpc>
+                <a:spcPct val="105000"/>
+              </a:lnSpc>
+            </a:pPr>
+            <a:r>
+              <a:rPr sz="3200" b="1" i="0">
+                <a:solidFill>
+                  <a:srgbClr val="FFFFFF"/>
+                </a:solidFill>
+                <a:latin typeface="Myriad Pro 1"/>
+              </a:rPr>
+              <a:t>4%</a:t>
+            </a:r>
+          </a:p>
+        </p:txBody>
+      </p:sp>
+      <p:sp>
+        <p:nvSpPr>
+          <p:cNvPr id="14" name="TextBox 13"/>
+          <p:cNvSpPr txBox="1"/>
+          <p:nvPr/>
+        </p:nvSpPr>
+        <p:spPr>
+          <a:xfrm>
+            <a:off x="850392" y="5290718"/>
+            <a:ext cx="3383280" cy="621792"/>
+          </a:xfrm>
+          <a:prstGeom prst="rect">
+            <a:avLst/>
+          </a:prstGeom>
+          <a:noFill/>
+        </p:spPr>
+        <p:txBody>
+          <a:bodyPr wrap="square" anchor="t" lIns="0" rIns="0" tIns="0" bIns="0">
+            <a:spAutoFit/>
+          </a:bodyPr>
+          <a:lstStyle/>
+          <a:p>
+            <a:pPr algn="ctr">
+              <a:lnSpc>
+                <a:spcPct val="100000"/>
+              </a:lnSpc>
+            </a:pPr>
+            <a:r>
+              <a:rPr sz="1400" b="0" i="0">
+                <a:solidFill>
+                  <a:srgbClr val="BFE3DF"/>
+                </a:solidFill>
+                <a:latin typeface="Myriad Pro 1"/>
+              </a:rPr>
+              <a:t>Loan fee to borrowers</a:t>
+            </a:r>
+          </a:p>
+        </p:txBody>
+      </p:sp>
+      <p:sp>
+        <p:nvSpPr>
+          <p:cNvPr id="15" name="Rectangle 14"/>
+          <p:cNvSpPr/>
+          <p:nvPr/>
+        </p:nvSpPr>
+        <p:spPr>
+          <a:xfrm>
+            <a:off x="4553712" y="4389120"/>
+            <a:ext cx="3657600" cy="1554480"/>
+          </a:xfrm>
+          <a:prstGeom prst="rect">
+            <a:avLst/>
+          </a:prstGeom>
+          <a:solidFill>
+            <a:srgbClr val="0B3B3E"/>
+          </a:solidFill>
+          <a:ln>
+            <a:noFill/>
+          </a:ln>
+          <a:effectLst/>
+        </p:spPr>
+        <p:style>
+          <a:lnRef idx="1">
+            <a:schemeClr val="accent1"/>
+          </a:lnRef>
+          <a:fillRef idx="3">
+            <a:schemeClr val="accent1"/>
+          </a:fillRef>
+          <a:effectRef idx="2">
+            <a:schemeClr val="accent1"/>
+          </a:effectRef>
+          <a:fontRef idx="minor">
+            <a:schemeClr val="lt1"/>
+          </a:fontRef>
+        </p:style>
+        <p:txBody>
+          <a:bodyPr rtlCol="0" anchor="ctr"/>
+          <a:lstStyle/>
+          <a:p>
+            <a:pPr algn="ctr"/>
+          </a:p>
+        </p:txBody>
+      </p:sp>
+      <p:sp>
+        <p:nvSpPr>
+          <p:cNvPr id="16" name="TextBox 15"/>
+          <p:cNvSpPr txBox="1"/>
+          <p:nvPr/>
+        </p:nvSpPr>
+        <p:spPr>
+          <a:xfrm>
+            <a:off x="4690872" y="4498848"/>
+            <a:ext cx="3383280" cy="854964"/>
+          </a:xfrm>
+          <a:prstGeom prst="rect">
+            <a:avLst/>
+          </a:prstGeom>
+          <a:noFill/>
+        </p:spPr>
+        <p:txBody>
+          <a:bodyPr wrap="square" anchor="b" lIns="0" rIns="0" tIns="0" bIns="0">
+            <a:spAutoFit/>
+          </a:bodyPr>
+          <a:lstStyle/>
+          <a:p>
+            <a:pPr algn="ctr">
+              <a:lnSpc>
+                <a:spcPct val="105000"/>
+              </a:lnSpc>
+            </a:pPr>
+            <a:r>
+              <a:rPr sz="3200" b="1" i="0">
+                <a:solidFill>
+                  <a:srgbClr val="FFFFFF"/>
+                </a:solidFill>
+                <a:latin typeface="Myriad Pro 1"/>
+              </a:rPr>
+              <a:t>3%</a:t>
+            </a:r>
+          </a:p>
+        </p:txBody>
+      </p:sp>
+      <p:sp>
+        <p:nvSpPr>
+          <p:cNvPr id="17" name="TextBox 16"/>
+          <p:cNvSpPr txBox="1"/>
+          <p:nvPr/>
+        </p:nvSpPr>
+        <p:spPr>
+          <a:xfrm>
+            <a:off x="4690872" y="5290718"/>
+            <a:ext cx="3383280" cy="621792"/>
+          </a:xfrm>
+          <a:prstGeom prst="rect">
+            <a:avLst/>
+          </a:prstGeom>
+          <a:noFill/>
+        </p:spPr>
+        <p:txBody>
+          <a:bodyPr wrap="square" anchor="t" lIns="0" rIns="0" tIns="0" bIns="0">
+            <a:spAutoFit/>
+          </a:bodyPr>
+          <a:lstStyle/>
+          <a:p>
+            <a:pPr algn="ctr">
+              <a:lnSpc>
+                <a:spcPct val="100000"/>
+              </a:lnSpc>
+            </a:pPr>
+            <a:r>
+              <a:rPr sz="1400" b="0" i="0">
+                <a:solidFill>
+                  <a:srgbClr val="BFE3DF"/>
+                </a:solidFill>
+                <a:latin typeface="Myriad Pro 1"/>
+              </a:rPr>
+              <a:t>Forecasted loan loss rate</a:t>
+            </a:r>
+          </a:p>
+        </p:txBody>
+      </p:sp>
+      <p:sp>
+        <p:nvSpPr>
+          <p:cNvPr id="18" name="TextBox 17"/>
+          <p:cNvSpPr txBox="1"/>
+          <p:nvPr/>
+        </p:nvSpPr>
+        <p:spPr>
+          <a:xfrm>
+            <a:off x="713232" y="6263640"/>
+            <a:ext cx="7498079" cy="457200"/>
+          </a:xfrm>
+          <a:prstGeom prst="rect">
+            <a:avLst/>
+          </a:prstGeom>
+          <a:noFill/>
+        </p:spPr>
+        <p:txBody>
+          <a:bodyPr wrap="square" anchor="t" lIns="0" rIns="0" tIns="0" bIns="0">
+            <a:spAutoFit/>
+          </a:bodyPr>
+          <a:lstStyle/>
+          <a:p>
+            <a:pPr algn="l">
+              <a:lnSpc>
+                <a:spcPct val="105000"/>
+              </a:lnSpc>
+            </a:pPr>
+            <a:r>
+              <a:rPr sz="1800" b="1" i="0">
+                <a:solidFill>
+                  <a:srgbClr val="0B3B3E"/>
+                </a:solidFill>
+                <a:latin typeface="Myriad Pro 2"/>
+              </a:rPr>
+              <a:t>OTHER ASSUMPTIONS</a:t>
+            </a:r>
+          </a:p>
+        </p:txBody>
+      </p:sp>
+      <p:sp>
+        <p:nvSpPr>
+          <p:cNvPr id="19" name="TextBox 18"/>
+          <p:cNvSpPr txBox="1"/>
+          <p:nvPr/>
+        </p:nvSpPr>
+        <p:spPr>
+          <a:xfrm>
+            <a:off x="713232" y="6766560"/>
+            <a:ext cx="7498079" cy="2011680"/>
+          </a:xfrm>
+          <a:prstGeom prst="rect">
+            <a:avLst/>
+          </a:prstGeom>
+          <a:noFill/>
+        </p:spPr>
+        <p:txBody>
+          <a:bodyPr wrap="square" anchor="t" lIns="0" rIns="0" tIns="0" bIns="0">
+            <a:spAutoFit/>
+          </a:bodyPr>
+          <a:lstStyle/>
+          <a:p>
+            <a:pPr algn="l">
+              <a:lnSpc>
+                <a:spcPct val="130000"/>
+              </a:lnSpc>
+            </a:pPr>
+            <a:r>
+              <a:rPr sz="1600" b="1" i="0">
+                <a:solidFill>
+                  <a:srgbClr val="0B3B3E"/>
+                </a:solidFill>
+                <a:latin typeface="Myriad Pro 1"/>
+              </a:rPr>
+              <a:t>• Incoming wire fee expense: </a:t>
+            </a:r>
+            <a:r>
+              <a:rPr sz="1600" b="0" i="0">
+                <a:solidFill>
+                  <a:srgbClr val="222222"/>
+                </a:solidFill>
+                <a:latin typeface="Myriad Pro 1"/>
+              </a:rPr>
+              <a:t>0.0001%</a:t>
+            </a:r>
+          </a:p>
+          <a:p>
+            <a:pPr algn="l">
+              <a:lnSpc>
+                <a:spcPct val="130000"/>
+              </a:lnSpc>
+            </a:pPr>
+            <a:r>
+              <a:rPr sz="1600" b="1" i="0">
+                <a:solidFill>
+                  <a:srgbClr val="0B3B3E"/>
+                </a:solidFill>
+                <a:latin typeface="Myriad Pro 1"/>
+              </a:rPr>
+              <a:t>• Incremental quarterly increase in loan fund operating expense: </a:t>
+            </a:r>
+            <a:r>
+              <a:rPr sz="1600" b="0" i="0">
+                <a:solidFill>
+                  <a:srgbClr val="222222"/>
+                </a:solidFill>
+                <a:latin typeface="Myriad Pro 1"/>
+              </a:rPr>
+              <a:t>$2,462.25</a:t>
+            </a:r>
+          </a:p>
+          <a:p>
+            <a:pPr algn="l">
+              <a:lnSpc>
+                <a:spcPct val="130000"/>
+              </a:lnSpc>
+            </a:pPr>
+            <a:r>
+              <a:rPr sz="1600" b="1" i="0">
+                <a:solidFill>
+                  <a:srgbClr val="0B3B3E"/>
+                </a:solidFill>
+                <a:latin typeface="Myriad Pro 1"/>
+              </a:rPr>
+              <a:t>• Requested loan amount: </a:t>
+            </a:r>
+            <a:r>
+              <a:rPr sz="1600" b="0" i="0">
+                <a:solidFill>
+                  <a:srgbClr val="222222"/>
+                </a:solidFill>
+                <a:latin typeface="Myriad Pro 1"/>
+              </a:rPr>
+              <a:t>$280,000</a:t>
+            </a:r>
+          </a:p>
+        </p:txBody>
+      </p:sp>
+      <p:sp>
+        <p:nvSpPr>
+          <p:cNvPr id="20" name="Rectangle 19"/>
+          <p:cNvSpPr/>
+          <p:nvPr/>
+        </p:nvSpPr>
+        <p:spPr>
+          <a:xfrm>
+            <a:off x="9235440" y="2651760"/>
+            <a:ext cx="6492240" cy="4663440"/>
+          </a:xfrm>
+          <a:prstGeom prst="rect">
+            <a:avLst/>
+          </a:prstGeom>
+          <a:solidFill>
+            <a:srgbClr val="0B3B3E"/>
+          </a:solidFill>
+          <a:ln>
+            <a:noFill/>
+          </a:ln>
+          <a:effectLst/>
+        </p:spPr>
+        <p:style>
+          <a:lnRef idx="1">
+            <a:schemeClr val="accent1"/>
+          </a:lnRef>
+          <a:fillRef idx="3">
+            <a:schemeClr val="accent1"/>
+          </a:fillRef>
+          <a:effectRef idx="2">
+            <a:schemeClr val="accent1"/>
+          </a:effectRef>
+          <a:fontRef idx="minor">
+            <a:schemeClr val="lt1"/>
+          </a:fontRef>
+        </p:style>
+        <p:txBody>
+          <a:bodyPr rtlCol="0" anchor="ctr"/>
+          <a:lstStyle/>
+          <a:p>
+            <a:pPr algn="ctr"/>
+          </a:p>
+        </p:txBody>
+      </p:sp>
+      <p:sp>
+        <p:nvSpPr>
+          <p:cNvPr id="21" name="TextBox 20"/>
+          <p:cNvSpPr txBox="1"/>
+          <p:nvPr/>
+        </p:nvSpPr>
+        <p:spPr>
+          <a:xfrm>
+            <a:off x="9372600" y="2761488"/>
+            <a:ext cx="6217920" cy="2564892"/>
+          </a:xfrm>
+          <a:prstGeom prst="rect">
+            <a:avLst/>
+          </a:prstGeom>
+          <a:noFill/>
+        </p:spPr>
+        <p:txBody>
+          <a:bodyPr wrap="square" anchor="b" lIns="0" rIns="0" tIns="0" bIns="0">
+            <a:spAutoFit/>
+          </a:bodyPr>
+          <a:lstStyle/>
+          <a:p>
+            <a:pPr algn="ctr">
+              <a:lnSpc>
+                <a:spcPct val="105000"/>
+              </a:lnSpc>
+            </a:pPr>
+            <a:r>
+              <a:rPr sz="5400" b="1" i="0">
+                <a:solidFill>
+                  <a:srgbClr val="FFFFFF"/>
+                </a:solidFill>
+                <a:latin typeface="Myriad Pro 1"/>
+              </a:rPr>
+              <a:t>$105,485</a:t>
+            </a:r>
+          </a:p>
+        </p:txBody>
+      </p:sp>
+      <p:sp>
+        <p:nvSpPr>
+          <p:cNvPr id="22" name="TextBox 21"/>
+          <p:cNvSpPr txBox="1"/>
+          <p:nvPr/>
+        </p:nvSpPr>
+        <p:spPr>
+          <a:xfrm>
+            <a:off x="9372600" y="5356555"/>
+            <a:ext cx="6217920" cy="1865376"/>
+          </a:xfrm>
+          <a:prstGeom prst="rect">
+            <a:avLst/>
+          </a:prstGeom>
+          <a:noFill/>
+        </p:spPr>
+        <p:txBody>
+          <a:bodyPr wrap="square" anchor="t" lIns="0" rIns="0" tIns="0" bIns="0">
+            <a:spAutoFit/>
+          </a:bodyPr>
+          <a:lstStyle/>
+          <a:p>
+            <a:pPr algn="ctr">
+              <a:lnSpc>
+                <a:spcPct val="100000"/>
+              </a:lnSpc>
+            </a:pPr>
+            <a:r>
+              <a:rPr sz="1400" b="0" i="0">
+                <a:solidFill>
+                  <a:srgbClr val="BFE3DF"/>
+                </a:solidFill>
+                <a:latin typeface="Myriad Pro 1"/>
+              </a:rPr>
+              <a:t>Forecasted ending fund balance</a:t>
+            </a:r>
+          </a:p>
+        </p:txBody>
+      </p:sp>
+      <p:sp>
+        <p:nvSpPr>
+          <p:cNvPr id="23" name="TextBox 22"/>
+          <p:cNvSpPr txBox="1"/>
+          <p:nvPr/>
+        </p:nvSpPr>
+        <p:spPr>
+          <a:xfrm>
+            <a:off x="9235440" y="7589520"/>
+            <a:ext cx="6492240" cy="1188720"/>
+          </a:xfrm>
+          <a:prstGeom prst="rect">
+            <a:avLst/>
+          </a:prstGeom>
+          <a:noFill/>
+        </p:spPr>
+        <p:txBody>
+          <a:bodyPr wrap="square" anchor="t" lIns="0" rIns="0" tIns="0" bIns="0">
+            <a:spAutoFit/>
+          </a:bodyPr>
+          <a:lstStyle/>
+          <a:p>
+            <a:pPr algn="l">
+              <a:lnSpc>
+                <a:spcPct val="125000"/>
+              </a:lnSpc>
+            </a:pPr>
+            <a:r>
+              <a:rPr sz="1500" b="0" i="1">
+                <a:solidFill>
+                  <a:srgbClr val="555555"/>
+                </a:solidFill>
+                <a:latin typeface="Myriad Pro 1"/>
+              </a:rPr>
+              <a:t>The fund is forecast to grow from the $280,000 facility after interest income, the 3% loan-loss allowance, and rising operating expense are all accounted for.</a:t>
+            </a:r>
+          </a:p>
+        </p:txBody>
+      </p:sp>
+      <p:sp>
+        <p:nvSpPr>
+          <p:cNvPr id="24" name="TextBox 23"/>
+          <p:cNvSpPr txBox="1"/>
+          <p:nvPr/>
+        </p:nvSpPr>
+        <p:spPr>
+          <a:xfrm>
+            <a:off x="13286232" y="128016"/>
+            <a:ext cx="4690872" cy="822960"/>
+          </a:xfrm>
+          <a:prstGeom prst="rect">
+            <a:avLst/>
+          </a:prstGeom>
+          <a:noFill/>
+        </p:spPr>
+        <p:txBody>
+          <a:bodyPr wrap="square" anchor="t" lIns="0" rIns="0" tIns="0" bIns="0">
+            <a:spAutoFit/>
+          </a:bodyPr>
+          <a:lstStyle/>
+          <a:p>
+            <a:pPr algn="l">
+              <a:lnSpc>
+                <a:spcPct val="115000"/>
+              </a:lnSpc>
+            </a:pPr>
+            <a:r>
+              <a:rPr sz="3800" b="0" i="0">
+                <a:solidFill>
+                  <a:srgbClr val="57B6B2"/>
+                </a:solidFill>
+                <a:latin typeface="Myriad Pro 1"/>
+              </a:rPr>
+              <a:t>• Time allocated: (1 minute)</a:t>
+            </a:r>
+          </a:p>
+        </p:txBody>
+      </p:sp>
+    </p:spTree>
+  </p:cSld>
+  <p:clrMapOvr>
+    <a:masterClrMapping/>
+  </p:clrMapOvr>
+</p:sld>
+</file>
+
+<file path=ppt/slides/slide17.xml><?xml version="1.0" encoding="utf-8"?>
+<p:sld xmlns:a="http://schemas.openxmlformats.org/drawingml/2006/main" xmlns:p="http://schemas.openxmlformats.org/presentationml/2006/main" xmlns:r="http://schemas.openxmlformats.org/officeDocument/2006/relationships">
+  <p:cSld>
+    <p:spTree>
+      <p:nvGrpSpPr>
+        <p:cNvPr id="1" name=""/>
+        <p:cNvGrpSpPr/>
+        <p:nvPr/>
+      </p:nvGrpSpPr>
+      <p:grpSpPr/>
+      <p:sp>
+        <p:nvSpPr>
+          <p:cNvPr id="2" name="Rectangle 1"/>
+          <p:cNvSpPr/>
+          <p:nvPr/>
+        </p:nvSpPr>
+        <p:spPr>
+          <a:xfrm>
+            <a:off x="0" y="0"/>
+            <a:ext cx="18288000" cy="10287000"/>
+          </a:xfrm>
+          <a:prstGeom prst="rect">
+            <a:avLst/>
+          </a:prstGeom>
+          <a:solidFill>
+            <a:srgbClr val="0B3B3E"/>
+          </a:solidFill>
+          <a:ln>
+            <a:noFill/>
+          </a:ln>
+          <a:effectLst/>
+        </p:spPr>
+        <p:style>
+          <a:lnRef idx="1">
+            <a:schemeClr val="accent1"/>
+          </a:lnRef>
+          <a:fillRef idx="3">
+            <a:schemeClr val="accent1"/>
+          </a:fillRef>
+          <a:effectRef idx="2">
+            <a:schemeClr val="accent1"/>
+          </a:effectRef>
+          <a:fontRef idx="minor">
+            <a:schemeClr val="lt1"/>
+          </a:fontRef>
+        </p:style>
+        <p:txBody>
+          <a:bodyPr rtlCol="0" anchor="ctr"/>
+          <a:lstStyle/>
+          <a:p>
+            <a:pPr algn="ctr"/>
+          </a:p>
+        </p:txBody>
+      </p:sp>
+      <p:sp>
+        <p:nvSpPr>
+          <p:cNvPr id="3" name="TextBox 2"/>
+          <p:cNvSpPr txBox="1"/>
+          <p:nvPr/>
+        </p:nvSpPr>
+        <p:spPr>
+          <a:xfrm>
+            <a:off x="713232" y="411480"/>
+            <a:ext cx="15544800" cy="365760"/>
+          </a:xfrm>
+          <a:prstGeom prst="rect">
+            <a:avLst/>
+          </a:prstGeom>
+          <a:noFill/>
+        </p:spPr>
+        <p:txBody>
+          <a:bodyPr wrap="square" anchor="t" lIns="0" rIns="0" tIns="0" bIns="0">
+            <a:spAutoFit/>
+          </a:bodyPr>
+          <a:lstStyle/>
+          <a:p>
+            <a:pPr algn="l">
+              <a:lnSpc>
+                <a:spcPct val="105000"/>
+              </a:lnSpc>
+            </a:pPr>
+            <a:r>
+              <a:rPr sz="1400" b="1" i="0">
+                <a:solidFill>
+                  <a:srgbClr val="F0A61E"/>
+                </a:solidFill>
+                <a:latin typeface="Myriad Pro 2"/>
+              </a:rPr>
+              <a:t>08D — IS THE BOOK ACTUALLY HEALTHY?</a:t>
+            </a:r>
+          </a:p>
+        </p:txBody>
+      </p:sp>
+      <p:sp>
+        <p:nvSpPr>
+          <p:cNvPr id="4" name="TextBox 3"/>
+          <p:cNvSpPr txBox="1"/>
+          <p:nvPr/>
+        </p:nvSpPr>
+        <p:spPr>
+          <a:xfrm>
+            <a:off x="713232" y="777240"/>
+            <a:ext cx="15544800" cy="822960"/>
+          </a:xfrm>
+          <a:prstGeom prst="rect">
+            <a:avLst/>
+          </a:prstGeom>
+          <a:noFill/>
+        </p:spPr>
+        <p:txBody>
+          <a:bodyPr wrap="square" anchor="t" lIns="0" rIns="0" tIns="0" bIns="0">
+            <a:spAutoFit/>
+          </a:bodyPr>
+          <a:lstStyle/>
+          <a:p>
+            <a:pPr algn="l">
+              <a:lnSpc>
+                <a:spcPct val="105000"/>
+              </a:lnSpc>
+            </a:pPr>
+            <a:r>
+              <a:rPr sz="4000" b="1" i="0">
+                <a:solidFill>
+                  <a:srgbClr val="FFFFFF"/>
+                </a:solidFill>
+                <a:latin typeface="Myriad Pro 2"/>
+              </a:rPr>
+              <a:t>Credit Quality &amp; Portfolio Aging</a:t>
+            </a:r>
+          </a:p>
+        </p:txBody>
+      </p:sp>
+      <p:sp>
+        <p:nvSpPr>
+          <p:cNvPr id="5" name="Rectangle 4"/>
+          <p:cNvSpPr/>
+          <p:nvPr/>
+        </p:nvSpPr>
+        <p:spPr>
+          <a:xfrm>
+            <a:off x="713232" y="1600200"/>
+            <a:ext cx="1463040" cy="38100"/>
+          </a:xfrm>
+          <a:prstGeom prst="rect">
+            <a:avLst/>
+          </a:prstGeom>
+          <a:solidFill>
+            <a:srgbClr val="F0A61E"/>
+          </a:solidFill>
+          <a:ln>
+            <a:noFill/>
+          </a:ln>
+          <a:effectLst/>
+        </p:spPr>
+        <p:style>
+          <a:lnRef idx="1">
+            <a:schemeClr val="accent1"/>
+          </a:lnRef>
+          <a:fillRef idx="3">
+            <a:schemeClr val="accent1"/>
+          </a:fillRef>
+          <a:effectRef idx="2">
+            <a:schemeClr val="accent1"/>
+          </a:effectRef>
+          <a:fontRef idx="minor">
+            <a:schemeClr val="lt1"/>
+          </a:fontRef>
+        </p:style>
+        <p:txBody>
+          <a:bodyPr rtlCol="0" anchor="ctr"/>
+          <a:lstStyle/>
+          <a:p>
+            <a:pPr algn="ctr"/>
+          </a:p>
+        </p:txBody>
+      </p:sp>
+      <p:sp>
+        <p:nvSpPr>
+          <p:cNvPr id="6" name="Rectangle 5"/>
+          <p:cNvSpPr/>
+          <p:nvPr/>
+        </p:nvSpPr>
+        <p:spPr>
+          <a:xfrm>
+            <a:off x="713232" y="2651760"/>
+            <a:ext cx="3657600" cy="1828800"/>
+          </a:xfrm>
+          <a:prstGeom prst="rect">
+            <a:avLst/>
+          </a:prstGeom>
+          <a:solidFill>
+            <a:srgbClr val="0B3B3E"/>
+          </a:solidFill>
+          <a:ln>
+            <a:noFill/>
+          </a:ln>
+          <a:effectLst/>
+        </p:spPr>
+        <p:style>
+          <a:lnRef idx="1">
+            <a:schemeClr val="accent1"/>
+          </a:lnRef>
+          <a:fillRef idx="3">
+            <a:schemeClr val="accent1"/>
+          </a:fillRef>
+          <a:effectRef idx="2">
+            <a:schemeClr val="accent1"/>
+          </a:effectRef>
+          <a:fontRef idx="minor">
+            <a:schemeClr val="lt1"/>
+          </a:fontRef>
+        </p:style>
+        <p:txBody>
+          <a:bodyPr rtlCol="0" anchor="ctr"/>
+          <a:lstStyle/>
+          <a:p>
+            <a:pPr algn="ctr"/>
+          </a:p>
+        </p:txBody>
+      </p:sp>
+      <p:sp>
+        <p:nvSpPr>
+          <p:cNvPr id="7" name="TextBox 6"/>
+          <p:cNvSpPr txBox="1"/>
+          <p:nvPr/>
+        </p:nvSpPr>
+        <p:spPr>
+          <a:xfrm>
+            <a:off x="850392" y="2761488"/>
+            <a:ext cx="3383280" cy="1005840"/>
+          </a:xfrm>
+          <a:prstGeom prst="rect">
+            <a:avLst/>
+          </a:prstGeom>
+          <a:noFill/>
+        </p:spPr>
+        <p:txBody>
+          <a:bodyPr wrap="square" anchor="b" lIns="0" rIns="0" tIns="0" bIns="0">
+            <a:spAutoFit/>
+          </a:bodyPr>
+          <a:lstStyle/>
+          <a:p>
+            <a:pPr algn="ctr">
+              <a:lnSpc>
+                <a:spcPct val="105000"/>
+              </a:lnSpc>
+            </a:pPr>
+            <a:r>
+              <a:rPr sz="3000" b="1" i="0">
+                <a:solidFill>
+                  <a:srgbClr val="FFFFFF"/>
+                </a:solidFill>
+                <a:latin typeface="Myriad Pro 1"/>
+              </a:rPr>
+              <a:t>$187,889</a:t>
+            </a:r>
+          </a:p>
+        </p:txBody>
+      </p:sp>
+      <p:sp>
+        <p:nvSpPr>
+          <p:cNvPr id="8" name="TextBox 7"/>
+          <p:cNvSpPr txBox="1"/>
+          <p:nvPr/>
+        </p:nvSpPr>
+        <p:spPr>
+          <a:xfrm>
+            <a:off x="850392" y="3712464"/>
+            <a:ext cx="3383280" cy="731520"/>
+          </a:xfrm>
+          <a:prstGeom prst="rect">
+            <a:avLst/>
+          </a:prstGeom>
+          <a:noFill/>
+        </p:spPr>
+        <p:txBody>
+          <a:bodyPr wrap="square" anchor="t" lIns="0" rIns="0" tIns="0" bIns="0">
+            <a:spAutoFit/>
+          </a:bodyPr>
+          <a:lstStyle/>
+          <a:p>
+            <a:pPr algn="ctr">
+              <a:lnSpc>
+                <a:spcPct val="100000"/>
+              </a:lnSpc>
+            </a:pPr>
+            <a:r>
+              <a:rPr sz="1400" b="0" i="0">
+                <a:solidFill>
+                  <a:srgbClr val="BFE3DF"/>
+                </a:solidFill>
+                <a:latin typeface="Myriad Pro 1"/>
+              </a:rPr>
+              <a:t>Total outstanding loan portfolio</a:t>
+            </a:r>
+          </a:p>
+        </p:txBody>
+      </p:sp>
+      <p:sp>
+        <p:nvSpPr>
+          <p:cNvPr id="9" name="Rectangle 8"/>
+          <p:cNvSpPr/>
+          <p:nvPr/>
+        </p:nvSpPr>
+        <p:spPr>
+          <a:xfrm>
+            <a:off x="4526280" y="2651760"/>
+            <a:ext cx="3657600" cy="1828800"/>
+          </a:xfrm>
+          <a:prstGeom prst="rect">
+            <a:avLst/>
+          </a:prstGeom>
+          <a:solidFill>
+            <a:srgbClr val="0B3B3E"/>
+          </a:solidFill>
+          <a:ln>
+            <a:noFill/>
+          </a:ln>
+          <a:effectLst/>
+        </p:spPr>
+        <p:style>
+          <a:lnRef idx="1">
+            <a:schemeClr val="accent1"/>
+          </a:lnRef>
+          <a:fillRef idx="3">
+            <a:schemeClr val="accent1"/>
+          </a:fillRef>
+          <a:effectRef idx="2">
+            <a:schemeClr val="accent1"/>
+          </a:effectRef>
+          <a:fontRef idx="minor">
+            <a:schemeClr val="lt1"/>
+          </a:fontRef>
+        </p:style>
+        <p:txBody>
+          <a:bodyPr rtlCol="0" anchor="ctr"/>
+          <a:lstStyle/>
+          <a:p>
+            <a:pPr algn="ctr"/>
+          </a:p>
+        </p:txBody>
+      </p:sp>
+      <p:sp>
+        <p:nvSpPr>
+          <p:cNvPr id="10" name="TextBox 9"/>
+          <p:cNvSpPr txBox="1"/>
+          <p:nvPr/>
+        </p:nvSpPr>
+        <p:spPr>
+          <a:xfrm>
+            <a:off x="4663440" y="2761488"/>
+            <a:ext cx="3383280" cy="1005840"/>
+          </a:xfrm>
+          <a:prstGeom prst="rect">
+            <a:avLst/>
+          </a:prstGeom>
+          <a:noFill/>
+        </p:spPr>
+        <p:txBody>
+          <a:bodyPr wrap="square" anchor="b" lIns="0" rIns="0" tIns="0" bIns="0">
+            <a:spAutoFit/>
+          </a:bodyPr>
+          <a:lstStyle/>
+          <a:p>
+            <a:pPr algn="ctr">
+              <a:lnSpc>
+                <a:spcPct val="105000"/>
+              </a:lnSpc>
+            </a:pPr>
+            <a:r>
+              <a:rPr sz="3600" b="1" i="0">
+                <a:solidFill>
+                  <a:srgbClr val="FFFFFF"/>
+                </a:solidFill>
+                <a:latin typeface="Myriad Pro 1"/>
+              </a:rPr>
+              <a:t>0.98%</a:t>
+            </a:r>
+          </a:p>
+        </p:txBody>
+      </p:sp>
+      <p:sp>
+        <p:nvSpPr>
+          <p:cNvPr id="11" name="TextBox 10"/>
+          <p:cNvSpPr txBox="1"/>
+          <p:nvPr/>
+        </p:nvSpPr>
+        <p:spPr>
+          <a:xfrm>
+            <a:off x="4663440" y="3712464"/>
+            <a:ext cx="3383280" cy="731520"/>
+          </a:xfrm>
+          <a:prstGeom prst="rect">
+            <a:avLst/>
+          </a:prstGeom>
+          <a:noFill/>
+        </p:spPr>
+        <p:txBody>
+          <a:bodyPr wrap="square" anchor="t" lIns="0" rIns="0" tIns="0" bIns="0">
+            <a:spAutoFit/>
+          </a:bodyPr>
+          <a:lstStyle/>
+          <a:p>
+            <a:pPr algn="ctr">
+              <a:lnSpc>
+                <a:spcPct val="100000"/>
+              </a:lnSpc>
+            </a:pPr>
+            <a:r>
+              <a:rPr sz="1400" b="0" i="0">
+                <a:solidFill>
+                  <a:srgbClr val="BFE3DF"/>
+                </a:solidFill>
+                <a:latin typeface="Myriad Pro 1"/>
+              </a:rPr>
+              <a:t>of portfolio overdue ($1,850)</a:t>
+            </a:r>
+          </a:p>
+        </p:txBody>
+      </p:sp>
+      <p:sp>
+        <p:nvSpPr>
+          <p:cNvPr id="12" name="TextBox 11"/>
+          <p:cNvSpPr txBox="1"/>
+          <p:nvPr/>
+        </p:nvSpPr>
+        <p:spPr>
+          <a:xfrm>
+            <a:off x="713232" y="4709160"/>
+            <a:ext cx="7589520" cy="914400"/>
+          </a:xfrm>
+          <a:prstGeom prst="rect">
+            <a:avLst/>
+          </a:prstGeom>
+          <a:noFill/>
+        </p:spPr>
+        <p:txBody>
+          <a:bodyPr wrap="square" anchor="t" lIns="0" rIns="0" tIns="0" bIns="0">
+            <a:spAutoFit/>
+          </a:bodyPr>
+          <a:lstStyle/>
+          <a:p>
+            <a:pPr algn="l">
+              <a:lnSpc>
+                <a:spcPct val="105000"/>
+              </a:lnSpc>
+            </a:pPr>
+            <a:r>
+              <a:rPr sz="2000" b="1" i="0">
+                <a:solidFill>
+                  <a:srgbClr val="F0A61E"/>
+                </a:solidFill>
+                <a:latin typeface="Myriad Pro 1"/>
+              </a:rPr>
+              <a:t>No balance has aged beyond 90 days.</a:t>
+            </a:r>
+          </a:p>
+        </p:txBody>
+      </p:sp>
+      <p:sp>
+        <p:nvSpPr>
+          <p:cNvPr id="13" name="TextBox 12"/>
+          <p:cNvSpPr txBox="1"/>
+          <p:nvPr/>
+        </p:nvSpPr>
+        <p:spPr>
+          <a:xfrm>
+            <a:off x="713232" y="5349240"/>
+            <a:ext cx="7589520" cy="2743200"/>
+          </a:xfrm>
+          <a:prstGeom prst="rect">
+            <a:avLst/>
+          </a:prstGeom>
+          <a:noFill/>
+        </p:spPr>
+        <p:txBody>
+          <a:bodyPr wrap="square" anchor="t" lIns="0" rIns="0" tIns="0" bIns="0">
+            <a:spAutoFit/>
+          </a:bodyPr>
+          <a:lstStyle/>
+          <a:p>
+            <a:pPr algn="l">
+              <a:lnSpc>
+                <a:spcPct val="130000"/>
+              </a:lnSpc>
+            </a:pPr>
+            <a:r>
+              <a:rPr sz="1600" b="0" i="0">
+                <a:solidFill>
+                  <a:srgbClr val="FFFFFF"/>
+                </a:solidFill>
+                <a:latin typeface="Myriad Pro 1"/>
+              </a:rPr>
+              <a:t>Provisioning is graduated: 1% at current, 5% at 1–30 days, 20% at 31–60 days, 50% at 61–90 days, 100% beyond 90 days — built into the lending model from the outset, not introduced in response to losses.</a:t>
+            </a:r>
+          </a:p>
+        </p:txBody>
+      </p:sp>
+      <p:graphicFrame>
+        <p:nvGraphicFramePr>
+          <p:cNvPr id="14" name="Chart 13"/>
+          <p:cNvGraphicFramePr>
+            <a:graphicFrameLocks noGrp="1"/>
+          </p:cNvGraphicFramePr>
+          <p:nvPr/>
+        </p:nvGraphicFramePr>
+        <p:xfrm>
+          <a:off x="8778240" y="2651760"/>
+          <a:ext cx="8229600" cy="6309360"/>
+        </p:xfrm>
+        <a:graphic>
+          <a:graphicData uri="http://schemas.openxmlformats.org/drawingml/2006/chart">
+            <c:chart xmlns:c="http://schemas.openxmlformats.org/drawingml/2006/chart" r:id="rId2"/>
+          </a:graphicData>
+        </a:graphic>
+      </p:graphicFrame>
+      <p:sp>
+        <p:nvSpPr>
+          <p:cNvPr id="15" name="TextBox 14"/>
+          <p:cNvSpPr txBox="1"/>
+          <p:nvPr/>
+        </p:nvSpPr>
+        <p:spPr>
+          <a:xfrm>
+            <a:off x="8778240" y="9144000"/>
+            <a:ext cx="8229600" cy="548640"/>
+          </a:xfrm>
+          <a:prstGeom prst="rect">
+            <a:avLst/>
+          </a:prstGeom>
+          <a:noFill/>
+        </p:spPr>
+        <p:txBody>
+          <a:bodyPr wrap="square" anchor="t" lIns="0" rIns="0" tIns="0" bIns="0">
+            <a:spAutoFit/>
+          </a:bodyPr>
+          <a:lstStyle/>
+          <a:p>
+            <a:pPr algn="ctr">
+              <a:lnSpc>
+                <a:spcPct val="105000"/>
+              </a:lnSpc>
+            </a:pPr>
+            <a:r>
+              <a:rPr sz="1600" b="0" i="1">
+                <a:solidFill>
+                  <a:srgbClr val="BFE3DF"/>
+                </a:solidFill>
+                <a:latin typeface="Myriad Pro 1"/>
+              </a:rPr>
+              <a:t>Aging of the $1,850 currently overdue — none beyond 90 days</a:t>
+            </a:r>
+          </a:p>
+        </p:txBody>
+      </p:sp>
+      <p:sp>
+        <p:nvSpPr>
+          <p:cNvPr id="16" name="TextBox 15"/>
+          <p:cNvSpPr txBox="1"/>
+          <p:nvPr/>
+        </p:nvSpPr>
+        <p:spPr>
+          <a:xfrm>
+            <a:off x="13286232" y="128016"/>
+            <a:ext cx="4690872" cy="822960"/>
+          </a:xfrm>
+          <a:prstGeom prst="rect">
+            <a:avLst/>
+          </a:prstGeom>
+          <a:noFill/>
+        </p:spPr>
+        <p:txBody>
+          <a:bodyPr wrap="square" anchor="t" lIns="0" rIns="0" tIns="0" bIns="0">
+            <a:spAutoFit/>
+          </a:bodyPr>
+          <a:lstStyle/>
+          <a:p>
+            <a:pPr algn="l">
+              <a:lnSpc>
+                <a:spcPct val="115000"/>
+              </a:lnSpc>
+            </a:pPr>
+            <a:r>
+              <a:rPr sz="3800" b="0" i="0">
+                <a:solidFill>
+                  <a:srgbClr val="BFE3DF"/>
+                </a:solidFill>
+                <a:latin typeface="Myriad Pro 1"/>
+              </a:rPr>
+              <a:t>• Time allocated: (1 minute)</a:t>
+            </a:r>
+          </a:p>
+        </p:txBody>
+      </p:sp>
+    </p:spTree>
+  </p:cSld>
+  <p:clrMapOvr>
+    <a:masterClrMapping/>
+  </p:clrMapOvr>
+</p:sld>
+</file>
+
+<file path=ppt/slides/slide18.xml><?xml version="1.0" encoding="utf-8"?>
+<p:sld xmlns:a="http://schemas.openxmlformats.org/drawingml/2006/main" xmlns:p="http://schemas.openxmlformats.org/presentationml/2006/main" xmlns:r="http://schemas.openxmlformats.org/officeDocument/2006/relationships">
+  <p:cSld>
+    <p:spTree>
+      <p:nvGrpSpPr>
+        <p:cNvPr id="1" name=""/>
+        <p:cNvGrpSpPr/>
+        <p:nvPr/>
+      </p:nvGrpSpPr>
+      <p:grpSpPr/>
+      <p:sp>
+        <p:nvSpPr>
+          <p:cNvPr id="2" name="Rectangle 1"/>
+          <p:cNvSpPr/>
+          <p:nvPr/>
+        </p:nvSpPr>
+        <p:spPr>
+          <a:xfrm>
+            <a:off x="0" y="0"/>
+            <a:ext cx="18288000" cy="10287000"/>
+          </a:xfrm>
+          <a:prstGeom prst="rect">
+            <a:avLst/>
+          </a:prstGeom>
+          <a:solidFill>
+            <a:srgbClr val="FFFFFF"/>
+          </a:solidFill>
+          <a:ln>
+            <a:noFill/>
+          </a:ln>
+          <a:effectLst/>
+        </p:spPr>
+        <p:style>
+          <a:lnRef idx="1">
+            <a:schemeClr val="accent1"/>
+          </a:lnRef>
+          <a:fillRef idx="3">
+            <a:schemeClr val="accent1"/>
+          </a:fillRef>
+          <a:effectRef idx="2">
+            <a:schemeClr val="accent1"/>
+          </a:effectRef>
+          <a:fontRef idx="minor">
+            <a:schemeClr val="lt1"/>
+          </a:fontRef>
+        </p:style>
+        <p:txBody>
+          <a:bodyPr rtlCol="0" anchor="ctr"/>
+          <a:lstStyle/>
+          <a:p>
+            <a:pPr algn="ctr"/>
+          </a:p>
+        </p:txBody>
+      </p:sp>
+      <p:sp>
+        <p:nvSpPr>
+          <p:cNvPr id="3" name="TextBox 2"/>
+          <p:cNvSpPr txBox="1"/>
+          <p:nvPr/>
+        </p:nvSpPr>
+        <p:spPr>
+          <a:xfrm>
+            <a:off x="713232" y="411480"/>
+            <a:ext cx="15544800" cy="365760"/>
+          </a:xfrm>
+          <a:prstGeom prst="rect">
+            <a:avLst/>
+          </a:prstGeom>
+          <a:noFill/>
+        </p:spPr>
+        <p:txBody>
+          <a:bodyPr wrap="square" anchor="t" lIns="0" rIns="0" tIns="0" bIns="0">
+            <a:spAutoFit/>
+          </a:bodyPr>
+          <a:lstStyle/>
+          <a:p>
+            <a:pPr algn="l">
+              <a:lnSpc>
+                <a:spcPct val="105000"/>
+              </a:lnSpc>
+            </a:pPr>
+            <a:r>
+              <a:rPr sz="1400" b="1" i="0">
+                <a:solidFill>
+                  <a:srgbClr val="F0A61E"/>
+                </a:solidFill>
+                <a:latin typeface="Myriad Pro 2"/>
+              </a:rPr>
+              <a:t>09B — THE REST OF THE PICTURE</a:t>
+            </a:r>
+          </a:p>
+        </p:txBody>
+      </p:sp>
+      <p:sp>
+        <p:nvSpPr>
+          <p:cNvPr id="4" name="TextBox 3"/>
+          <p:cNvSpPr txBox="1"/>
+          <p:nvPr/>
+        </p:nvSpPr>
+        <p:spPr>
+          <a:xfrm>
+            <a:off x="713232" y="777240"/>
+            <a:ext cx="15544800" cy="822960"/>
+          </a:xfrm>
+          <a:prstGeom prst="rect">
+            <a:avLst/>
+          </a:prstGeom>
+          <a:noFill/>
+        </p:spPr>
+        <p:txBody>
+          <a:bodyPr wrap="square" anchor="t" lIns="0" rIns="0" tIns="0" bIns="0">
+            <a:spAutoFit/>
+          </a:bodyPr>
+          <a:lstStyle/>
+          <a:p>
+            <a:pPr algn="l">
+              <a:lnSpc>
+                <a:spcPct val="105000"/>
+              </a:lnSpc>
+            </a:pPr>
+            <a:r>
+              <a:rPr sz="4000" b="1" i="0">
+                <a:solidFill>
+                  <a:srgbClr val="0B3B3E"/>
+                </a:solidFill>
+                <a:latin typeface="Myriad Pro 2"/>
+              </a:rPr>
+              <a:t>Risk Assessment II</a:t>
+            </a:r>
+          </a:p>
+        </p:txBody>
+      </p:sp>
+      <p:sp>
+        <p:nvSpPr>
+          <p:cNvPr id="5" name="Rectangle 4"/>
+          <p:cNvSpPr/>
+          <p:nvPr/>
+        </p:nvSpPr>
+        <p:spPr>
+          <a:xfrm>
+            <a:off x="713232" y="1600200"/>
+            <a:ext cx="1463040" cy="38100"/>
+          </a:xfrm>
+          <a:prstGeom prst="rect">
+            <a:avLst/>
+          </a:prstGeom>
+          <a:solidFill>
+            <a:srgbClr val="F0A61E"/>
+          </a:solidFill>
+          <a:ln>
+            <a:noFill/>
+          </a:ln>
+          <a:effectLst/>
+        </p:spPr>
+        <p:style>
+          <a:lnRef idx="1">
+            <a:schemeClr val="accent1"/>
+          </a:lnRef>
+          <a:fillRef idx="3">
+            <a:schemeClr val="accent1"/>
+          </a:fillRef>
+          <a:effectRef idx="2">
+            <a:schemeClr val="accent1"/>
+          </a:effectRef>
+          <a:fontRef idx="minor">
+            <a:schemeClr val="lt1"/>
+          </a:fontRef>
+        </p:style>
+        <p:txBody>
+          <a:bodyPr rtlCol="0" anchor="ctr"/>
+          <a:lstStyle/>
+          <a:p>
+            <a:pPr algn="ctr"/>
+          </a:p>
+        </p:txBody>
+      </p:sp>
+      <p:graphicFrame>
+        <p:nvGraphicFramePr>
+          <p:cNvPr id="6" name="Table 5"/>
+          <p:cNvGraphicFramePr>
+            <a:graphicFrameLocks noGrp="1"/>
+          </p:cNvGraphicFramePr>
+          <p:nvPr/>
+        </p:nvGraphicFramePr>
+        <p:xfrm>
+          <a:off x="713232" y="2514600"/>
+          <a:ext cx="16459200" cy="7360920"/>
+        </p:xfrm>
+        <a:graphic>
+          <a:graphicData uri="http://schemas.openxmlformats.org/drawingml/2006/table">
+            <a:tbl>
+              <a:tblPr bandRow="1">
+                <a:tableStyleId>{5C22544A-7EE6-4342-B048-85BDC9FD1C3A}</a:tableStyleId>
+              </a:tblPr>
+              <a:tblGrid>
+                <a:gridCol w="3108960"/>
+                <a:gridCol w="6675120"/>
+                <a:gridCol w="6675120"/>
+              </a:tblGrid>
+              <a:tr h="502920">
+                <a:tc>
+                  <a:txBody>
+                    <a:bodyPr wrap="square"/>
+                    <a:lstStyle/>
+                    <a:p>
+                      <a:r>
+                        <a:rPr sz="1600" b="1">
+                          <a:solidFill>
+                            <a:srgbClr val="FFFFFF"/>
+                          </a:solidFill>
+                          <a:latin typeface="Myriad Pro 1"/>
+                        </a:rPr>
+                        <a:t>Area</a:t>
+                      </a:r>
+                    </a:p>
+                  </a:txBody>
+                  <a:tcPr marL="91440" marR="91440" marT="36576" marB="36576" anchor="ctr">
+                    <a:solidFill>
+                      <a:srgbClr val="0B3B3E"/>
+                    </a:solidFill>
+                  </a:tcPr>
+                </a:tc>
+                <a:tc>
+                  <a:txBody>
+                    <a:bodyPr wrap="square"/>
+                    <a:lstStyle/>
+                    <a:p>
+                      <a:r>
+                        <a:rPr sz="1600" b="1">
+                          <a:solidFill>
+                            <a:srgbClr val="FFFFFF"/>
+                          </a:solidFill>
+                          <a:latin typeface="Myriad Pro 1"/>
+                        </a:rPr>
+                        <a:t>Risk / Description</a:t>
+                      </a:r>
+                    </a:p>
+                  </a:txBody>
+                  <a:tcPr marL="91440" marR="91440" marT="36576" marB="36576" anchor="ctr">
+                    <a:solidFill>
+                      <a:srgbClr val="0B3B3E"/>
+                    </a:solidFill>
+                  </a:tcPr>
+                </a:tc>
+                <a:tc>
+                  <a:txBody>
+                    <a:bodyPr wrap="square"/>
+                    <a:lstStyle/>
+                    <a:p>
+                      <a:r>
+                        <a:rPr sz="1600" b="1">
+                          <a:solidFill>
+                            <a:srgbClr val="FFFFFF"/>
+                          </a:solidFill>
+                          <a:latin typeface="Myriad Pro 1"/>
+                        </a:rPr>
+                        <a:t>Mitigation Measures</a:t>
+                      </a:r>
+                    </a:p>
+                  </a:txBody>
+                  <a:tcPr marL="91440" marR="91440" marT="36576" marB="36576" anchor="ctr">
+                    <a:solidFill>
+                      <a:srgbClr val="0B3B3E"/>
+                    </a:solidFill>
+                  </a:tcPr>
+                </a:tc>
+              </a:tr>
+              <a:tr h="1371600">
+                <a:tc>
+                  <a:txBody>
+                    <a:bodyPr wrap="square"/>
+                    <a:lstStyle/>
+                    <a:p>
+                      <a:r>
+                        <a:rPr sz="1450" b="0">
+                          <a:solidFill>
+                            <a:srgbClr val="222222"/>
+                          </a:solidFill>
+                          <a:latin typeface="Myriad Pro 1"/>
+                        </a:rPr>
+                        <a:t>DIGITAL / TECHNOLOGY</a:t>
+                      </a:r>
+                    </a:p>
+                  </a:txBody>
+                  <a:tcPr marL="91440" marR="91440" marT="36576" marB="36576" anchor="ctr">
+                    <a:solidFill>
+                      <a:srgbClr val="FFFFFF"/>
+                    </a:solidFill>
+                  </a:tcPr>
+                </a:tc>
+                <a:tc>
+                  <a:txBody>
+                    <a:bodyPr wrap="square"/>
+                    <a:lstStyle/>
+                    <a:p>
+                      <a:r>
+                        <a:rPr sz="1450" b="0">
+                          <a:solidFill>
+                            <a:srgbClr val="222222"/>
+                          </a:solidFill>
+                          <a:latin typeface="Myriad Pro 1"/>
+                        </a:rPr>
+                        <a:t>System downtime; cyber/data-protection risk; limited digital literacy or connectivity among rural clients.</a:t>
+                      </a:r>
+                    </a:p>
+                  </a:txBody>
+                  <a:tcPr marL="91440" marR="91440" marT="36576" marB="36576" anchor="ctr">
+                    <a:solidFill>
+                      <a:srgbClr val="FFFFFF"/>
+                    </a:solidFill>
+                  </a:tcPr>
+                </a:tc>
+                <a:tc>
+                  <a:txBody>
+                    <a:bodyPr wrap="square"/>
+                    <a:lstStyle/>
+                    <a:p>
+                      <a:r>
+                        <a:rPr sz="1450" b="0">
+                          <a:solidFill>
+                            <a:srgbClr val="222222"/>
+                          </a:solidFill>
+                          <a:latin typeface="Myriad Pro 1"/>
+                        </a:rPr>
+                        <a:t>Regular system monitoring &amp; technical support; data protection &amp; access controls; backup/recovery; USSD &amp; accessible channels; client digital-literacy support.</a:t>
+                      </a:r>
+                    </a:p>
+                  </a:txBody>
+                  <a:tcPr marL="91440" marR="91440" marT="36576" marB="36576" anchor="ctr">
+                    <a:solidFill>
+                      <a:srgbClr val="FFFFFF"/>
+                    </a:solidFill>
+                  </a:tcPr>
+                </a:tc>
+              </a:tr>
+              <a:tr h="1371600">
+                <a:tc>
+                  <a:txBody>
+                    <a:bodyPr wrap="square"/>
+                    <a:lstStyle/>
+                    <a:p>
+                      <a:r>
+                        <a:rPr sz="1450" b="0">
+                          <a:solidFill>
+                            <a:srgbClr val="222222"/>
+                          </a:solidFill>
+                          <a:latin typeface="Myriad Pro 1"/>
+                        </a:rPr>
+                        <a:t>FRAUD / COMPLIANCE</a:t>
+                      </a:r>
+                    </a:p>
+                  </a:txBody>
+                  <a:tcPr marL="91440" marR="91440" marT="36576" marB="36576" anchor="ctr">
+                    <a:solidFill>
+                      <a:srgbClr val="F5FAF9"/>
+                    </a:solidFill>
+                  </a:tcPr>
+                </a:tc>
+                <a:tc>
+                  <a:txBody>
+                    <a:bodyPr wrap="square"/>
+                    <a:lstStyle/>
+                    <a:p>
+                      <a:r>
+                        <a:rPr sz="1450" b="0">
+                          <a:solidFill>
+                            <a:srgbClr val="222222"/>
+                          </a:solidFill>
+                          <a:latin typeface="Myriad Pro 1"/>
+                        </a:rPr>
+                        <a:t>Fraud, misuse of funds or unauthorized transactions; non-compliance with regulatory and donor requirements.</a:t>
+                      </a:r>
+                    </a:p>
+                  </a:txBody>
+                  <a:tcPr marL="91440" marR="91440" marT="36576" marB="36576" anchor="ctr">
+                    <a:solidFill>
+                      <a:srgbClr val="F5FAF9"/>
+                    </a:solidFill>
+                  </a:tcPr>
+                </a:tc>
+                <a:tc>
+                  <a:txBody>
+                    <a:bodyPr wrap="square"/>
+                    <a:lstStyle/>
+                    <a:p>
+                      <a:r>
+                        <a:rPr sz="1450" b="0">
+                          <a:solidFill>
+                            <a:srgbClr val="222222"/>
+                          </a:solidFill>
+                          <a:latin typeface="Myriad Pro 1"/>
+                        </a:rPr>
+                        <a:t>Strong internal controls &amp; approval procedures; transaction monitoring &amp; reconciliation; regular audits; staff training on fraud prevention.</a:t>
+                      </a:r>
+                    </a:p>
+                  </a:txBody>
+                  <a:tcPr marL="91440" marR="91440" marT="36576" marB="36576" anchor="ctr">
+                    <a:solidFill>
+                      <a:srgbClr val="F5FAF9"/>
+                    </a:solidFill>
+                  </a:tcPr>
+                </a:tc>
+              </a:tr>
+              <a:tr h="1371600">
+                <a:tc>
+                  <a:txBody>
+                    <a:bodyPr wrap="square"/>
+                    <a:lstStyle/>
+                    <a:p>
+                      <a:r>
+                        <a:rPr sz="1450" b="0">
+                          <a:solidFill>
+                            <a:srgbClr val="222222"/>
+                          </a:solidFill>
+                          <a:latin typeface="Myriad Pro 1"/>
+                        </a:rPr>
+                        <a:t>ENVIRONMENTAL / SOCIAL</a:t>
+                      </a:r>
+                    </a:p>
+                  </a:txBody>
+                  <a:tcPr marL="91440" marR="91440" marT="36576" marB="36576" anchor="ctr">
+                    <a:solidFill>
+                      <a:srgbClr val="FFFFFF"/>
+                    </a:solidFill>
+                  </a:tcPr>
+                </a:tc>
+                <a:tc>
+                  <a:txBody>
+                    <a:bodyPr wrap="square"/>
+                    <a:lstStyle/>
+                    <a:p>
+                      <a:r>
+                        <a:rPr sz="1450" b="0">
+                          <a:solidFill>
+                            <a:srgbClr val="222222"/>
+                          </a:solidFill>
+                          <a:latin typeface="Myriad Pro 1"/>
+                        </a:rPr>
+                        <a:t>Climate events, insecurity or disruption affecting rural businesses; vulnerable clients may lose income after shocks.</a:t>
+                      </a:r>
+                    </a:p>
+                  </a:txBody>
+                  <a:tcPr marL="91440" marR="91440" marT="36576" marB="36576" anchor="ctr">
+                    <a:solidFill>
+                      <a:srgbClr val="FFFFFF"/>
+                    </a:solidFill>
+                  </a:tcPr>
+                </a:tc>
+                <a:tc>
+                  <a:txBody>
+                    <a:bodyPr wrap="square"/>
+                    <a:lstStyle/>
+                    <a:p>
+                      <a:r>
+                        <a:rPr sz="1450" b="0">
+                          <a:solidFill>
+                            <a:srgbClr val="222222"/>
+                          </a:solidFill>
+                          <a:latin typeface="Myriad Pro 1"/>
+                        </a:rPr>
+                        <a:t>Continuous monitoring of operating communities; adaptation of programme activities; diversification of client economic activities; community-based support.</a:t>
+                      </a:r>
+                    </a:p>
+                  </a:txBody>
+                  <a:tcPr marL="91440" marR="91440" marT="36576" marB="36576" anchor="ctr">
+                    <a:solidFill>
+                      <a:srgbClr val="FFFFFF"/>
+                    </a:solidFill>
+                  </a:tcPr>
+                </a:tc>
+              </a:tr>
+              <a:tr h="1371600">
+                <a:tc>
+                  <a:txBody>
+                    <a:bodyPr wrap="square"/>
+                    <a:lstStyle/>
+                    <a:p>
+                      <a:r>
+                        <a:rPr sz="1450" b="0">
+                          <a:solidFill>
+                            <a:srgbClr val="222222"/>
+                          </a:solidFill>
+                          <a:latin typeface="Myriad Pro 1"/>
+                        </a:rPr>
+                        <a:t>PARTNERSHIP / DONOR</a:t>
+                      </a:r>
+                    </a:p>
+                  </a:txBody>
+                  <a:tcPr marL="91440" marR="91440" marT="36576" marB="36576" anchor="ctr">
+                    <a:solidFill>
+                      <a:srgbClr val="F5FAF9"/>
+                    </a:solidFill>
+                  </a:tcPr>
+                </a:tc>
+                <a:tc>
+                  <a:txBody>
+                    <a:bodyPr wrap="square"/>
+                    <a:lstStyle/>
+                    <a:p>
+                      <a:r>
+                        <a:rPr sz="1450" b="0">
+                          <a:solidFill>
+                            <a:srgbClr val="222222"/>
+                          </a:solidFill>
+                          <a:latin typeface="Myriad Pro 1"/>
+                        </a:rPr>
+                        <a:t>Dependence on development partners and grant funding; delays in project implementation or donor deliverables.</a:t>
+                      </a:r>
+                    </a:p>
+                  </a:txBody>
+                  <a:tcPr marL="91440" marR="91440" marT="36576" marB="36576" anchor="ctr">
+                    <a:solidFill>
+                      <a:srgbClr val="F5FAF9"/>
+                    </a:solidFill>
+                  </a:tcPr>
+                </a:tc>
+                <a:tc>
+                  <a:txBody>
+                    <a:bodyPr wrap="square"/>
+                    <a:lstStyle/>
+                    <a:p>
+                      <a:r>
+                        <a:rPr sz="1450" b="0">
+                          <a:solidFill>
+                            <a:srgbClr val="222222"/>
+                          </a:solidFill>
+                          <a:latin typeface="Myriad Pro 1"/>
+                        </a:rPr>
+                        <a:t>Regular partner communication &amp; reporting; clear work plans; milestone monitoring; diversification of funding and partnerships.</a:t>
+                      </a:r>
+                    </a:p>
+                  </a:txBody>
+                  <a:tcPr marL="91440" marR="91440" marT="36576" marB="36576" anchor="ctr">
+                    <a:solidFill>
+                      <a:srgbClr val="F5FAF9"/>
+                    </a:solidFill>
+                  </a:tcPr>
+                </a:tc>
+              </a:tr>
+              <a:tr h="1371600">
+                <a:tc>
+                  <a:txBody>
+                    <a:bodyPr wrap="square"/>
+                    <a:lstStyle/>
+                    <a:p>
+                      <a:r>
+                        <a:rPr sz="1450" b="0">
+                          <a:solidFill>
+                            <a:srgbClr val="222222"/>
+                          </a:solidFill>
+                          <a:latin typeface="Myriad Pro 1"/>
+                        </a:rPr>
+                        <a:t>REPUTATION</a:t>
+                      </a:r>
+                    </a:p>
+                  </a:txBody>
+                  <a:tcPr marL="91440" marR="91440" marT="36576" marB="36576" anchor="ctr">
+                    <a:solidFill>
+                      <a:srgbClr val="FFFFFF"/>
+                    </a:solidFill>
+                  </a:tcPr>
+                </a:tc>
+                <a:tc>
+                  <a:txBody>
+                    <a:bodyPr wrap="square"/>
+                    <a:lstStyle/>
+                    <a:p>
+                      <a:r>
+                        <a:rPr sz="1450" b="0">
+                          <a:solidFill>
+                            <a:srgbClr val="222222"/>
+                          </a:solidFill>
+                          <a:latin typeface="Myriad Pro 1"/>
+                        </a:rPr>
+                        <a:t>Poor service delivery or unresolved complaints could affect PEAK's reputation with clients and partners.</a:t>
+                      </a:r>
+                    </a:p>
+                  </a:txBody>
+                  <a:tcPr marL="91440" marR="91440" marT="36576" marB="36576" anchor="ctr">
+                    <a:solidFill>
+                      <a:srgbClr val="FFFFFF"/>
+                    </a:solidFill>
+                  </a:tcPr>
+                </a:tc>
+                <a:tc>
+                  <a:txBody>
+                    <a:bodyPr wrap="square"/>
+                    <a:lstStyle/>
+                    <a:p>
+                      <a:r>
+                        <a:rPr sz="1450" b="0">
+                          <a:solidFill>
+                            <a:srgbClr val="222222"/>
+                          </a:solidFill>
+                          <a:latin typeface="Myriad Pro 1"/>
+                        </a:rPr>
+                        <a:t>Client feedback &amp; complaints mechanisms; regular stakeholder engagement; transparent reporting; prompt resolution of concerns.</a:t>
+                      </a:r>
+                    </a:p>
+                  </a:txBody>
+                  <a:tcPr marL="91440" marR="91440" marT="36576" marB="36576" anchor="ctr">
+                    <a:solidFill>
+                      <a:srgbClr val="FFFFFF"/>
+                    </a:solidFill>
+                  </a:tcPr>
+                </a:tc>
+              </a:tr>
+            </a:tbl>
+          </a:graphicData>
+        </a:graphic>
+      </p:graphicFrame>
+      <p:sp>
+        <p:nvSpPr>
+          <p:cNvPr id="7" name="TextBox 6"/>
+          <p:cNvSpPr txBox="1"/>
+          <p:nvPr/>
+        </p:nvSpPr>
+        <p:spPr>
+          <a:xfrm>
+            <a:off x="713232" y="9829800"/>
+            <a:ext cx="16459200" cy="365760"/>
+          </a:xfrm>
+          <a:prstGeom prst="rect">
+            <a:avLst/>
+          </a:prstGeom>
+          <a:noFill/>
+        </p:spPr>
+        <p:txBody>
+          <a:bodyPr wrap="square" anchor="t" lIns="0" rIns="0" tIns="0" bIns="0">
+            <a:spAutoFit/>
+          </a:bodyPr>
+          <a:lstStyle/>
+          <a:p>
+            <a:pPr algn="l">
+              <a:lnSpc>
+                <a:spcPct val="105000"/>
+              </a:lnSpc>
+            </a:pPr>
+            <a:r>
+              <a:rPr sz="1400" b="0" i="1">
+                <a:solidFill>
+                  <a:srgbClr val="555555"/>
+                </a:solidFill>
+                <a:latin typeface="Myriad Pro 1"/>
+              </a:rPr>
+              <a:t>Risk Assessment I (previous slide) covers Credit, Liquidity/Finance, Market &amp; Currency, and Operational &amp; Compliance.</a:t>
+            </a:r>
+          </a:p>
+        </p:txBody>
+      </p:sp>
+      <p:sp>
+        <p:nvSpPr>
+          <p:cNvPr id="8" name="TextBox 7"/>
+          <p:cNvSpPr txBox="1"/>
+          <p:nvPr/>
+        </p:nvSpPr>
+        <p:spPr>
+          <a:xfrm>
+            <a:off x="13286232" y="128016"/>
+            <a:ext cx="4690872" cy="822960"/>
+          </a:xfrm>
+          <a:prstGeom prst="rect">
+            <a:avLst/>
+          </a:prstGeom>
+          <a:noFill/>
+        </p:spPr>
+        <p:txBody>
+          <a:bodyPr wrap="square" anchor="t" lIns="0" rIns="0" tIns="0" bIns="0">
+            <a:spAutoFit/>
+          </a:bodyPr>
+          <a:lstStyle/>
+          <a:p>
+            <a:pPr algn="l">
+              <a:lnSpc>
+                <a:spcPct val="115000"/>
+              </a:lnSpc>
+            </a:pPr>
+            <a:r>
+              <a:rPr sz="3800" b="0" i="0">
+                <a:solidFill>
+                  <a:srgbClr val="57B6B2"/>
+                </a:solidFill>
+                <a:latin typeface="Myriad Pro 1"/>
+              </a:rPr>
+              <a:t>• Time allocated: (2 minutes)</a:t>
             </a:r>
           </a:p>
         </p:txBody>
@@ -4849,6 +11525,50 @@
       </p:sp>
       <p:sp>
         <p:nvSpPr>
+          <p:cNvPr id="11" name="Rectangle 10"/>
+          <p:cNvSpPr/>
+          <p:nvPr/>
+        </p:nvSpPr>
+        <p:spPr>
+          <a:xfrm>
+            <a:off x="541861" y="1424574"/>
+            <a:ext cx="3566160" cy="733863"/>
+          </a:xfrm>
+          <a:prstGeom prst="rect">
+            <a:avLst/>
+          </a:prstGeom>
+          <a:solidFill>
+            <a:srgbClr val="57B6B2"/>
+          </a:solidFill>
+          <a:ln>
+            <a:noFill/>
+          </a:ln>
+          <a:effectLst/>
+        </p:spPr>
+        <p:style>
+          <a:lnRef idx="1">
+            <a:schemeClr val="accent1"/>
+          </a:lnRef>
+          <a:fillRef idx="3">
+            <a:schemeClr val="accent1"/>
+          </a:fillRef>
+          <a:effectRef idx="2">
+            <a:schemeClr val="accent1"/>
+          </a:effectRef>
+          <a:fontRef idx="minor">
+            <a:schemeClr val="lt1"/>
+          </a:fontRef>
+        </p:style>
+        <p:txBody>
+          <a:bodyPr rtlCol="0" anchor="ctr"/>
+          <a:lstStyle/>
+          <a:p>
+            <a:pPr algn="ctr"/>
+          </a:p>
+        </p:txBody>
+      </p:sp>
+      <p:sp>
+        <p:nvSpPr>
           <p:cNvPr id="7" name="TextBox 7"/>
           <p:cNvSpPr txBox="1"/>
           <p:nvPr/>
@@ -4856,7 +11576,7 @@
         <p:spPr>
           <a:xfrm>
             <a:off x="711491" y="1364771"/>
-            <a:ext cx="2131980" cy="941451"/>
+            <a:ext cx="3291840" cy="941451"/>
           </a:xfrm>
           <a:prstGeom prst="rect">
             <a:avLst/>
@@ -4920,7 +11640,7 @@
                 </a:solidFill>
                 <a:latin typeface="Myriad Pro 1"/>
               </a:rPr>
-              <a:t>Time allocated: (3 minutes)</a:t>
+              <a:t>Time allocated: (1 minute)</a:t>
             </a:r>
           </a:p>
         </p:txBody>
@@ -5270,7 +11990,7 @@
                 </a:solidFill>
                 <a:latin typeface="Myriad Pro 1"/>
               </a:rPr>
-              <a:t>Governed by a 5-member Board of Trustees; led day-to-day by CEO Joe Onyeabor and Executive Director Abiodun Yusuph.</a:t>
+              <a:t>Governed by a Board of Trustees; led day-to-day by CEO Joe Onyeabor and Executive Director Abiodun Yusuph.</a:t>
             </a:r>
           </a:p>
           <a:p>
@@ -5302,7 +12022,7 @@
         <p:spPr>
           <a:xfrm>
             <a:off x="711491" y="1364771"/>
-            <a:ext cx="10058400" cy="1215771"/>
+            <a:ext cx="10058400" cy="1078611"/>
           </a:xfrm>
           <a:prstGeom prst="rect">
             <a:avLst/>
@@ -5346,7 +12066,7 @@
         <p:spPr>
           <a:xfrm>
             <a:off x="711491" y="1364771"/>
-            <a:ext cx="3290753" cy="1215771"/>
+            <a:ext cx="9601200" cy="1078611"/>
           </a:xfrm>
           <a:prstGeom prst="rect">
             <a:avLst/>
@@ -5410,7 +12130,7 @@
                 </a:solidFill>
                 <a:latin typeface="Myriad Pro 1"/>
               </a:rPr>
-              <a:t>Time allocated: (2 minutes)</a:t>
+              <a:t>Time allocated: (1 minute)</a:t>
             </a:r>
           </a:p>
         </p:txBody>
@@ -5682,7 +12402,7 @@
               </a:lnSpc>
             </a:pPr>
             <a:r>
-              <a:rPr lang="en-US" sz="2500">
+              <a:rPr lang="en-US" sz="2200">
                 <a:solidFill>
                   <a:srgbClr val="57B6B2"/>
                 </a:solidFill>
@@ -5700,7 +12420,7 @@
               <a:buChar char="•"/>
             </a:pPr>
             <a:r>
-              <a:rPr lang="en-US" sz="2500">
+              <a:rPr lang="en-US" sz="2200">
                 <a:solidFill>
                   <a:srgbClr val="57B6B2"/>
                 </a:solidFill>
@@ -5718,13 +12438,13 @@
               <a:buChar char="•"/>
             </a:pPr>
             <a:r>
-              <a:rPr lang="en-US" sz="2500">
+              <a:rPr lang="en-US" sz="2200">
                 <a:solidFill>
                   <a:srgbClr val="57B6B2"/>
                 </a:solidFill>
                 <a:latin typeface="Myriad Pro 1"/>
               </a:rPr>
-              <a:t>Prior PW support: a $100,000 loan facility and a $20,000 LEAP Grant.</a:t>
+              <a:t>Prior PW support: a $100,000 loan facility and a $20,000 Digital LEAP Grant — both fully repaid / fully utilized, no issues recorded.</a:t>
             </a:r>
           </a:p>
           <a:p>
@@ -5736,13 +12456,13 @@
               <a:buChar char="⚬"/>
             </a:pPr>
             <a:r>
-              <a:rPr lang="en-US" sz="2500">
+              <a:rPr lang="en-US" sz="2200">
                 <a:solidFill>
                   <a:srgbClr val="57B6B2"/>
                 </a:solidFill>
                 <a:latin typeface="Myriad Pro 1"/>
               </a:rPr>
-              <a:t>Both were fully repaid / fully utilized, with no issues recorded on either facility.</a:t>
+              <a:t>2025 was the year PEAK's lending operation turned: the loan book grew 54% to $217,485, after being flat across 2023–2024.</a:t>
             </a:r>
           </a:p>
           <a:p>
@@ -5754,13 +12474,13 @@
               <a:buChar char="•"/>
             </a:pPr>
             <a:r>
-              <a:rPr lang="en-US" sz="2500">
+              <a:rPr lang="en-US" sz="2200">
                 <a:solidFill>
                   <a:srgbClr val="57B6B2"/>
                 </a:solidFill>
                 <a:latin typeface="Myriad Pro 1"/>
               </a:rPr>
-              <a:t>2024 audited results: total assets up to $391,763 (+67%), surplus up to $84,600 (+300%).</a:t>
+              <a:t>Total assets up 26% to $495,531; accumulated funds up 72% to $176,628.</a:t>
             </a:r>
           </a:p>
           <a:p>
@@ -5772,13 +12492,13 @@
               <a:buChar char="•"/>
             </a:pPr>
             <a:r>
-              <a:rPr lang="en-US" sz="2500">
+              <a:rPr lang="en-US" sz="2200">
                 <a:solidFill>
                   <a:srgbClr val="57B6B2"/>
                 </a:solidFill>
                 <a:latin typeface="Myriad Pro 1"/>
               </a:rPr>
-              <a:t>Growth on a lower cost base — administrative expenses fell from $88,944 to $69,002.</a:t>
+              <a:t>Leverage improved from 2.3x accumulated funds (end-2024) to 1.4x (end-2025) — this facility would take it to ~3x, vs ~5x had it been granted a year ago.</a:t>
             </a:r>
           </a:p>
         </p:txBody>
@@ -5792,7 +12512,7 @@
         <p:spPr>
           <a:xfrm>
             <a:off x="715583" y="1364771"/>
-            <a:ext cx="10058400" cy="1215771"/>
+            <a:ext cx="10058400" cy="1078611"/>
           </a:xfrm>
           <a:prstGeom prst="rect">
             <a:avLst/>
@@ -5836,7 +12556,7 @@
         <p:spPr>
           <a:xfrm>
             <a:off x="715583" y="1364771"/>
-            <a:ext cx="5208031" cy="1215771"/>
+            <a:ext cx="9601200" cy="1078611"/>
           </a:xfrm>
           <a:prstGeom prst="rect">
             <a:avLst/>
@@ -5900,7 +12620,7 @@
                 </a:solidFill>
                 <a:latin typeface="Myriad Pro 1"/>
               </a:rPr>
-              <a:t>Time allocated: (3 minutes)</a:t>
+              <a:t>Time allocated: (2 minutes)</a:t>
             </a:r>
           </a:p>
         </p:txBody>
@@ -6172,7 +12892,7 @@
               </a:lnSpc>
             </a:pPr>
             <a:r>
-              <a:rPr lang="en-US" sz="2800">
+              <a:rPr lang="en-US" sz="2600">
                 <a:solidFill>
                   <a:srgbClr val="57B6B2"/>
                 </a:solidFill>
@@ -6190,13 +12910,13 @@
               <a:buChar char="•"/>
             </a:pPr>
             <a:r>
-              <a:rPr lang="en-US" sz="2800">
+              <a:rPr lang="en-US" sz="2600">
                 <a:solidFill>
                   <a:srgbClr val="57B6B2"/>
                 </a:solidFill>
                 <a:latin typeface="Myriad Pro 1"/>
               </a:rPr>
-              <a:t>PM Jeremiah Akoyere: “PEAK did what it said it would do with the first cycle — the strongest case I can make for a second.”</a:t>
+              <a:t>PM Jeremiah Akoyere: “PEAK has repaid PW once already, has the governance and staffing to carry a facility of this size, and its credit discipline is documented on evidence.”</a:t>
             </a:r>
           </a:p>
           <a:p>
@@ -6208,7 +12928,7 @@
               <a:buChar char="•"/>
             </a:pPr>
             <a:r>
-              <a:rPr lang="en-US" sz="2800">
+              <a:rPr lang="en-US" sz="2600">
                 <a:solidFill>
                   <a:srgbClr val="57B6B2"/>
                 </a:solidFill>
@@ -6228,7 +12948,7 @@
         <p:spPr>
           <a:xfrm>
             <a:off x="715583" y="1364771"/>
-            <a:ext cx="10058400" cy="1215771"/>
+            <a:ext cx="10058400" cy="1078611"/>
           </a:xfrm>
           <a:prstGeom prst="rect">
             <a:avLst/>
@@ -6272,7 +12992,7 @@
         <p:spPr>
           <a:xfrm>
             <a:off x="715583" y="1364771"/>
-            <a:ext cx="5208031" cy="1215771"/>
+            <a:ext cx="9601200" cy="1078611"/>
           </a:xfrm>
           <a:prstGeom prst="rect">
             <a:avLst/>
@@ -6336,7 +13056,7 @@
                 </a:solidFill>
                 <a:latin typeface="Myriad Pro 1"/>
               </a:rPr>
-              <a:t>Time allocated: (2 minutes)</a:t>
+              <a:t>Time allocated: (1 minute)</a:t>
             </a:r>
           </a:p>
         </p:txBody>
@@ -7429,7 +14149,7 @@
         <p:spPr>
           <a:xfrm>
             <a:off x="719525" y="1254092"/>
-            <a:ext cx="10058400" cy="1215771"/>
+            <a:ext cx="10058400" cy="1078611"/>
           </a:xfrm>
           <a:prstGeom prst="rect">
             <a:avLst/>
@@ -7473,7 +14193,7 @@
         <p:spPr>
           <a:xfrm>
             <a:off x="719525" y="1254092"/>
-            <a:ext cx="5655597" cy="1215771"/>
+            <a:ext cx="9601200" cy="1078611"/>
           </a:xfrm>
           <a:prstGeom prst="rect">
             <a:avLst/>
@@ -7537,7 +14257,7 @@
                 </a:solidFill>
                 <a:latin typeface="Myriad Pro 1"/>
               </a:rPr>
-              <a:t>Time allocated: (3 minutes)</a:t>
+              <a:t>Time allocated: (2 minutes)</a:t>
             </a:r>
           </a:p>
         </p:txBody>
@@ -8936,8 +15656,8 @@
         </p:nvSpPr>
         <p:spPr>
           <a:xfrm>
-            <a:off x="12018203" y="4650088"/>
-            <a:ext cx="1427877" cy="493412"/>
+            <a:off x="11652443" y="4650088"/>
+            <a:ext cx="2159397" cy="493412"/>
           </a:xfrm>
           <a:prstGeom prst="rect">
             <a:avLst/>
@@ -9489,7 +16209,7 @@
                 </a:solidFill>
                 <a:latin typeface="Myriad Pro 1"/>
               </a:rPr>
-              <a:t>Time allocated: (4 minutes)</a:t>
+              <a:t>Time allocated: (2 minutes)</a:t>
             </a:r>
           </a:p>
         </p:txBody>
@@ -9734,15 +16454,15 @@
         </p:nvSpPr>
         <p:spPr>
           <a:xfrm>
-            <a:off x="4436435" y="7556403"/>
-            <a:ext cx="3079255" cy="1133492"/>
-          </a:xfrm>
-          <a:prstGeom prst="rect">
-            <a:avLst/>
-          </a:prstGeom>
-        </p:spPr>
-        <p:txBody>
-          <a:bodyPr lIns="0" tIns="0" rIns="0" bIns="0" rtlCol="0" anchor="t">
+            <a:off x="4573595" y="7872983"/>
+            <a:ext cx="9144000" cy="1463040"/>
+          </a:xfrm>
+          <a:prstGeom prst="rect">
+            <a:avLst/>
+          </a:prstGeom>
+        </p:spPr>
+        <p:txBody>
+          <a:bodyPr lIns="0" tIns="0" rIns="0" bIns="0" rtlCol="0" anchor="t" wrap="square">
             <a:noAutofit/>
           </a:bodyPr>
           <a:lstStyle/>
@@ -10121,7 +16841,7 @@
         <p:spPr>
           <a:xfrm>
             <a:off x="699562" y="1396198"/>
-            <a:ext cx="10058400" cy="1215771"/>
+            <a:ext cx="10058400" cy="1078611"/>
           </a:xfrm>
           <a:prstGeom prst="rect">
             <a:avLst/>
@@ -10165,7 +16885,7 @@
         <p:spPr>
           <a:xfrm>
             <a:off x="699562" y="1396198"/>
-            <a:ext cx="6319508" cy="1215771"/>
+            <a:ext cx="9601200" cy="1078611"/>
           </a:xfrm>
           <a:prstGeom prst="rect">
             <a:avLst/>
@@ -10229,7 +16949,7 @@
                 </a:solidFill>
                 <a:latin typeface="Myriad Pro 1"/>
               </a:rPr>
-              <a:t>Time allocated: (4 minutes)</a:t>
+              <a:t>Time allocated: (2 minutes)</a:t>
             </a:r>
           </a:p>
         </p:txBody>
@@ -10483,7 +17203,7 @@
         <p:spPr>
           <a:xfrm>
             <a:off x="709202" y="1361085"/>
-            <a:ext cx="10058400" cy="1215771"/>
+            <a:ext cx="10058400" cy="1078611"/>
           </a:xfrm>
           <a:prstGeom prst="rect">
             <a:avLst/>
@@ -10527,7 +17247,7 @@
         <p:spPr>
           <a:xfrm>
             <a:off x="709202" y="1361085"/>
-            <a:ext cx="4220456" cy="1215771"/>
+            <a:ext cx="9601200" cy="1078611"/>
           </a:xfrm>
           <a:prstGeom prst="rect">
             <a:avLst/>
@@ -10731,7 +17451,7 @@
                 </a:spcBef>
               </a:pPr>
               <a:r>
-                <a:rPr lang="en-US" sz="2000">
+                <a:rPr lang="en-US" sz="1800">
                   <a:solidFill>
                     <a:srgbClr val="FFFFFF"/>
                   </a:solidFill>
@@ -10918,7 +17638,7 @@
                 </a:spcBef>
               </a:pPr>
               <a:r>
-                <a:rPr lang="en-US" sz="2000">
+                <a:rPr lang="en-US" sz="1800">
                   <a:solidFill>
                     <a:srgbClr val="FFFFFF"/>
                   </a:solidFill>
@@ -11105,13 +17825,13 @@
                 </a:spcBef>
               </a:pPr>
               <a:r>
-                <a:rPr lang="en-US" sz="2000">
+                <a:rPr lang="en-US" sz="1800">
                   <a:solidFill>
                     <a:srgbClr val="FFFFFF"/>
                   </a:solidFill>
                   <a:latin typeface="Myriad Pro 1"/>
                 </a:rPr>
-                <a:t>MARKET &amp; CURRENCY — inflation and naira volatility.</a:t>
+                <a:t>MARKET &amp; CURRENCY — inflation, naira swings (both ways).</a:t>
               </a:r>
             </a:p>
           </p:txBody>
@@ -11292,7 +18012,7 @@
                 </a:spcBef>
               </a:pPr>
               <a:r>
-                <a:rPr lang="en-US" sz="2000">
+                <a:rPr lang="en-US" sz="1800">
                   <a:solidFill>
                     <a:srgbClr val="FFFFFF"/>
                   </a:solidFill>
@@ -12027,7 +18747,7 @@
                 </a:solidFill>
                 <a:latin typeface="Myriad Pro 1"/>
               </a:rPr>
-              <a:t>Time allocated: (4 minutes)</a:t>
+              <a:t>Time allocated: (2 minutes)</a:t>
             </a:r>
           </a:p>
         </p:txBody>
